--- a/Lesson-3/Assignment-1/L3-A1-PPT.pptx
+++ b/Lesson-3/Assignment-1/L3-A1-PPT.pptx
@@ -5,7 +5,7 @@
     <p:sldMasterId id="2147483699" r:id="rId1"/>
   </p:sldMasterIdLst>
   <p:notesMasterIdLst>
-    <p:notesMasterId r:id="rId12"/>
+    <p:notesMasterId r:id="rId13"/>
   </p:notesMasterIdLst>
   <p:sldIdLst>
     <p:sldId id="256" r:id="rId2"/>
@@ -13,11 +13,12 @@
     <p:sldId id="258" r:id="rId4"/>
     <p:sldId id="259" r:id="rId5"/>
     <p:sldId id="260" r:id="rId6"/>
-    <p:sldId id="261" r:id="rId7"/>
-    <p:sldId id="262" r:id="rId8"/>
-    <p:sldId id="264" r:id="rId9"/>
-    <p:sldId id="265" r:id="rId10"/>
-    <p:sldId id="266" r:id="rId11"/>
+    <p:sldId id="267" r:id="rId7"/>
+    <p:sldId id="261" r:id="rId8"/>
+    <p:sldId id="262" r:id="rId9"/>
+    <p:sldId id="264" r:id="rId10"/>
+    <p:sldId id="265" r:id="rId11"/>
+    <p:sldId id="266" r:id="rId12"/>
   </p:sldIdLst>
   <p:sldSz cx="12192000" cy="6858000"/>
   <p:notesSz cx="6858000" cy="9144000"/>
@@ -116,6 +117,11 @@
       </a:defRPr>
     </a:lvl9pPr>
   </p:defaultTextStyle>
+  <p:extLst>
+    <p:ext uri="{EFAFB233-063F-42B5-8137-9DF3F51BA10A}">
+      <p15:sldGuideLst xmlns:p15="http://schemas.microsoft.com/office/powerpoint/2012/main"/>
+    </p:ext>
+  </p:extLst>
 </p:presentation>
 </file>
 
@@ -3110,7 +3116,7 @@
           <a:p>
             <a:fld id="{50376E3E-9B73-4263-8AB6-0ED0BDDF8EE0}" type="datetimeFigureOut">
               <a:rPr lang="en-IN" smtClean="0"/>
-              <a:t>09-05-2026</a:t>
+              <a:t>12-05-2026</a:t>
             </a:fld>
             <a:endParaRPr lang="en-IN"/>
           </a:p>
@@ -3611,7 +3617,7 @@
           <a:p>
             <a:fld id="{F7021451-1387-4CA6-816F-3879F97B5CBC}" type="slidenum">
               <a:rPr lang="en-US"/>
-              <a:t>6</a:t>
+              <a:t>7</a:t>
             </a:fld>
             <a:endParaRPr lang="en-US"/>
           </a:p>
@@ -3695,7 +3701,7 @@
           <a:p>
             <a:fld id="{F7021451-1387-4CA6-816F-3879F97B5CBC}" type="slidenum">
               <a:rPr lang="en-US"/>
-              <a:t>7</a:t>
+              <a:t>8</a:t>
             </a:fld>
             <a:endParaRPr lang="en-US"/>
           </a:p>
@@ -3779,7 +3785,7 @@
           <a:p>
             <a:fld id="{F7021451-1387-4CA6-816F-3879F97B5CBC}" type="slidenum">
               <a:rPr lang="en-US"/>
-              <a:t>8</a:t>
+              <a:t>9</a:t>
             </a:fld>
             <a:endParaRPr lang="en-US"/>
           </a:p>
@@ -3863,7 +3869,7 @@
           <a:p>
             <a:fld id="{F7021451-1387-4CA6-816F-3879F97B5CBC}" type="slidenum">
               <a:rPr lang="en-US"/>
-              <a:t>9</a:t>
+              <a:t>10</a:t>
             </a:fld>
             <a:endParaRPr lang="en-US"/>
           </a:p>
@@ -4035,7 +4041,7 @@
           <a:p>
             <a:fld id="{C128FA71-3A18-48C0-980F-4B68F7F63042}" type="datetime1">
               <a:rPr lang="en-US" smtClean="0"/>
-              <a:t>5/9/2026</a:t>
+              <a:t>5/12/2026</a:t>
             </a:fld>
             <a:endParaRPr lang="en-US"/>
           </a:p>
@@ -4243,7 +4249,7 @@
           <a:p>
             <a:fld id="{7104EDB3-C0E8-45F8-9E1D-1B6C8D1880C0}" type="datetime1">
               <a:rPr lang="en-US" smtClean="0"/>
-              <a:t>5/9/2026</a:t>
+              <a:t>5/12/2026</a:t>
             </a:fld>
             <a:endParaRPr lang="en-US"/>
           </a:p>
@@ -4453,7 +4459,7 @@
           <a:p>
             <a:fld id="{9CF0EC4B-54ED-4041-B552-9BA760FA3DBA}" type="datetime1">
               <a:rPr lang="en-US" smtClean="0"/>
-              <a:t>5/9/2026</a:t>
+              <a:t>5/12/2026</a:t>
             </a:fld>
             <a:endParaRPr lang="en-US"/>
           </a:p>
@@ -4686,7 +4692,7 @@
           <a:p>
             <a:fld id="{51C1210E-201E-4473-82AC-2466F5386C38}" type="datetime1">
               <a:rPr lang="en-US" smtClean="0"/>
-              <a:t>5/9/2026</a:t>
+              <a:t>5/12/2026</a:t>
             </a:fld>
             <a:endParaRPr lang="en-US"/>
           </a:p>
@@ -4964,7 +4970,7 @@
           <a:p>
             <a:fld id="{B01EA198-6CAB-4B8F-B93F-1F9C8C4B6CE7}" type="datetime1">
               <a:rPr lang="en-US" smtClean="0"/>
-              <a:t>5/9/2026</a:t>
+              <a:t>5/12/2026</a:t>
             </a:fld>
             <a:endParaRPr lang="en-US"/>
           </a:p>
@@ -5236,7 +5242,7 @@
           <a:p>
             <a:fld id="{CA06041F-4525-44D5-AA4F-332294BF1F56}" type="datetime1">
               <a:rPr lang="en-US" smtClean="0"/>
-              <a:t>5/9/2026</a:t>
+              <a:t>5/12/2026</a:t>
             </a:fld>
             <a:endParaRPr lang="en-US"/>
           </a:p>
@@ -5660,7 +5666,7 @@
           <a:p>
             <a:fld id="{F9557091-BBDF-4EB9-BA6B-2BB67AC4FC0F}" type="datetime1">
               <a:rPr lang="en-US" smtClean="0"/>
-              <a:t>5/9/2026</a:t>
+              <a:t>5/12/2026</a:t>
             </a:fld>
             <a:endParaRPr lang="en-US"/>
           </a:p>
@@ -5801,7 +5807,7 @@
           <a:p>
             <a:fld id="{2D6B226B-77A6-410C-9796-083F278E0125}" type="datetime1">
               <a:rPr lang="en-US" smtClean="0"/>
-              <a:t>5/9/2026</a:t>
+              <a:t>5/12/2026</a:t>
             </a:fld>
             <a:endParaRPr lang="en-US"/>
           </a:p>
@@ -5914,7 +5920,7 @@
           <a:p>
             <a:fld id="{A23A578B-D289-4C40-8593-3D356C49DA58}" type="datetime1">
               <a:rPr lang="en-US" smtClean="0"/>
-              <a:t>5/9/2026</a:t>
+              <a:t>5/12/2026</a:t>
             </a:fld>
             <a:endParaRPr lang="en-US"/>
           </a:p>
@@ -6233,7 +6239,7 @@
           <a:p>
             <a:fld id="{713DFAE3-14DB-48A7-A80F-80DDB072CE3D}" type="datetime1">
               <a:rPr lang="en-US" smtClean="0"/>
-              <a:t>5/9/2026</a:t>
+              <a:t>5/12/2026</a:t>
             </a:fld>
             <a:endParaRPr lang="en-US"/>
           </a:p>
@@ -6527,7 +6533,7 @@
           <a:p>
             <a:fld id="{92C5EAEF-6478-4102-8F5D-A5FE9FC97ACB}" type="datetime1">
               <a:rPr lang="en-US" smtClean="0"/>
-              <a:t>5/9/2026</a:t>
+              <a:t>5/12/2026</a:t>
             </a:fld>
             <a:endParaRPr lang="en-US"/>
           </a:p>
@@ -6768,7 +6774,7 @@
           <a:p>
             <a:fld id="{67F45AC6-C491-4585-A584-9CE2AF7D5500}" type="datetime1">
               <a:rPr lang="en-US" smtClean="0"/>
-              <a:t>5/9/2026</a:t>
+              <a:t>5/12/2026</a:t>
             </a:fld>
             <a:endParaRPr lang="en-US"/>
           </a:p>
@@ -7435,6 +7441,632 @@
 <file path=ppt/slides/slide10.xml><?xml version="1.0" encoding="utf-8"?>
 <p:sld xmlns:a="http://schemas.openxmlformats.org/drawingml/2006/main" xmlns:r="http://schemas.openxmlformats.org/officeDocument/2006/relationships" xmlns:p="http://schemas.openxmlformats.org/presentationml/2006/main">
   <p:cSld>
+    <p:spTree>
+      <p:nvGrpSpPr>
+        <p:cNvPr id="1" name=""/>
+        <p:cNvGrpSpPr/>
+        <p:nvPr/>
+      </p:nvGrpSpPr>
+      <p:grpSpPr>
+        <a:xfrm>
+          <a:off x="0" y="0"/>
+          <a:ext cx="0" cy="0"/>
+          <a:chOff x="0" y="0"/>
+          <a:chExt cx="0" cy="0"/>
+        </a:xfrm>
+      </p:grpSpPr>
+      <p:sp>
+        <p:nvSpPr>
+          <p:cNvPr id="2" name="Shape 0"/>
+          <p:cNvSpPr/>
+          <p:nvPr/>
+        </p:nvSpPr>
+        <p:spPr>
+          <a:xfrm>
+            <a:off x="0" y="0"/>
+            <a:ext cx="12192000" cy="914400"/>
+          </a:xfrm>
+          <a:prstGeom prst="rect">
+            <a:avLst/>
+          </a:prstGeom>
+          <a:solidFill>
+            <a:srgbClr val="0E5FA0"/>
+          </a:solidFill>
+          <a:ln/>
+        </p:spPr>
+        <p:txBody>
+          <a:bodyPr/>
+          <a:lstStyle/>
+          <a:p>
+            <a:endParaRPr lang="en-IN" sz="2400"/>
+          </a:p>
+        </p:txBody>
+      </p:sp>
+      <p:sp>
+        <p:nvSpPr>
+          <p:cNvPr id="3" name="Text 1"/>
+          <p:cNvSpPr/>
+          <p:nvPr/>
+        </p:nvSpPr>
+        <p:spPr>
+          <a:xfrm>
+            <a:off x="487680" y="0"/>
+            <a:ext cx="10972800" cy="914400"/>
+          </a:xfrm>
+          <a:prstGeom prst="rect">
+            <a:avLst/>
+          </a:prstGeom>
+          <a:noFill/>
+          <a:ln/>
+        </p:spPr>
+        <p:txBody>
+          <a:bodyPr wrap="square" rtlCol="0" anchor="ctr"/>
+          <a:lstStyle/>
+          <a:p>
+            <a:r>
+              <a:rPr lang="en-US" sz="1733" b="1" kern="0" spc="267" dirty="0">
+                <a:solidFill>
+                  <a:srgbClr val="FFFFFF"/>
+                </a:solidFill>
+              </a:rPr>
+              <a:t>WHEN TO USE WHICH APPROACH</a:t>
+            </a:r>
+            <a:endParaRPr lang="en-US" sz="1733" dirty="0"/>
+          </a:p>
+        </p:txBody>
+      </p:sp>
+      <p:sp>
+        <p:nvSpPr>
+          <p:cNvPr id="4" name="Text 2"/>
+          <p:cNvSpPr/>
+          <p:nvPr/>
+        </p:nvSpPr>
+        <p:spPr>
+          <a:xfrm>
+            <a:off x="487680" y="1072896"/>
+            <a:ext cx="10972800" cy="524256"/>
+          </a:xfrm>
+          <a:prstGeom prst="rect">
+            <a:avLst/>
+          </a:prstGeom>
+          <a:noFill/>
+          <a:ln/>
+        </p:spPr>
+        <p:txBody>
+          <a:bodyPr wrap="square" rtlCol="0" anchor="ctr"/>
+          <a:lstStyle/>
+          <a:p>
+            <a:r>
+              <a:rPr lang="en-US" sz="2533" b="1" dirty="0">
+                <a:solidFill>
+                  <a:srgbClr val="00B4D8"/>
+                </a:solidFill>
+              </a:rPr>
+              <a:t>Choosing the Right Tool for the Right Job</a:t>
+            </a:r>
+            <a:endParaRPr lang="en-US" sz="2533" dirty="0"/>
+          </a:p>
+        </p:txBody>
+      </p:sp>
+      <p:sp>
+        <p:nvSpPr>
+          <p:cNvPr id="5" name="Shape 3"/>
+          <p:cNvSpPr/>
+          <p:nvPr/>
+        </p:nvSpPr>
+        <p:spPr>
+          <a:xfrm>
+            <a:off x="426720" y="1804416"/>
+            <a:ext cx="5364480" cy="4693920"/>
+          </a:xfrm>
+          <a:prstGeom prst="rect">
+            <a:avLst/>
+          </a:prstGeom>
+          <a:solidFill>
+            <a:schemeClr val="accent2">
+              <a:lumMod val="75000"/>
+            </a:schemeClr>
+          </a:solidFill>
+          <a:ln/>
+        </p:spPr>
+        <p:txBody>
+          <a:bodyPr/>
+          <a:lstStyle/>
+          <a:p>
+            <a:endParaRPr lang="en-IN" sz="2400"/>
+          </a:p>
+        </p:txBody>
+      </p:sp>
+      <p:sp>
+        <p:nvSpPr>
+          <p:cNvPr id="6" name="Shape 4"/>
+          <p:cNvSpPr/>
+          <p:nvPr/>
+        </p:nvSpPr>
+        <p:spPr>
+          <a:xfrm>
+            <a:off x="426720" y="1804416"/>
+            <a:ext cx="5364480" cy="633984"/>
+          </a:xfrm>
+          <a:prstGeom prst="rect">
+            <a:avLst/>
+          </a:prstGeom>
+          <a:solidFill>
+            <a:schemeClr val="tx1"/>
+          </a:solidFill>
+          <a:ln/>
+        </p:spPr>
+        <p:txBody>
+          <a:bodyPr/>
+          <a:lstStyle/>
+          <a:p>
+            <a:endParaRPr lang="en-IN" sz="2400"/>
+          </a:p>
+        </p:txBody>
+      </p:sp>
+      <p:sp>
+        <p:nvSpPr>
+          <p:cNvPr id="7" name="Text 5"/>
+          <p:cNvSpPr/>
+          <p:nvPr/>
+        </p:nvSpPr>
+        <p:spPr>
+          <a:xfrm>
+            <a:off x="609600" y="1804416"/>
+            <a:ext cx="5059680" cy="633984"/>
+          </a:xfrm>
+          <a:prstGeom prst="rect">
+            <a:avLst/>
+          </a:prstGeom>
+          <a:noFill/>
+          <a:ln/>
+        </p:spPr>
+        <p:txBody>
+          <a:bodyPr wrap="square" rtlCol="0" anchor="ctr"/>
+          <a:lstStyle/>
+          <a:p>
+            <a:r>
+              <a:rPr lang="en-US" sz="1733" b="1" dirty="0">
+                <a:solidFill>
+                  <a:srgbClr val="FFFFFF"/>
+                </a:solidFill>
+              </a:rPr>
+              <a:t>Use WORKFLOW When:</a:t>
+            </a:r>
+            <a:endParaRPr lang="en-US" sz="1733" dirty="0"/>
+          </a:p>
+        </p:txBody>
+      </p:sp>
+      <p:sp>
+        <p:nvSpPr>
+          <p:cNvPr id="8" name="Text 6"/>
+          <p:cNvSpPr/>
+          <p:nvPr/>
+        </p:nvSpPr>
+        <p:spPr>
+          <a:xfrm>
+            <a:off x="670560" y="2596896"/>
+            <a:ext cx="4937760" cy="548640"/>
+          </a:xfrm>
+          <a:prstGeom prst="rect">
+            <a:avLst/>
+          </a:prstGeom>
+          <a:noFill/>
+          <a:ln/>
+        </p:spPr>
+        <p:txBody>
+          <a:bodyPr wrap="square" rtlCol="0" anchor="ctr"/>
+          <a:lstStyle/>
+          <a:p>
+            <a:r>
+              <a:rPr lang="en-US" sz="1467" dirty="0">
+                <a:solidFill>
+                  <a:srgbClr val="FFFFFF"/>
+                </a:solidFill>
+              </a:rPr>
+              <a:t>✓  Process steps are always the same</a:t>
+            </a:r>
+            <a:endParaRPr lang="en-US" sz="1467" dirty="0"/>
+          </a:p>
+        </p:txBody>
+      </p:sp>
+      <p:sp>
+        <p:nvSpPr>
+          <p:cNvPr id="9" name="Text 7"/>
+          <p:cNvSpPr/>
+          <p:nvPr/>
+        </p:nvSpPr>
+        <p:spPr>
+          <a:xfrm>
+            <a:off x="670560" y="3230880"/>
+            <a:ext cx="4937760" cy="548640"/>
+          </a:xfrm>
+          <a:prstGeom prst="rect">
+            <a:avLst/>
+          </a:prstGeom>
+          <a:noFill/>
+          <a:ln/>
+        </p:spPr>
+        <p:txBody>
+          <a:bodyPr wrap="square" rtlCol="0" anchor="ctr"/>
+          <a:lstStyle/>
+          <a:p>
+            <a:r>
+              <a:rPr lang="en-US" sz="1467" dirty="0">
+                <a:solidFill>
+                  <a:srgbClr val="FFFFFF"/>
+                </a:solidFill>
+              </a:rPr>
+              <a:t>✓  Compliance &amp; audit trail required</a:t>
+            </a:r>
+            <a:endParaRPr lang="en-US" sz="1467" dirty="0"/>
+          </a:p>
+        </p:txBody>
+      </p:sp>
+      <p:sp>
+        <p:nvSpPr>
+          <p:cNvPr id="10" name="Text 8"/>
+          <p:cNvSpPr/>
+          <p:nvPr/>
+        </p:nvSpPr>
+        <p:spPr>
+          <a:xfrm>
+            <a:off x="670560" y="3864864"/>
+            <a:ext cx="4937760" cy="548640"/>
+          </a:xfrm>
+          <a:prstGeom prst="rect">
+            <a:avLst/>
+          </a:prstGeom>
+          <a:noFill/>
+          <a:ln/>
+        </p:spPr>
+        <p:txBody>
+          <a:bodyPr wrap="square" rtlCol="0" anchor="ctr"/>
+          <a:lstStyle/>
+          <a:p>
+            <a:r>
+              <a:rPr lang="en-US" sz="1467" dirty="0">
+                <a:solidFill>
+                  <a:srgbClr val="FFFFFF"/>
+                </a:solidFill>
+              </a:rPr>
+              <a:t>✓  Team is non-technical; needs predictability</a:t>
+            </a:r>
+            <a:endParaRPr lang="en-US" sz="1467" dirty="0"/>
+          </a:p>
+        </p:txBody>
+      </p:sp>
+      <p:sp>
+        <p:nvSpPr>
+          <p:cNvPr id="11" name="Text 9"/>
+          <p:cNvSpPr/>
+          <p:nvPr/>
+        </p:nvSpPr>
+        <p:spPr>
+          <a:xfrm>
+            <a:off x="670560" y="4498848"/>
+            <a:ext cx="4937760" cy="548640"/>
+          </a:xfrm>
+          <a:prstGeom prst="rect">
+            <a:avLst/>
+          </a:prstGeom>
+          <a:noFill/>
+          <a:ln/>
+        </p:spPr>
+        <p:txBody>
+          <a:bodyPr wrap="square" rtlCol="0" anchor="ctr"/>
+          <a:lstStyle/>
+          <a:p>
+            <a:r>
+              <a:rPr lang="en-US" sz="1467" dirty="0">
+                <a:solidFill>
+                  <a:srgbClr val="FFFFFF"/>
+                </a:solidFill>
+              </a:rPr>
+              <a:t>✓  Actions are well-defined and low-risk</a:t>
+            </a:r>
+            <a:endParaRPr lang="en-US" sz="1467" dirty="0"/>
+          </a:p>
+        </p:txBody>
+      </p:sp>
+      <p:sp>
+        <p:nvSpPr>
+          <p:cNvPr id="12" name="Text 10"/>
+          <p:cNvSpPr/>
+          <p:nvPr/>
+        </p:nvSpPr>
+        <p:spPr>
+          <a:xfrm>
+            <a:off x="670560" y="5132832"/>
+            <a:ext cx="4937760" cy="548640"/>
+          </a:xfrm>
+          <a:prstGeom prst="rect">
+            <a:avLst/>
+          </a:prstGeom>
+          <a:noFill/>
+          <a:ln/>
+        </p:spPr>
+        <p:txBody>
+          <a:bodyPr wrap="square" rtlCol="0" anchor="ctr"/>
+          <a:lstStyle/>
+          <a:p>
+            <a:r>
+              <a:rPr lang="en-US" sz="1467" dirty="0">
+                <a:solidFill>
+                  <a:srgbClr val="FFFFFF"/>
+                </a:solidFill>
+              </a:rPr>
+              <a:t>✓  Cost and latency are critical constraints</a:t>
+            </a:r>
+            <a:endParaRPr lang="en-US" sz="1467" dirty="0"/>
+          </a:p>
+        </p:txBody>
+      </p:sp>
+      <p:sp>
+        <p:nvSpPr>
+          <p:cNvPr id="14" name="Shape 12"/>
+          <p:cNvSpPr/>
+          <p:nvPr/>
+        </p:nvSpPr>
+        <p:spPr>
+          <a:xfrm>
+            <a:off x="6400800" y="1804416"/>
+            <a:ext cx="5364480" cy="4693920"/>
+          </a:xfrm>
+          <a:prstGeom prst="rect">
+            <a:avLst/>
+          </a:prstGeom>
+          <a:solidFill>
+            <a:schemeClr val="accent2">
+              <a:lumMod val="75000"/>
+            </a:schemeClr>
+          </a:solidFill>
+          <a:ln/>
+        </p:spPr>
+        <p:txBody>
+          <a:bodyPr/>
+          <a:lstStyle/>
+          <a:p>
+            <a:endParaRPr lang="en-IN" sz="2400"/>
+          </a:p>
+        </p:txBody>
+      </p:sp>
+      <p:sp>
+        <p:nvSpPr>
+          <p:cNvPr id="15" name="Shape 13"/>
+          <p:cNvSpPr/>
+          <p:nvPr/>
+        </p:nvSpPr>
+        <p:spPr>
+          <a:xfrm>
+            <a:off x="6400800" y="1804416"/>
+            <a:ext cx="5364480" cy="633984"/>
+          </a:xfrm>
+          <a:prstGeom prst="rect">
+            <a:avLst/>
+          </a:prstGeom>
+          <a:solidFill>
+            <a:schemeClr val="tx1"/>
+          </a:solidFill>
+          <a:ln/>
+        </p:spPr>
+        <p:txBody>
+          <a:bodyPr/>
+          <a:lstStyle/>
+          <a:p>
+            <a:endParaRPr lang="en-IN" sz="2400"/>
+          </a:p>
+        </p:txBody>
+      </p:sp>
+      <p:sp>
+        <p:nvSpPr>
+          <p:cNvPr id="16" name="Text 14"/>
+          <p:cNvSpPr/>
+          <p:nvPr/>
+        </p:nvSpPr>
+        <p:spPr>
+          <a:xfrm>
+            <a:off x="6583680" y="1804416"/>
+            <a:ext cx="5059680" cy="633984"/>
+          </a:xfrm>
+          <a:prstGeom prst="rect">
+            <a:avLst/>
+          </a:prstGeom>
+          <a:noFill/>
+          <a:ln/>
+        </p:spPr>
+        <p:txBody>
+          <a:bodyPr wrap="square" rtlCol="0" anchor="ctr"/>
+          <a:lstStyle/>
+          <a:p>
+            <a:r>
+              <a:rPr lang="en-US" sz="1733" b="1" dirty="0">
+                <a:solidFill>
+                  <a:srgbClr val="FFFFFF"/>
+                </a:solidFill>
+              </a:rPr>
+              <a:t>Use AI AGENT When:</a:t>
+            </a:r>
+            <a:endParaRPr lang="en-US" sz="1733" dirty="0"/>
+          </a:p>
+        </p:txBody>
+      </p:sp>
+      <p:sp>
+        <p:nvSpPr>
+          <p:cNvPr id="17" name="Text 15"/>
+          <p:cNvSpPr/>
+          <p:nvPr/>
+        </p:nvSpPr>
+        <p:spPr>
+          <a:xfrm>
+            <a:off x="6583680" y="2596896"/>
+            <a:ext cx="4937760" cy="548640"/>
+          </a:xfrm>
+          <a:prstGeom prst="rect">
+            <a:avLst/>
+          </a:prstGeom>
+          <a:noFill/>
+          <a:ln/>
+        </p:spPr>
+        <p:txBody>
+          <a:bodyPr wrap="square" rtlCol="0" anchor="ctr"/>
+          <a:lstStyle/>
+          <a:p>
+            <a:r>
+              <a:rPr lang="en-US" sz="1467" dirty="0">
+                <a:solidFill>
+                  <a:srgbClr val="FFFFFF"/>
+                </a:solidFill>
+              </a:rPr>
+              <a:t>✓  Inputs are variable or unstructured</a:t>
+            </a:r>
+            <a:endParaRPr lang="en-US" sz="1467" dirty="0"/>
+          </a:p>
+        </p:txBody>
+      </p:sp>
+      <p:sp>
+        <p:nvSpPr>
+          <p:cNvPr id="18" name="Text 16"/>
+          <p:cNvSpPr/>
+          <p:nvPr/>
+        </p:nvSpPr>
+        <p:spPr>
+          <a:xfrm>
+            <a:off x="6583680" y="3230880"/>
+            <a:ext cx="4937760" cy="548640"/>
+          </a:xfrm>
+          <a:prstGeom prst="rect">
+            <a:avLst/>
+          </a:prstGeom>
+          <a:noFill/>
+          <a:ln/>
+        </p:spPr>
+        <p:txBody>
+          <a:bodyPr wrap="square" rtlCol="0" anchor="ctr"/>
+          <a:lstStyle/>
+          <a:p>
+            <a:r>
+              <a:rPr lang="en-US" sz="1467" dirty="0">
+                <a:solidFill>
+                  <a:srgbClr val="FFFFFF"/>
+                </a:solidFill>
+              </a:rPr>
+              <a:t>✓  Urgency or context changes dynamically</a:t>
+            </a:r>
+            <a:endParaRPr lang="en-US" sz="1467" dirty="0"/>
+          </a:p>
+        </p:txBody>
+      </p:sp>
+      <p:sp>
+        <p:nvSpPr>
+          <p:cNvPr id="19" name="Text 17"/>
+          <p:cNvSpPr/>
+          <p:nvPr/>
+        </p:nvSpPr>
+        <p:spPr>
+          <a:xfrm>
+            <a:off x="6583680" y="3864864"/>
+            <a:ext cx="4937760" cy="548640"/>
+          </a:xfrm>
+          <a:prstGeom prst="rect">
+            <a:avLst/>
+          </a:prstGeom>
+          <a:noFill/>
+          <a:ln/>
+        </p:spPr>
+        <p:txBody>
+          <a:bodyPr wrap="square" rtlCol="0" anchor="ctr"/>
+          <a:lstStyle/>
+          <a:p>
+            <a:r>
+              <a:rPr lang="en-US" sz="1467" dirty="0">
+                <a:solidFill>
+                  <a:srgbClr val="FFFFFF"/>
+                </a:solidFill>
+              </a:rPr>
+              <a:t>✓  Specialist selection requires reasoning</a:t>
+            </a:r>
+            <a:endParaRPr lang="en-US" sz="1467" dirty="0"/>
+          </a:p>
+        </p:txBody>
+      </p:sp>
+      <p:sp>
+        <p:nvSpPr>
+          <p:cNvPr id="20" name="Text 18"/>
+          <p:cNvSpPr/>
+          <p:nvPr/>
+        </p:nvSpPr>
+        <p:spPr>
+          <a:xfrm>
+            <a:off x="6583680" y="4498848"/>
+            <a:ext cx="4937760" cy="548640"/>
+          </a:xfrm>
+          <a:prstGeom prst="rect">
+            <a:avLst/>
+          </a:prstGeom>
+          <a:noFill/>
+          <a:ln/>
+        </p:spPr>
+        <p:txBody>
+          <a:bodyPr wrap="square" rtlCol="0" anchor="ctr"/>
+          <a:lstStyle/>
+          <a:p>
+            <a:r>
+              <a:rPr lang="en-US" sz="1467" dirty="0">
+                <a:solidFill>
+                  <a:srgbClr val="FFFFFF"/>
+                </a:solidFill>
+              </a:rPr>
+              <a:t>✓  Exceptions are frequent and complex</a:t>
+            </a:r>
+            <a:endParaRPr lang="en-US" sz="1467" dirty="0"/>
+          </a:p>
+        </p:txBody>
+      </p:sp>
+      <p:sp>
+        <p:nvSpPr>
+          <p:cNvPr id="21" name="Text 19"/>
+          <p:cNvSpPr/>
+          <p:nvPr/>
+        </p:nvSpPr>
+        <p:spPr>
+          <a:xfrm>
+            <a:off x="6583680" y="5132832"/>
+            <a:ext cx="4937760" cy="548640"/>
+          </a:xfrm>
+          <a:prstGeom prst="rect">
+            <a:avLst/>
+          </a:prstGeom>
+          <a:noFill/>
+          <a:ln/>
+        </p:spPr>
+        <p:txBody>
+          <a:bodyPr wrap="square" rtlCol="0" anchor="ctr"/>
+          <a:lstStyle/>
+          <a:p>
+            <a:r>
+              <a:rPr lang="en-US" sz="1467" dirty="0">
+                <a:solidFill>
+                  <a:srgbClr val="FFFFFF"/>
+                </a:solidFill>
+              </a:rPr>
+              <a:t>✓  Personalization improves outcomes</a:t>
+            </a:r>
+            <a:endParaRPr lang="en-US" sz="1467" dirty="0"/>
+          </a:p>
+        </p:txBody>
+      </p:sp>
+    </p:spTree>
+  </p:cSld>
+  <p:clrMapOvr>
+    <a:masterClrMapping/>
+  </p:clrMapOvr>
+</p:sld>
+</file>
+
+<file path=ppt/slides/slide11.xml><?xml version="1.0" encoding="utf-8"?>
+<p:sld xmlns:a="http://schemas.openxmlformats.org/drawingml/2006/main" xmlns:r="http://schemas.openxmlformats.org/officeDocument/2006/relationships" xmlns:p="http://schemas.openxmlformats.org/presentationml/2006/main">
+  <p:cSld>
     <p:bg>
       <p:bgPr>
         <a:solidFill>
@@ -10622,7 +11254,7 @@
         <p:spPr>
           <a:xfrm>
             <a:off x="0" y="0"/>
-            <a:ext cx="12192000" cy="914400"/>
+            <a:ext cx="12192000" cy="829056"/>
           </a:xfrm>
           <a:prstGeom prst="rect">
             <a:avLst/>
@@ -10636,7 +11268,7 @@
           <a:bodyPr/>
           <a:lstStyle/>
           <a:p>
-            <a:endParaRPr lang="en-IN" sz="2400"/>
+            <a:endParaRPr lang="en-IN"/>
           </a:p>
         </p:txBody>
       </p:sp>
@@ -10649,7 +11281,7 @@
         <p:spPr>
           <a:xfrm>
             <a:off x="487680" y="0"/>
-            <a:ext cx="10972800" cy="914400"/>
+            <a:ext cx="10972800" cy="829056"/>
           </a:xfrm>
           <a:prstGeom prst="rect">
             <a:avLst/>
@@ -10667,7 +11299,7 @@
                   <a:srgbClr val="FFFFFF"/>
                 </a:solidFill>
               </a:rPr>
-              <a:t>AGENT REASONING IN ACTION</a:t>
+              <a:t>MULTI-AGENT ORCHESTRATION</a:t>
             </a:r>
             <a:endParaRPr lang="en-US" sz="1733" dirty="0"/>
           </a:p>
@@ -10681,8 +11313,8 @@
         </p:nvSpPr>
         <p:spPr>
           <a:xfrm>
-            <a:off x="487680" y="1060704"/>
-            <a:ext cx="10972800" cy="524256"/>
+            <a:off x="0" y="877823"/>
+            <a:ext cx="10972800" cy="463296"/>
           </a:xfrm>
           <a:prstGeom prst="rect">
             <a:avLst/>
@@ -10695,14 +11327,14 @@
           <a:lstStyle/>
           <a:p>
             <a:r>
-              <a:rPr lang="en-US" sz="2400" b="1" dirty="0">
+              <a:rPr lang="en-US" sz="2133" b="1" dirty="0">
                 <a:solidFill>
-                  <a:srgbClr val="0E5FA0"/>
+                  <a:srgbClr val="00B4D8"/>
                 </a:solidFill>
               </a:rPr>
-              <a:t>How the LLM Interprets Patient Input &amp; Makes Decisions</a:t>
-            </a:r>
-            <a:endParaRPr lang="en-US" sz="2400" dirty="0"/>
+              <a:t>How Agents Collaborate to Schedule a Patient</a:t>
+            </a:r>
+            <a:endParaRPr lang="en-US" sz="2133" dirty="0"/>
           </a:p>
         </p:txBody>
       </p:sp>
@@ -10714,69 +11346,238 @@
         </p:nvSpPr>
         <p:spPr>
           <a:xfrm>
-            <a:off x="426720" y="1767840"/>
-            <a:ext cx="5364480" cy="4632960"/>
-          </a:xfrm>
-          <a:prstGeom prst="rect">
+            <a:off x="3947160" y="1341120"/>
+            <a:ext cx="4194048" cy="1243584"/>
+          </a:xfrm>
+          <a:prstGeom prst="ellipse">
             <a:avLst/>
           </a:prstGeom>
           <a:solidFill>
-            <a:srgbClr val="FFFFFF"/>
+            <a:srgbClr val="00B4D8">
+              <a:alpha val="15000"/>
+            </a:srgbClr>
           </a:solidFill>
-          <a:ln/>
-          <a:effectLst>
-            <a:outerShdw blurRad="101600" dist="25400" dir="8100000" algn="bl" rotWithShape="0">
-              <a:srgbClr val="000000">
-                <a:alpha val="9000"/>
-              </a:srgbClr>
-            </a:outerShdw>
-          </a:effectLst>
+          <a:ln w="12700">
+            <a:solidFill>
+              <a:srgbClr val="00B4D8"/>
+            </a:solidFill>
+            <a:prstDash val="solid"/>
+          </a:ln>
         </p:spPr>
         <p:txBody>
           <a:bodyPr/>
           <a:lstStyle/>
           <a:p>
-            <a:endParaRPr lang="en-IN" sz="2400"/>
-          </a:p>
-        </p:txBody>
-      </p:sp>
-      <p:sp>
-        <p:nvSpPr>
-          <p:cNvPr id="6" name="Shape 4"/>
-          <p:cNvSpPr/>
-          <p:nvPr/>
-        </p:nvSpPr>
-        <p:spPr>
-          <a:xfrm>
-            <a:off x="426720" y="1767840"/>
-            <a:ext cx="5364480" cy="609600"/>
+            <a:endParaRPr lang="en-IN"/>
+          </a:p>
+        </p:txBody>
+      </p:sp>
+      <p:sp>
+        <p:nvSpPr>
+          <p:cNvPr id="8" name="Text 6"/>
+          <p:cNvSpPr/>
+          <p:nvPr/>
+        </p:nvSpPr>
+        <p:spPr>
+          <a:xfrm>
+            <a:off x="4059936" y="1487424"/>
+            <a:ext cx="3901440" cy="463296"/>
+          </a:xfrm>
+          <a:prstGeom prst="rect">
+            <a:avLst/>
+          </a:prstGeom>
+          <a:noFill/>
+          <a:ln/>
+        </p:spPr>
+        <p:txBody>
+          <a:bodyPr wrap="square" lIns="0" tIns="0" rIns="0" bIns="0" rtlCol="0" anchor="ctr"/>
+          <a:lstStyle/>
+          <a:p>
+            <a:pPr algn="ctr"/>
+            <a:r>
+              <a:rPr lang="en-US" sz="1600" b="1" dirty="0">
+                <a:solidFill>
+                  <a:srgbClr val="FF0000"/>
+                </a:solidFill>
+              </a:rPr>
+              <a:t>  ORCHESTRATOR AGENT</a:t>
+            </a:r>
+            <a:endParaRPr lang="en-US" sz="1600" dirty="0">
+              <a:solidFill>
+                <a:srgbClr val="FF0000"/>
+              </a:solidFill>
+            </a:endParaRPr>
+          </a:p>
+        </p:txBody>
+      </p:sp>
+      <p:sp>
+        <p:nvSpPr>
+          <p:cNvPr id="9" name="Text 7"/>
+          <p:cNvSpPr/>
+          <p:nvPr/>
+        </p:nvSpPr>
+        <p:spPr>
+          <a:xfrm>
+            <a:off x="4093464" y="2060448"/>
+            <a:ext cx="3901440" cy="316992"/>
+          </a:xfrm>
+          <a:prstGeom prst="rect">
+            <a:avLst/>
+          </a:prstGeom>
+          <a:noFill/>
+          <a:ln/>
+        </p:spPr>
+        <p:txBody>
+          <a:bodyPr wrap="square" lIns="0" tIns="0" rIns="0" bIns="0" rtlCol="0" anchor="ctr"/>
+          <a:lstStyle/>
+          <a:p>
+            <a:pPr algn="ctr"/>
+            <a:r>
+              <a:rPr lang="en-US" sz="1133" dirty="0">
+                <a:solidFill>
+                  <a:srgbClr val="7BA4C8"/>
+                </a:solidFill>
+              </a:rPr>
+              <a:t>Receives patient input . Plans tasks . Delegates to sub-agents</a:t>
+            </a:r>
+            <a:endParaRPr lang="en-US" sz="1133" dirty="0"/>
+          </a:p>
+        </p:txBody>
+      </p:sp>
+      <p:sp>
+        <p:nvSpPr>
+          <p:cNvPr id="10" name="Shape 8"/>
+          <p:cNvSpPr/>
+          <p:nvPr/>
+        </p:nvSpPr>
+        <p:spPr>
+          <a:xfrm>
+            <a:off x="6096000" y="2511552"/>
+            <a:ext cx="0" cy="377952"/>
+          </a:xfrm>
+          <a:prstGeom prst="line">
+            <a:avLst/>
+          </a:prstGeom>
+          <a:noFill/>
+          <a:ln w="19050">
+            <a:solidFill>
+              <a:srgbClr val="00B4D8"/>
+            </a:solidFill>
+            <a:prstDash val="sysDash"/>
+          </a:ln>
+        </p:spPr>
+        <p:txBody>
+          <a:bodyPr/>
+          <a:lstStyle/>
+          <a:p>
+            <a:endParaRPr lang="en-IN"/>
+          </a:p>
+        </p:txBody>
+      </p:sp>
+      <p:sp>
+        <p:nvSpPr>
+          <p:cNvPr id="11" name="Shape 9"/>
+          <p:cNvSpPr/>
+          <p:nvPr/>
+        </p:nvSpPr>
+        <p:spPr>
+          <a:xfrm>
+            <a:off x="1798320" y="2889504"/>
+            <a:ext cx="4297680" cy="0"/>
+          </a:xfrm>
+          <a:prstGeom prst="line">
+            <a:avLst/>
+          </a:prstGeom>
+          <a:noFill/>
+          <a:ln w="19050">
+            <a:solidFill>
+              <a:schemeClr val="tx1"/>
+            </a:solidFill>
+            <a:prstDash val="sysDash"/>
+          </a:ln>
+        </p:spPr>
+        <p:txBody>
+          <a:bodyPr/>
+          <a:lstStyle/>
+          <a:p>
+            <a:endParaRPr lang="en-IN"/>
+          </a:p>
+        </p:txBody>
+      </p:sp>
+      <p:sp>
+        <p:nvSpPr>
+          <p:cNvPr id="12" name="Shape 10"/>
+          <p:cNvSpPr/>
+          <p:nvPr/>
+        </p:nvSpPr>
+        <p:spPr>
+          <a:xfrm>
+            <a:off x="1798320" y="2889504"/>
+            <a:ext cx="0" cy="329184"/>
+          </a:xfrm>
+          <a:prstGeom prst="line">
+            <a:avLst/>
+          </a:prstGeom>
+          <a:noFill/>
+          <a:ln w="25400">
+            <a:solidFill>
+              <a:schemeClr val="tx1"/>
+            </a:solidFill>
+            <a:prstDash val="solid"/>
+          </a:ln>
+        </p:spPr>
+        <p:txBody>
+          <a:bodyPr/>
+          <a:lstStyle/>
+          <a:p>
+            <a:endParaRPr lang="en-IN"/>
+          </a:p>
+        </p:txBody>
+      </p:sp>
+      <p:sp>
+        <p:nvSpPr>
+          <p:cNvPr id="14" name="Shape 12"/>
+          <p:cNvSpPr/>
+          <p:nvPr/>
+        </p:nvSpPr>
+        <p:spPr>
+          <a:xfrm>
+            <a:off x="243840" y="3230880"/>
+            <a:ext cx="3108960" cy="877824"/>
           </a:xfrm>
           <a:prstGeom prst="rect">
             <a:avLst/>
           </a:prstGeom>
           <a:solidFill>
-            <a:srgbClr val="06A77D"/>
+            <a:srgbClr val="E63946">
+              <a:alpha val="18000"/>
+            </a:srgbClr>
           </a:solidFill>
-          <a:ln/>
+          <a:ln w="19050">
+            <a:solidFill>
+              <a:schemeClr val="tx1"/>
+            </a:solidFill>
+            <a:prstDash val="solid"/>
+          </a:ln>
         </p:spPr>
         <p:txBody>
           <a:bodyPr/>
           <a:lstStyle/>
           <a:p>
-            <a:endParaRPr lang="en-IN" sz="2400"/>
-          </a:p>
-        </p:txBody>
-      </p:sp>
-      <p:sp>
-        <p:nvSpPr>
-          <p:cNvPr id="7" name="Text 5"/>
-          <p:cNvSpPr/>
-          <p:nvPr/>
-        </p:nvSpPr>
-        <p:spPr>
-          <a:xfrm>
-            <a:off x="487680" y="1767840"/>
-            <a:ext cx="5242560" cy="609600"/>
+            <a:endParaRPr lang="en-IN"/>
+          </a:p>
+        </p:txBody>
+      </p:sp>
+      <p:sp>
+        <p:nvSpPr>
+          <p:cNvPr id="16" name="Text 14"/>
+          <p:cNvSpPr/>
+          <p:nvPr/>
+        </p:nvSpPr>
+        <p:spPr>
+          <a:xfrm>
+            <a:off x="304801" y="3236976"/>
+            <a:ext cx="2865120" cy="402336"/>
           </a:xfrm>
           <a:prstGeom prst="rect">
             <a:avLst/>
@@ -10788,13 +11589,1363 @@
           <a:bodyPr wrap="square" rtlCol="0" anchor="ctr"/>
           <a:lstStyle/>
           <a:p>
+            <a:r>
+              <a:rPr lang="en-US" sz="1467" b="1" dirty="0">
+                <a:solidFill>
+                  <a:srgbClr val="FFFFFF"/>
+                </a:solidFill>
+              </a:rPr>
+              <a:t>  TRIAGE AGENT</a:t>
+            </a:r>
+            <a:endParaRPr lang="en-US" sz="1467" dirty="0"/>
+          </a:p>
+        </p:txBody>
+      </p:sp>
+      <p:sp>
+        <p:nvSpPr>
+          <p:cNvPr id="17" name="Text 15"/>
+          <p:cNvSpPr/>
+          <p:nvPr/>
+        </p:nvSpPr>
+        <p:spPr>
+          <a:xfrm>
+            <a:off x="365760" y="3572256"/>
+            <a:ext cx="2865120" cy="365760"/>
+          </a:xfrm>
+          <a:prstGeom prst="rect">
+            <a:avLst/>
+          </a:prstGeom>
+          <a:noFill/>
+          <a:ln/>
+        </p:spPr>
+        <p:txBody>
+          <a:bodyPr wrap="square" rtlCol="0" anchor="ctr"/>
+          <a:lstStyle/>
+          <a:p>
+            <a:r>
+              <a:rPr lang="en-US" sz="1200" dirty="0">
+                <a:solidFill>
+                  <a:srgbClr val="7BA4C8"/>
+                </a:solidFill>
+              </a:rPr>
+              <a:t>Assesses urgency</a:t>
+            </a:r>
+            <a:r>
+              <a:rPr lang="en-US" sz="1200" dirty="0"/>
+              <a:t> </a:t>
+            </a:r>
+            <a:r>
+              <a:rPr lang="en-US" sz="1200" dirty="0">
+                <a:solidFill>
+                  <a:srgbClr val="7BA4C8"/>
+                </a:solidFill>
+              </a:rPr>
+              <a:t>&amp; severity</a:t>
+            </a:r>
+            <a:endParaRPr lang="en-US" sz="1200" dirty="0"/>
+          </a:p>
+        </p:txBody>
+      </p:sp>
+      <p:sp>
+        <p:nvSpPr>
+          <p:cNvPr id="18" name="Shape 16"/>
+          <p:cNvSpPr/>
+          <p:nvPr/>
+        </p:nvSpPr>
+        <p:spPr>
+          <a:xfrm>
+            <a:off x="1798320" y="3986784"/>
+            <a:ext cx="0" cy="341376"/>
+          </a:xfrm>
+          <a:prstGeom prst="line">
+            <a:avLst/>
+          </a:prstGeom>
+          <a:noFill/>
+          <a:ln w="19050">
+            <a:solidFill>
+              <a:schemeClr val="tx1"/>
+            </a:solidFill>
+            <a:prstDash val="solid"/>
+          </a:ln>
+        </p:spPr>
+        <p:txBody>
+          <a:bodyPr/>
+          <a:lstStyle/>
+          <a:p>
+            <a:endParaRPr lang="en-IN"/>
+          </a:p>
+        </p:txBody>
+      </p:sp>
+      <p:sp>
+        <p:nvSpPr>
+          <p:cNvPr id="20" name="Shape 18"/>
+          <p:cNvSpPr/>
+          <p:nvPr/>
+        </p:nvSpPr>
+        <p:spPr>
+          <a:xfrm>
+            <a:off x="1798320" y="4767072"/>
+            <a:ext cx="0" cy="121920"/>
+          </a:xfrm>
+          <a:prstGeom prst="line">
+            <a:avLst/>
+          </a:prstGeom>
+          <a:noFill/>
+          <a:ln w="12700">
+            <a:solidFill>
+              <a:schemeClr val="tx1"/>
+            </a:solidFill>
+            <a:prstDash val="dot"/>
+          </a:ln>
+        </p:spPr>
+        <p:txBody>
+          <a:bodyPr/>
+          <a:lstStyle/>
+          <a:p>
+            <a:endParaRPr lang="en-IN"/>
+          </a:p>
+        </p:txBody>
+      </p:sp>
+      <p:sp>
+        <p:nvSpPr>
+          <p:cNvPr id="21" name="Shape 19"/>
+          <p:cNvSpPr/>
+          <p:nvPr/>
+        </p:nvSpPr>
+        <p:spPr>
+          <a:xfrm>
+            <a:off x="390144" y="4328160"/>
+            <a:ext cx="2816352" cy="438912"/>
+          </a:xfrm>
+          <a:prstGeom prst="rect">
+            <a:avLst/>
+          </a:prstGeom>
+          <a:solidFill>
+            <a:srgbClr val="FFFFFF">
+              <a:alpha val="7000"/>
+            </a:srgbClr>
+          </a:solidFill>
+          <a:ln w="12700">
+            <a:solidFill>
+              <a:schemeClr val="tx1"/>
+            </a:solidFill>
+            <a:prstDash val="solid"/>
+          </a:ln>
+        </p:spPr>
+        <p:txBody>
+          <a:bodyPr/>
+          <a:lstStyle/>
+          <a:p>
+            <a:endParaRPr lang="en-IN"/>
+          </a:p>
+        </p:txBody>
+      </p:sp>
+      <p:sp>
+        <p:nvSpPr>
+          <p:cNvPr id="23" name="Text 21"/>
+          <p:cNvSpPr/>
+          <p:nvPr/>
+        </p:nvSpPr>
+        <p:spPr>
+          <a:xfrm>
+            <a:off x="512064" y="4328160"/>
+            <a:ext cx="2645664" cy="438912"/>
+          </a:xfrm>
+          <a:prstGeom prst="rect">
+            <a:avLst/>
+          </a:prstGeom>
+          <a:noFill/>
+          <a:ln/>
+        </p:spPr>
+        <p:txBody>
+          <a:bodyPr wrap="square" rtlCol="0" anchor="ctr"/>
+          <a:lstStyle/>
+          <a:p>
+            <a:r>
+              <a:rPr lang="en-US" sz="1267" dirty="0"/>
+              <a:t> Symptom Classifier</a:t>
+            </a:r>
+          </a:p>
+        </p:txBody>
+      </p:sp>
+      <p:sp>
+        <p:nvSpPr>
+          <p:cNvPr id="24" name="Shape 22"/>
+          <p:cNvSpPr/>
+          <p:nvPr/>
+        </p:nvSpPr>
+        <p:spPr>
+          <a:xfrm>
+            <a:off x="1798320" y="5327904"/>
+            <a:ext cx="0" cy="121920"/>
+          </a:xfrm>
+          <a:prstGeom prst="line">
+            <a:avLst/>
+          </a:prstGeom>
+          <a:noFill/>
+          <a:ln w="12700">
+            <a:solidFill>
+              <a:schemeClr val="tx1"/>
+            </a:solidFill>
+            <a:prstDash val="dot"/>
+          </a:ln>
+        </p:spPr>
+        <p:txBody>
+          <a:bodyPr/>
+          <a:lstStyle/>
+          <a:p>
+            <a:endParaRPr lang="en-IN"/>
+          </a:p>
+        </p:txBody>
+      </p:sp>
+      <p:sp>
+        <p:nvSpPr>
+          <p:cNvPr id="25" name="Shape 23"/>
+          <p:cNvSpPr/>
+          <p:nvPr/>
+        </p:nvSpPr>
+        <p:spPr>
+          <a:xfrm>
+            <a:off x="390144" y="4888992"/>
+            <a:ext cx="2816352" cy="438912"/>
+          </a:xfrm>
+          <a:prstGeom prst="rect">
+            <a:avLst/>
+          </a:prstGeom>
+          <a:solidFill>
+            <a:srgbClr val="FFFFFF">
+              <a:alpha val="7000"/>
+            </a:srgbClr>
+          </a:solidFill>
+          <a:ln w="12700">
+            <a:solidFill>
+              <a:schemeClr val="tx1"/>
+            </a:solidFill>
+            <a:prstDash val="solid"/>
+          </a:ln>
+        </p:spPr>
+        <p:txBody>
+          <a:bodyPr/>
+          <a:lstStyle/>
+          <a:p>
+            <a:endParaRPr lang="en-IN"/>
+          </a:p>
+        </p:txBody>
+      </p:sp>
+      <p:sp>
+        <p:nvSpPr>
+          <p:cNvPr id="27" name="Text 25"/>
+          <p:cNvSpPr/>
+          <p:nvPr/>
+        </p:nvSpPr>
+        <p:spPr>
+          <a:xfrm>
+            <a:off x="512064" y="4888992"/>
+            <a:ext cx="2645664" cy="438912"/>
+          </a:xfrm>
+          <a:prstGeom prst="rect">
+            <a:avLst/>
+          </a:prstGeom>
+          <a:noFill/>
+          <a:ln/>
+        </p:spPr>
+        <p:txBody>
+          <a:bodyPr wrap="square" rtlCol="0" anchor="ctr"/>
+          <a:lstStyle/>
+          <a:p>
+            <a:r>
+              <a:rPr lang="en-US" sz="1267" dirty="0"/>
+              <a:t> Risk Scorer</a:t>
+            </a:r>
+          </a:p>
+        </p:txBody>
+      </p:sp>
+      <p:sp>
+        <p:nvSpPr>
+          <p:cNvPr id="28" name="Shape 26"/>
+          <p:cNvSpPr/>
+          <p:nvPr/>
+        </p:nvSpPr>
+        <p:spPr>
+          <a:xfrm>
+            <a:off x="390144" y="5449824"/>
+            <a:ext cx="2816352" cy="438912"/>
+          </a:xfrm>
+          <a:prstGeom prst="rect">
+            <a:avLst/>
+          </a:prstGeom>
+          <a:solidFill>
+            <a:srgbClr val="FFFFFF">
+              <a:alpha val="7000"/>
+            </a:srgbClr>
+          </a:solidFill>
+          <a:ln w="12700">
+            <a:solidFill>
+              <a:schemeClr val="tx1"/>
+            </a:solidFill>
+            <a:prstDash val="solid"/>
+          </a:ln>
+        </p:spPr>
+        <p:txBody>
+          <a:bodyPr/>
+          <a:lstStyle/>
+          <a:p>
+            <a:endParaRPr lang="en-IN"/>
+          </a:p>
+        </p:txBody>
+      </p:sp>
+      <p:sp>
+        <p:nvSpPr>
+          <p:cNvPr id="30" name="Text 28"/>
+          <p:cNvSpPr/>
+          <p:nvPr/>
+        </p:nvSpPr>
+        <p:spPr>
+          <a:xfrm>
+            <a:off x="512064" y="5449824"/>
+            <a:ext cx="2645664" cy="438912"/>
+          </a:xfrm>
+          <a:prstGeom prst="rect">
+            <a:avLst/>
+          </a:prstGeom>
+          <a:noFill/>
+          <a:ln/>
+        </p:spPr>
+        <p:txBody>
+          <a:bodyPr wrap="square" rtlCol="0" anchor="ctr"/>
+          <a:lstStyle/>
+          <a:p>
+            <a:r>
+              <a:rPr lang="en-US" sz="1267" dirty="0"/>
+              <a:t>Alert Tool</a:t>
+            </a:r>
+          </a:p>
+        </p:txBody>
+      </p:sp>
+      <p:sp>
+        <p:nvSpPr>
+          <p:cNvPr id="31" name="Shape 29"/>
+          <p:cNvSpPr/>
+          <p:nvPr/>
+        </p:nvSpPr>
+        <p:spPr>
+          <a:xfrm>
+            <a:off x="6096000" y="2511552"/>
+            <a:ext cx="0" cy="377952"/>
+          </a:xfrm>
+          <a:prstGeom prst="line">
+            <a:avLst/>
+          </a:prstGeom>
+          <a:noFill/>
+          <a:ln w="19050">
+            <a:solidFill>
+              <a:srgbClr val="00B4D8"/>
+            </a:solidFill>
+            <a:prstDash val="sysDash"/>
+          </a:ln>
+        </p:spPr>
+        <p:txBody>
+          <a:bodyPr/>
+          <a:lstStyle/>
+          <a:p>
+            <a:endParaRPr lang="en-IN"/>
+          </a:p>
+        </p:txBody>
+      </p:sp>
+      <p:sp>
+        <p:nvSpPr>
+          <p:cNvPr id="32" name="Shape 30"/>
+          <p:cNvSpPr/>
+          <p:nvPr/>
+        </p:nvSpPr>
+        <p:spPr>
+          <a:xfrm>
+            <a:off x="6096000" y="2889504"/>
+            <a:ext cx="0" cy="0"/>
+          </a:xfrm>
+          <a:prstGeom prst="line">
+            <a:avLst/>
+          </a:prstGeom>
+          <a:noFill/>
+          <a:ln w="19050">
+            <a:solidFill>
+              <a:srgbClr val="00B4D8"/>
+            </a:solidFill>
+            <a:prstDash val="sysDash"/>
+          </a:ln>
+        </p:spPr>
+        <p:txBody>
+          <a:bodyPr/>
+          <a:lstStyle/>
+          <a:p>
+            <a:endParaRPr lang="en-IN"/>
+          </a:p>
+        </p:txBody>
+      </p:sp>
+      <p:sp>
+        <p:nvSpPr>
+          <p:cNvPr id="33" name="Shape 31"/>
+          <p:cNvSpPr/>
+          <p:nvPr/>
+        </p:nvSpPr>
+        <p:spPr>
+          <a:xfrm>
+            <a:off x="6096000" y="2889504"/>
+            <a:ext cx="0" cy="219456"/>
+          </a:xfrm>
+          <a:prstGeom prst="line">
+            <a:avLst/>
+          </a:prstGeom>
+          <a:noFill/>
+          <a:ln w="25400">
+            <a:solidFill>
+              <a:schemeClr val="tx1"/>
+            </a:solidFill>
+            <a:prstDash val="solid"/>
+          </a:ln>
+        </p:spPr>
+        <p:txBody>
+          <a:bodyPr/>
+          <a:lstStyle/>
+          <a:p>
+            <a:endParaRPr lang="en-IN"/>
+          </a:p>
+        </p:txBody>
+      </p:sp>
+      <p:sp>
+        <p:nvSpPr>
+          <p:cNvPr id="35" name="Shape 33"/>
+          <p:cNvSpPr/>
+          <p:nvPr/>
+        </p:nvSpPr>
+        <p:spPr>
+          <a:xfrm>
+            <a:off x="4541520" y="3108960"/>
+            <a:ext cx="3108960" cy="877824"/>
+          </a:xfrm>
+          <a:prstGeom prst="rect">
+            <a:avLst/>
+          </a:prstGeom>
+          <a:solidFill>
+            <a:srgbClr val="06A77D">
+              <a:alpha val="18000"/>
+            </a:srgbClr>
+          </a:solidFill>
+          <a:ln w="19050">
+            <a:solidFill>
+              <a:schemeClr val="tx1"/>
+            </a:solidFill>
+            <a:prstDash val="solid"/>
+          </a:ln>
+        </p:spPr>
+        <p:txBody>
+          <a:bodyPr/>
+          <a:lstStyle/>
+          <a:p>
+            <a:endParaRPr lang="en-IN"/>
+          </a:p>
+        </p:txBody>
+      </p:sp>
+      <p:sp>
+        <p:nvSpPr>
+          <p:cNvPr id="37" name="Text 35"/>
+          <p:cNvSpPr/>
+          <p:nvPr/>
+        </p:nvSpPr>
+        <p:spPr>
+          <a:xfrm>
+            <a:off x="4663440" y="3182112"/>
+            <a:ext cx="2865120" cy="402336"/>
+          </a:xfrm>
+          <a:prstGeom prst="rect">
+            <a:avLst/>
+          </a:prstGeom>
+          <a:noFill/>
+          <a:ln/>
+        </p:spPr>
+        <p:txBody>
+          <a:bodyPr wrap="square" rtlCol="0" anchor="ctr"/>
+          <a:lstStyle/>
+          <a:p>
+            <a:r>
+              <a:rPr lang="en-US" sz="1467" b="1" dirty="0">
+                <a:solidFill>
+                  <a:srgbClr val="FFFFFF"/>
+                </a:solidFill>
+              </a:rPr>
+              <a:t>  BOOKING AGENT</a:t>
+            </a:r>
+            <a:endParaRPr lang="en-US" sz="1467" dirty="0"/>
+          </a:p>
+        </p:txBody>
+      </p:sp>
+      <p:sp>
+        <p:nvSpPr>
+          <p:cNvPr id="38" name="Text 36"/>
+          <p:cNvSpPr/>
+          <p:nvPr/>
+        </p:nvSpPr>
+        <p:spPr>
+          <a:xfrm>
+            <a:off x="4663440" y="3572256"/>
+            <a:ext cx="2865120" cy="365760"/>
+          </a:xfrm>
+          <a:prstGeom prst="rect">
+            <a:avLst/>
+          </a:prstGeom>
+          <a:noFill/>
+          <a:ln/>
+        </p:spPr>
+        <p:txBody>
+          <a:bodyPr wrap="square" rtlCol="0" anchor="ctr"/>
+          <a:lstStyle/>
+          <a:p>
+            <a:r>
+              <a:rPr lang="en-US" sz="1200" dirty="0">
+                <a:solidFill>
+                  <a:srgbClr val="7BA4C8"/>
+                </a:solidFill>
+              </a:rPr>
+              <a:t>Finds slots &amp;</a:t>
+            </a:r>
+            <a:r>
+              <a:rPr lang="en-US" sz="1200" dirty="0"/>
+              <a:t>  </a:t>
+            </a:r>
+            <a:r>
+              <a:rPr lang="en-US" sz="1200" dirty="0">
+                <a:solidFill>
+                  <a:srgbClr val="7BA4C8"/>
+                </a:solidFill>
+              </a:rPr>
+              <a:t>books appointments</a:t>
+            </a:r>
+            <a:endParaRPr lang="en-US" sz="1200" dirty="0"/>
+          </a:p>
+        </p:txBody>
+      </p:sp>
+      <p:sp>
+        <p:nvSpPr>
+          <p:cNvPr id="39" name="Shape 37"/>
+          <p:cNvSpPr/>
+          <p:nvPr/>
+        </p:nvSpPr>
+        <p:spPr>
+          <a:xfrm>
+            <a:off x="6096000" y="3986784"/>
+            <a:ext cx="0" cy="341376"/>
+          </a:xfrm>
+          <a:prstGeom prst="line">
+            <a:avLst/>
+          </a:prstGeom>
+          <a:noFill/>
+          <a:ln w="19050">
+            <a:solidFill>
+              <a:schemeClr val="tx1"/>
+            </a:solidFill>
+            <a:prstDash val="solid"/>
+          </a:ln>
+        </p:spPr>
+        <p:txBody>
+          <a:bodyPr/>
+          <a:lstStyle/>
+          <a:p>
+            <a:endParaRPr lang="en-IN"/>
+          </a:p>
+        </p:txBody>
+      </p:sp>
+      <p:sp>
+        <p:nvSpPr>
+          <p:cNvPr id="41" name="Shape 39"/>
+          <p:cNvSpPr/>
+          <p:nvPr/>
+        </p:nvSpPr>
+        <p:spPr>
+          <a:xfrm>
+            <a:off x="6096000" y="4767072"/>
+            <a:ext cx="0" cy="121920"/>
+          </a:xfrm>
+          <a:prstGeom prst="line">
+            <a:avLst/>
+          </a:prstGeom>
+          <a:noFill/>
+          <a:ln w="12700">
+            <a:solidFill>
+              <a:schemeClr val="tx1"/>
+            </a:solidFill>
+            <a:prstDash val="dot"/>
+          </a:ln>
+        </p:spPr>
+        <p:txBody>
+          <a:bodyPr/>
+          <a:lstStyle/>
+          <a:p>
+            <a:endParaRPr lang="en-IN"/>
+          </a:p>
+        </p:txBody>
+      </p:sp>
+      <p:sp>
+        <p:nvSpPr>
+          <p:cNvPr id="42" name="Shape 40"/>
+          <p:cNvSpPr/>
+          <p:nvPr/>
+        </p:nvSpPr>
+        <p:spPr>
+          <a:xfrm>
+            <a:off x="4687824" y="4328160"/>
+            <a:ext cx="2816352" cy="438912"/>
+          </a:xfrm>
+          <a:prstGeom prst="rect">
+            <a:avLst/>
+          </a:prstGeom>
+          <a:solidFill>
+            <a:srgbClr val="FFFFFF">
+              <a:alpha val="7000"/>
+            </a:srgbClr>
+          </a:solidFill>
+          <a:ln w="12700">
+            <a:solidFill>
+              <a:schemeClr val="tx1"/>
+            </a:solidFill>
+            <a:prstDash val="solid"/>
+          </a:ln>
+        </p:spPr>
+        <p:txBody>
+          <a:bodyPr/>
+          <a:lstStyle/>
+          <a:p>
+            <a:endParaRPr lang="en-IN"/>
+          </a:p>
+        </p:txBody>
+      </p:sp>
+      <p:sp>
+        <p:nvSpPr>
+          <p:cNvPr id="44" name="Text 42"/>
+          <p:cNvSpPr/>
+          <p:nvPr/>
+        </p:nvSpPr>
+        <p:spPr>
+          <a:xfrm>
+            <a:off x="4809744" y="4328160"/>
+            <a:ext cx="2645664" cy="438912"/>
+          </a:xfrm>
+          <a:prstGeom prst="rect">
+            <a:avLst/>
+          </a:prstGeom>
+          <a:noFill/>
+          <a:ln/>
+        </p:spPr>
+        <p:txBody>
+          <a:bodyPr wrap="square" rtlCol="0" anchor="ctr"/>
+          <a:lstStyle/>
+          <a:p>
+            <a:r>
+              <a:rPr lang="en-US" sz="1267" dirty="0"/>
+              <a:t> Calendar API</a:t>
+            </a:r>
+          </a:p>
+        </p:txBody>
+      </p:sp>
+      <p:sp>
+        <p:nvSpPr>
+          <p:cNvPr id="45" name="Shape 43"/>
+          <p:cNvSpPr/>
+          <p:nvPr/>
+        </p:nvSpPr>
+        <p:spPr>
+          <a:xfrm>
+            <a:off x="6096000" y="5327904"/>
+            <a:ext cx="0" cy="121920"/>
+          </a:xfrm>
+          <a:prstGeom prst="line">
+            <a:avLst/>
+          </a:prstGeom>
+          <a:noFill/>
+          <a:ln w="12700">
+            <a:solidFill>
+              <a:schemeClr val="tx1"/>
+            </a:solidFill>
+            <a:prstDash val="dot"/>
+          </a:ln>
+        </p:spPr>
+        <p:txBody>
+          <a:bodyPr/>
+          <a:lstStyle/>
+          <a:p>
+            <a:endParaRPr lang="en-IN"/>
+          </a:p>
+        </p:txBody>
+      </p:sp>
+      <p:sp>
+        <p:nvSpPr>
+          <p:cNvPr id="46" name="Shape 44"/>
+          <p:cNvSpPr/>
+          <p:nvPr/>
+        </p:nvSpPr>
+        <p:spPr>
+          <a:xfrm>
+            <a:off x="4687824" y="4888992"/>
+            <a:ext cx="2816352" cy="438912"/>
+          </a:xfrm>
+          <a:prstGeom prst="rect">
+            <a:avLst/>
+          </a:prstGeom>
+          <a:solidFill>
+            <a:srgbClr val="FFFFFF">
+              <a:alpha val="7000"/>
+            </a:srgbClr>
+          </a:solidFill>
+          <a:ln w="12700">
+            <a:solidFill>
+              <a:schemeClr val="tx1"/>
+            </a:solidFill>
+            <a:prstDash val="solid"/>
+          </a:ln>
+        </p:spPr>
+        <p:txBody>
+          <a:bodyPr/>
+          <a:lstStyle/>
+          <a:p>
+            <a:endParaRPr lang="en-IN"/>
+          </a:p>
+        </p:txBody>
+      </p:sp>
+      <p:sp>
+        <p:nvSpPr>
+          <p:cNvPr id="48" name="Text 46"/>
+          <p:cNvSpPr/>
+          <p:nvPr/>
+        </p:nvSpPr>
+        <p:spPr>
+          <a:xfrm>
+            <a:off x="4809744" y="4888992"/>
+            <a:ext cx="2645664" cy="438912"/>
+          </a:xfrm>
+          <a:prstGeom prst="rect">
+            <a:avLst/>
+          </a:prstGeom>
+          <a:noFill/>
+          <a:ln/>
+        </p:spPr>
+        <p:txBody>
+          <a:bodyPr wrap="square" rtlCol="0" anchor="ctr"/>
+          <a:lstStyle/>
+          <a:p>
+            <a:r>
+              <a:rPr lang="en-US" sz="1267" dirty="0"/>
+              <a:t> Doctor </a:t>
+            </a:r>
+            <a:r>
+              <a:rPr lang="en-US" sz="1267" dirty="0" err="1"/>
+              <a:t>DataBase</a:t>
+            </a:r>
+            <a:endParaRPr lang="en-US" sz="1267" dirty="0"/>
+          </a:p>
+        </p:txBody>
+      </p:sp>
+      <p:sp>
+        <p:nvSpPr>
+          <p:cNvPr id="49" name="Shape 47"/>
+          <p:cNvSpPr/>
+          <p:nvPr/>
+        </p:nvSpPr>
+        <p:spPr>
+          <a:xfrm>
+            <a:off x="4697060" y="5449824"/>
+            <a:ext cx="2816352" cy="438912"/>
+          </a:xfrm>
+          <a:prstGeom prst="rect">
+            <a:avLst/>
+          </a:prstGeom>
+          <a:solidFill>
+            <a:srgbClr val="FFFFFF">
+              <a:alpha val="7000"/>
+            </a:srgbClr>
+          </a:solidFill>
+          <a:ln w="12700">
+            <a:solidFill>
+              <a:schemeClr val="tx1"/>
+            </a:solidFill>
+            <a:prstDash val="solid"/>
+          </a:ln>
+        </p:spPr>
+        <p:txBody>
+          <a:bodyPr/>
+          <a:lstStyle/>
+          <a:p>
+            <a:endParaRPr lang="en-IN"/>
+          </a:p>
+        </p:txBody>
+      </p:sp>
+      <p:sp>
+        <p:nvSpPr>
+          <p:cNvPr id="51" name="Text 49"/>
+          <p:cNvSpPr/>
+          <p:nvPr/>
+        </p:nvSpPr>
+        <p:spPr>
+          <a:xfrm>
+            <a:off x="4809744" y="5449824"/>
+            <a:ext cx="2645664" cy="438912"/>
+          </a:xfrm>
+          <a:prstGeom prst="rect">
+            <a:avLst/>
+          </a:prstGeom>
+          <a:noFill/>
+          <a:ln/>
+        </p:spPr>
+        <p:txBody>
+          <a:bodyPr wrap="square" rtlCol="0" anchor="ctr"/>
+          <a:lstStyle/>
+          <a:p>
+            <a:r>
+              <a:rPr lang="en-US" sz="1267" dirty="0"/>
+              <a:t> Confirmation Email</a:t>
+            </a:r>
+          </a:p>
+        </p:txBody>
+      </p:sp>
+      <p:sp>
+        <p:nvSpPr>
+          <p:cNvPr id="52" name="Shape 50"/>
+          <p:cNvSpPr/>
+          <p:nvPr/>
+        </p:nvSpPr>
+        <p:spPr>
+          <a:xfrm>
+            <a:off x="6096000" y="2511552"/>
+            <a:ext cx="0" cy="377952"/>
+          </a:xfrm>
+          <a:prstGeom prst="line">
+            <a:avLst/>
+          </a:prstGeom>
+          <a:noFill/>
+          <a:ln w="19050">
+            <a:solidFill>
+              <a:schemeClr val="tx1"/>
+            </a:solidFill>
+            <a:prstDash val="sysDash"/>
+          </a:ln>
+        </p:spPr>
+        <p:txBody>
+          <a:bodyPr/>
+          <a:lstStyle/>
+          <a:p>
+            <a:endParaRPr lang="en-IN"/>
+          </a:p>
+        </p:txBody>
+      </p:sp>
+      <p:sp>
+        <p:nvSpPr>
+          <p:cNvPr id="53" name="Shape 51"/>
+          <p:cNvSpPr/>
+          <p:nvPr/>
+        </p:nvSpPr>
+        <p:spPr>
+          <a:xfrm>
+            <a:off x="6096000" y="2889504"/>
+            <a:ext cx="4297680" cy="0"/>
+          </a:xfrm>
+          <a:prstGeom prst="line">
+            <a:avLst/>
+          </a:prstGeom>
+          <a:noFill/>
+          <a:ln w="19050">
+            <a:solidFill>
+              <a:schemeClr val="tx1"/>
+            </a:solidFill>
+            <a:prstDash val="sysDash"/>
+          </a:ln>
+        </p:spPr>
+        <p:txBody>
+          <a:bodyPr/>
+          <a:lstStyle/>
+          <a:p>
+            <a:endParaRPr lang="en-IN"/>
+          </a:p>
+        </p:txBody>
+      </p:sp>
+      <p:sp>
+        <p:nvSpPr>
+          <p:cNvPr id="54" name="Shape 52"/>
+          <p:cNvSpPr/>
+          <p:nvPr/>
+        </p:nvSpPr>
+        <p:spPr>
+          <a:xfrm>
+            <a:off x="10393680" y="2889504"/>
+            <a:ext cx="0" cy="219456"/>
+          </a:xfrm>
+          <a:prstGeom prst="line">
+            <a:avLst/>
+          </a:prstGeom>
+          <a:noFill/>
+          <a:ln w="25400">
+            <a:solidFill>
+              <a:schemeClr val="tx1"/>
+            </a:solidFill>
+            <a:prstDash val="solid"/>
+          </a:ln>
+        </p:spPr>
+        <p:txBody>
+          <a:bodyPr/>
+          <a:lstStyle/>
+          <a:p>
+            <a:endParaRPr lang="en-IN"/>
+          </a:p>
+        </p:txBody>
+      </p:sp>
+      <p:sp>
+        <p:nvSpPr>
+          <p:cNvPr id="56" name="Shape 54"/>
+          <p:cNvSpPr/>
+          <p:nvPr/>
+        </p:nvSpPr>
+        <p:spPr>
+          <a:xfrm>
+            <a:off x="8839200" y="3108960"/>
+            <a:ext cx="3108960" cy="877824"/>
+          </a:xfrm>
+          <a:prstGeom prst="rect">
+            <a:avLst/>
+          </a:prstGeom>
+          <a:solidFill>
+            <a:srgbClr val="7B2FBE">
+              <a:alpha val="18000"/>
+            </a:srgbClr>
+          </a:solidFill>
+          <a:ln w="19050">
+            <a:solidFill>
+              <a:schemeClr val="tx1"/>
+            </a:solidFill>
+            <a:prstDash val="solid"/>
+          </a:ln>
+        </p:spPr>
+        <p:txBody>
+          <a:bodyPr/>
+          <a:lstStyle/>
+          <a:p>
+            <a:endParaRPr lang="en-IN"/>
+          </a:p>
+        </p:txBody>
+      </p:sp>
+      <p:sp>
+        <p:nvSpPr>
+          <p:cNvPr id="58" name="Text 56"/>
+          <p:cNvSpPr/>
+          <p:nvPr/>
+        </p:nvSpPr>
+        <p:spPr>
+          <a:xfrm>
+            <a:off x="8961120" y="3182112"/>
+            <a:ext cx="2865120" cy="402336"/>
+          </a:xfrm>
+          <a:prstGeom prst="rect">
+            <a:avLst/>
+          </a:prstGeom>
+          <a:noFill/>
+          <a:ln/>
+        </p:spPr>
+        <p:txBody>
+          <a:bodyPr wrap="square" rtlCol="0" anchor="ctr"/>
+          <a:lstStyle/>
+          <a:p>
+            <a:r>
+              <a:rPr lang="en-US" sz="1467" b="1" dirty="0">
+                <a:solidFill>
+                  <a:srgbClr val="FFFFFF"/>
+                </a:solidFill>
+              </a:rPr>
+              <a:t>  NOTIFICATION AGENT</a:t>
+            </a:r>
+            <a:endParaRPr lang="en-US" sz="1467" dirty="0"/>
+          </a:p>
+        </p:txBody>
+      </p:sp>
+      <p:sp>
+        <p:nvSpPr>
+          <p:cNvPr id="59" name="Text 57"/>
+          <p:cNvSpPr/>
+          <p:nvPr/>
+        </p:nvSpPr>
+        <p:spPr>
+          <a:xfrm>
+            <a:off x="8961120" y="3572256"/>
+            <a:ext cx="2865120" cy="365760"/>
+          </a:xfrm>
+          <a:prstGeom prst="rect">
+            <a:avLst/>
+          </a:prstGeom>
+          <a:noFill/>
+          <a:ln/>
+        </p:spPr>
+        <p:txBody>
+          <a:bodyPr wrap="square" rtlCol="0" anchor="ctr"/>
+          <a:lstStyle/>
+          <a:p>
+            <a:r>
+              <a:rPr lang="en-US" sz="1200" dirty="0">
+                <a:solidFill>
+                  <a:srgbClr val="7BA4C8"/>
+                </a:solidFill>
+              </a:rPr>
+              <a:t>Sends alerts</a:t>
+            </a:r>
+            <a:r>
+              <a:rPr lang="en-US" sz="1200" dirty="0"/>
+              <a:t> </a:t>
+            </a:r>
+            <a:r>
+              <a:rPr lang="en-US" sz="1200" dirty="0">
+                <a:solidFill>
+                  <a:srgbClr val="7BA4C8"/>
+                </a:solidFill>
+              </a:rPr>
+              <a:t>&amp; reminders</a:t>
+            </a:r>
+            <a:endParaRPr lang="en-US" sz="1200" dirty="0"/>
+          </a:p>
+        </p:txBody>
+      </p:sp>
+      <p:sp>
+        <p:nvSpPr>
+          <p:cNvPr id="60" name="Shape 58"/>
+          <p:cNvSpPr/>
+          <p:nvPr/>
+        </p:nvSpPr>
+        <p:spPr>
+          <a:xfrm>
+            <a:off x="10393680" y="3986784"/>
+            <a:ext cx="0" cy="341376"/>
+          </a:xfrm>
+          <a:prstGeom prst="line">
+            <a:avLst/>
+          </a:prstGeom>
+          <a:noFill/>
+          <a:ln w="19050">
+            <a:solidFill>
+              <a:schemeClr val="tx1"/>
+            </a:solidFill>
+            <a:prstDash val="solid"/>
+          </a:ln>
+        </p:spPr>
+        <p:txBody>
+          <a:bodyPr/>
+          <a:lstStyle/>
+          <a:p>
+            <a:endParaRPr lang="en-IN"/>
+          </a:p>
+        </p:txBody>
+      </p:sp>
+      <p:sp>
+        <p:nvSpPr>
+          <p:cNvPr id="62" name="Shape 60"/>
+          <p:cNvSpPr/>
+          <p:nvPr/>
+        </p:nvSpPr>
+        <p:spPr>
+          <a:xfrm>
+            <a:off x="10393680" y="4767072"/>
+            <a:ext cx="0" cy="121920"/>
+          </a:xfrm>
+          <a:prstGeom prst="line">
+            <a:avLst/>
+          </a:prstGeom>
+          <a:noFill/>
+          <a:ln w="12700">
+            <a:solidFill>
+              <a:schemeClr val="tx1"/>
+            </a:solidFill>
+            <a:prstDash val="dot"/>
+          </a:ln>
+        </p:spPr>
+        <p:txBody>
+          <a:bodyPr/>
+          <a:lstStyle/>
+          <a:p>
+            <a:endParaRPr lang="en-IN"/>
+          </a:p>
+        </p:txBody>
+      </p:sp>
+      <p:sp>
+        <p:nvSpPr>
+          <p:cNvPr id="63" name="Shape 61"/>
+          <p:cNvSpPr/>
+          <p:nvPr/>
+        </p:nvSpPr>
+        <p:spPr>
+          <a:xfrm>
+            <a:off x="8985504" y="4328160"/>
+            <a:ext cx="2816352" cy="438912"/>
+          </a:xfrm>
+          <a:prstGeom prst="rect">
+            <a:avLst/>
+          </a:prstGeom>
+          <a:solidFill>
+            <a:srgbClr val="FFFFFF">
+              <a:alpha val="7000"/>
+            </a:srgbClr>
+          </a:solidFill>
+          <a:ln w="12700">
+            <a:solidFill>
+              <a:schemeClr val="tx1"/>
+            </a:solidFill>
+            <a:prstDash val="solid"/>
+          </a:ln>
+        </p:spPr>
+        <p:txBody>
+          <a:bodyPr/>
+          <a:lstStyle/>
+          <a:p>
+            <a:endParaRPr lang="en-IN"/>
+          </a:p>
+        </p:txBody>
+      </p:sp>
+      <p:sp>
+        <p:nvSpPr>
+          <p:cNvPr id="65" name="Text 63"/>
+          <p:cNvSpPr/>
+          <p:nvPr/>
+        </p:nvSpPr>
+        <p:spPr>
+          <a:xfrm>
+            <a:off x="9107424" y="4328160"/>
+            <a:ext cx="2645664" cy="438912"/>
+          </a:xfrm>
+          <a:prstGeom prst="rect">
+            <a:avLst/>
+          </a:prstGeom>
+          <a:noFill/>
+          <a:ln/>
+        </p:spPr>
+        <p:txBody>
+          <a:bodyPr wrap="square" rtlCol="0" anchor="ctr"/>
+          <a:lstStyle/>
+          <a:p>
+            <a:r>
+              <a:rPr lang="en-US" sz="1267" dirty="0"/>
+              <a:t> SMS Tool</a:t>
+            </a:r>
+          </a:p>
+        </p:txBody>
+      </p:sp>
+      <p:sp>
+        <p:nvSpPr>
+          <p:cNvPr id="66" name="Shape 64"/>
+          <p:cNvSpPr/>
+          <p:nvPr/>
+        </p:nvSpPr>
+        <p:spPr>
+          <a:xfrm>
+            <a:off x="10393680" y="5327904"/>
+            <a:ext cx="0" cy="121920"/>
+          </a:xfrm>
+          <a:prstGeom prst="line">
+            <a:avLst/>
+          </a:prstGeom>
+          <a:noFill/>
+          <a:ln w="12700">
+            <a:solidFill>
+              <a:schemeClr val="tx1"/>
+            </a:solidFill>
+            <a:prstDash val="dot"/>
+          </a:ln>
+        </p:spPr>
+        <p:txBody>
+          <a:bodyPr/>
+          <a:lstStyle/>
+          <a:p>
+            <a:endParaRPr lang="en-IN"/>
+          </a:p>
+        </p:txBody>
+      </p:sp>
+      <p:sp>
+        <p:nvSpPr>
+          <p:cNvPr id="67" name="Shape 65"/>
+          <p:cNvSpPr/>
+          <p:nvPr/>
+        </p:nvSpPr>
+        <p:spPr>
+          <a:xfrm>
+            <a:off x="8985504" y="4888992"/>
+            <a:ext cx="2816352" cy="438912"/>
+          </a:xfrm>
+          <a:prstGeom prst="rect">
+            <a:avLst/>
+          </a:prstGeom>
+          <a:solidFill>
+            <a:srgbClr val="FFFFFF">
+              <a:alpha val="7000"/>
+            </a:srgbClr>
+          </a:solidFill>
+          <a:ln w="12700">
+            <a:solidFill>
+              <a:schemeClr val="tx1"/>
+            </a:solidFill>
+            <a:prstDash val="solid"/>
+          </a:ln>
+        </p:spPr>
+        <p:txBody>
+          <a:bodyPr/>
+          <a:lstStyle/>
+          <a:p>
+            <a:endParaRPr lang="en-IN"/>
+          </a:p>
+        </p:txBody>
+      </p:sp>
+      <p:sp>
+        <p:nvSpPr>
+          <p:cNvPr id="69" name="Text 67"/>
+          <p:cNvSpPr/>
+          <p:nvPr/>
+        </p:nvSpPr>
+        <p:spPr>
+          <a:xfrm>
+            <a:off x="9107424" y="4888992"/>
+            <a:ext cx="2645664" cy="438912"/>
+          </a:xfrm>
+          <a:prstGeom prst="rect">
+            <a:avLst/>
+          </a:prstGeom>
+          <a:noFill/>
+          <a:ln/>
+        </p:spPr>
+        <p:txBody>
+          <a:bodyPr wrap="square" rtlCol="0" anchor="ctr"/>
+          <a:lstStyle/>
+          <a:p>
+            <a:r>
+              <a:rPr lang="en-US" sz="1267" dirty="0"/>
+              <a:t> Email Tool</a:t>
+            </a:r>
+          </a:p>
+        </p:txBody>
+      </p:sp>
+      <p:sp>
+        <p:nvSpPr>
+          <p:cNvPr id="70" name="Shape 68"/>
+          <p:cNvSpPr/>
+          <p:nvPr/>
+        </p:nvSpPr>
+        <p:spPr>
+          <a:xfrm>
+            <a:off x="8985504" y="5449824"/>
+            <a:ext cx="2816352" cy="438912"/>
+          </a:xfrm>
+          <a:prstGeom prst="rect">
+            <a:avLst/>
+          </a:prstGeom>
+          <a:solidFill>
+            <a:srgbClr val="FFFFFF">
+              <a:alpha val="7000"/>
+            </a:srgbClr>
+          </a:solidFill>
+          <a:ln w="12700">
+            <a:solidFill>
+              <a:schemeClr val="tx1"/>
+            </a:solidFill>
+            <a:prstDash val="solid"/>
+          </a:ln>
+        </p:spPr>
+        <p:txBody>
+          <a:bodyPr/>
+          <a:lstStyle/>
+          <a:p>
+            <a:endParaRPr lang="en-IN"/>
+          </a:p>
+        </p:txBody>
+      </p:sp>
+      <p:sp>
+        <p:nvSpPr>
+          <p:cNvPr id="72" name="Text 70"/>
+          <p:cNvSpPr/>
+          <p:nvPr/>
+        </p:nvSpPr>
+        <p:spPr>
+          <a:xfrm>
+            <a:off x="9107424" y="5449824"/>
+            <a:ext cx="2645664" cy="438912"/>
+          </a:xfrm>
+          <a:prstGeom prst="rect">
+            <a:avLst/>
+          </a:prstGeom>
+          <a:noFill/>
+          <a:ln/>
+        </p:spPr>
+        <p:txBody>
+          <a:bodyPr wrap="square" rtlCol="0" anchor="ctr"/>
+          <a:lstStyle/>
+          <a:p>
+            <a:r>
+              <a:rPr lang="en-US" sz="1267" dirty="0"/>
+              <a:t> Push Notification</a:t>
+            </a:r>
+          </a:p>
+        </p:txBody>
+      </p:sp>
+      <p:sp>
+        <p:nvSpPr>
+          <p:cNvPr id="73" name="Shape 71"/>
+          <p:cNvSpPr/>
+          <p:nvPr/>
+        </p:nvSpPr>
+        <p:spPr>
+          <a:xfrm>
+            <a:off x="3048000" y="6071616"/>
+            <a:ext cx="6096000" cy="560832"/>
+          </a:xfrm>
+          <a:prstGeom prst="rect">
+            <a:avLst/>
+          </a:prstGeom>
+          <a:solidFill>
+            <a:srgbClr val="06A77D">
+              <a:alpha val="80000"/>
+            </a:srgbClr>
+          </a:solidFill>
+          <a:ln w="19050">
+            <a:solidFill>
+              <a:srgbClr val="06A77D"/>
+            </a:solidFill>
+            <a:prstDash val="solid"/>
+          </a:ln>
+        </p:spPr>
+        <p:txBody>
+          <a:bodyPr/>
+          <a:lstStyle/>
+          <a:p>
+            <a:endParaRPr lang="en-IN"/>
+          </a:p>
+        </p:txBody>
+      </p:sp>
+      <p:sp>
+        <p:nvSpPr>
+          <p:cNvPr id="74" name="Text 72"/>
+          <p:cNvSpPr/>
+          <p:nvPr/>
+        </p:nvSpPr>
+        <p:spPr>
+          <a:xfrm>
+            <a:off x="3048000" y="6071616"/>
+            <a:ext cx="6096000" cy="560832"/>
+          </a:xfrm>
+          <a:prstGeom prst="rect">
+            <a:avLst/>
+          </a:prstGeom>
+          <a:noFill/>
+          <a:ln/>
+        </p:spPr>
+        <p:txBody>
+          <a:bodyPr wrap="square" lIns="0" tIns="0" rIns="0" bIns="0" rtlCol="0" anchor="ctr"/>
+          <a:lstStyle/>
+          <a:p>
+            <a:pPr algn="ctr"/>
             <a:r>
               <a:rPr lang="en-US" sz="1600" b="1" dirty="0">
                 <a:solidFill>
                   <a:srgbClr val="FFFFFF"/>
                 </a:solidFill>
               </a:rPr>
-              <a:t>EXAMPLE 1  (Normal Case)</a:t>
+              <a:t>Appointment Confirmed &amp; Patient Notified</a:t>
             </a:r>
             <a:endParaRPr lang="en-US" sz="1600" dirty="0"/>
           </a:p>
@@ -10802,588 +12953,31 @@
       </p:sp>
       <p:sp>
         <p:nvSpPr>
-          <p:cNvPr id="8" name="Text 6"/>
-          <p:cNvSpPr/>
-          <p:nvPr/>
-        </p:nvSpPr>
-        <p:spPr>
-          <a:xfrm>
-            <a:off x="670560" y="2523744"/>
-            <a:ext cx="4876800" cy="365760"/>
-          </a:xfrm>
-          <a:prstGeom prst="rect">
-            <a:avLst/>
-          </a:prstGeom>
-          <a:noFill/>
-          <a:ln/>
-        </p:spPr>
-        <p:txBody>
-          <a:bodyPr wrap="square" rtlCol="0" anchor="ctr"/>
-          <a:lstStyle/>
-          <a:p>
-            <a:r>
-              <a:rPr lang="en-US" sz="1467" b="1" dirty="0">
-                <a:solidFill>
-                  <a:srgbClr val="3A5A7A"/>
-                </a:solidFill>
-              </a:rPr>
-              <a:t>Patient says:</a:t>
-            </a:r>
-            <a:endParaRPr lang="en-US" sz="1467" dirty="0"/>
-          </a:p>
-        </p:txBody>
-      </p:sp>
-      <p:sp>
-        <p:nvSpPr>
-          <p:cNvPr id="11" name="Text 9"/>
-          <p:cNvSpPr/>
-          <p:nvPr/>
-        </p:nvSpPr>
-        <p:spPr>
-          <a:xfrm>
-            <a:off x="670560" y="3779520"/>
-            <a:ext cx="4876800" cy="365760"/>
-          </a:xfrm>
-          <a:prstGeom prst="rect">
-            <a:avLst/>
-          </a:prstGeom>
-          <a:noFill/>
-          <a:ln/>
-        </p:spPr>
-        <p:txBody>
-          <a:bodyPr wrap="square" rtlCol="0" anchor="ctr"/>
-          <a:lstStyle/>
-          <a:p>
-            <a:r>
-              <a:rPr lang="en-US" sz="1467" b="1" dirty="0">
-                <a:solidFill>
-                  <a:srgbClr val="3A5A7A"/>
-                </a:solidFill>
-              </a:rPr>
-              <a:t>Agent Reasoning:</a:t>
-            </a:r>
-            <a:endParaRPr lang="en-US" sz="1467" dirty="0"/>
-          </a:p>
-        </p:txBody>
-      </p:sp>
-      <p:sp>
-        <p:nvSpPr>
-          <p:cNvPr id="12" name="Text 10"/>
-          <p:cNvSpPr/>
-          <p:nvPr/>
-        </p:nvSpPr>
-        <p:spPr>
-          <a:xfrm>
-            <a:off x="731520" y="4206240"/>
-            <a:ext cx="4754880" cy="414528"/>
-          </a:xfrm>
-          <a:prstGeom prst="rect">
-            <a:avLst/>
-          </a:prstGeom>
-          <a:noFill/>
-          <a:ln/>
-        </p:spPr>
-        <p:txBody>
-          <a:bodyPr wrap="square" rtlCol="0" anchor="ctr"/>
-          <a:lstStyle/>
-          <a:p>
-            <a:r>
-              <a:rPr lang="en-US" sz="1467" dirty="0">
-                <a:solidFill>
-                  <a:srgbClr val="0A1628"/>
-                </a:solidFill>
-              </a:rPr>
-              <a:t>Urgency level: LOW</a:t>
-            </a:r>
-            <a:endParaRPr lang="en-US" sz="1467" dirty="0"/>
-          </a:p>
-        </p:txBody>
-      </p:sp>
-      <p:sp>
-        <p:nvSpPr>
-          <p:cNvPr id="13" name="Text 11"/>
-          <p:cNvSpPr/>
-          <p:nvPr/>
-        </p:nvSpPr>
-        <p:spPr>
-          <a:xfrm>
-            <a:off x="731520" y="4669536"/>
-            <a:ext cx="4754880" cy="414528"/>
-          </a:xfrm>
-          <a:prstGeom prst="rect">
-            <a:avLst/>
-          </a:prstGeom>
-          <a:noFill/>
-          <a:ln/>
-        </p:spPr>
-        <p:txBody>
-          <a:bodyPr wrap="square" rtlCol="0" anchor="ctr"/>
-          <a:lstStyle/>
-          <a:p>
-            <a:r>
-              <a:rPr lang="en-US" sz="1467" dirty="0">
-                <a:solidFill>
-                  <a:srgbClr val="0A1628"/>
-                </a:solidFill>
-              </a:rPr>
-              <a:t>General physician sufficient</a:t>
-            </a:r>
-            <a:endParaRPr lang="en-US" sz="1467" dirty="0"/>
-          </a:p>
-        </p:txBody>
-      </p:sp>
-      <p:sp>
-        <p:nvSpPr>
-          <p:cNvPr id="14" name="Text 12"/>
-          <p:cNvSpPr/>
-          <p:nvPr/>
-        </p:nvSpPr>
-        <p:spPr>
-          <a:xfrm>
-            <a:off x="731520" y="5132832"/>
-            <a:ext cx="4754880" cy="414528"/>
-          </a:xfrm>
-          <a:prstGeom prst="rect">
-            <a:avLst/>
-          </a:prstGeom>
-          <a:noFill/>
-          <a:ln/>
-        </p:spPr>
-        <p:txBody>
-          <a:bodyPr wrap="square" rtlCol="0" anchor="ctr"/>
-          <a:lstStyle/>
-          <a:p>
-            <a:r>
-              <a:rPr lang="en-US" sz="1467" dirty="0">
-                <a:solidFill>
-                  <a:srgbClr val="0A1628"/>
-                </a:solidFill>
-              </a:rPr>
-              <a:t>Schedule regular appointment</a:t>
-            </a:r>
-            <a:endParaRPr lang="en-US" sz="1467" dirty="0"/>
-          </a:p>
-        </p:txBody>
-      </p:sp>
-      <p:sp>
-        <p:nvSpPr>
-          <p:cNvPr id="15" name="Text 13"/>
-          <p:cNvSpPr/>
-          <p:nvPr/>
-        </p:nvSpPr>
-        <p:spPr>
-          <a:xfrm>
-            <a:off x="731520" y="5596128"/>
-            <a:ext cx="4754880" cy="414528"/>
-          </a:xfrm>
-          <a:prstGeom prst="rect">
-            <a:avLst/>
-          </a:prstGeom>
-          <a:noFill/>
-          <a:ln/>
-        </p:spPr>
-        <p:txBody>
-          <a:bodyPr wrap="square" rtlCol="0" anchor="ctr"/>
-          <a:lstStyle/>
-          <a:p>
-            <a:r>
-              <a:rPr lang="en-US" sz="1467" dirty="0">
-                <a:solidFill>
-                  <a:srgbClr val="0A1628"/>
-                </a:solidFill>
-              </a:rPr>
-              <a:t>Send reminder email</a:t>
-            </a:r>
-            <a:endParaRPr lang="en-US" sz="1467" dirty="0"/>
-          </a:p>
-        </p:txBody>
-      </p:sp>
-      <p:sp>
-        <p:nvSpPr>
-          <p:cNvPr id="16" name="Shape 14"/>
-          <p:cNvSpPr/>
-          <p:nvPr/>
-        </p:nvSpPr>
-        <p:spPr>
-          <a:xfrm>
-            <a:off x="6400800" y="1767840"/>
-            <a:ext cx="5364480" cy="4632960"/>
-          </a:xfrm>
-          <a:prstGeom prst="rect">
-            <a:avLst/>
-          </a:prstGeom>
-          <a:solidFill>
-            <a:srgbClr val="FFFFFF"/>
-          </a:solidFill>
-          <a:ln/>
-          <a:effectLst>
-            <a:outerShdw blurRad="101600" dist="25400" dir="8100000" algn="bl" rotWithShape="0">
-              <a:srgbClr val="000000">
-                <a:alpha val="9000"/>
-              </a:srgbClr>
-            </a:outerShdw>
-          </a:effectLst>
+          <p:cNvPr id="75" name="Shape 73"/>
+          <p:cNvSpPr/>
+          <p:nvPr/>
+        </p:nvSpPr>
+        <p:spPr>
+          <a:xfrm>
+            <a:off x="6096000" y="5888736"/>
+            <a:ext cx="0" cy="182880"/>
+          </a:xfrm>
+          <a:prstGeom prst="line">
+            <a:avLst/>
+          </a:prstGeom>
+          <a:noFill/>
+          <a:ln w="19050">
+            <a:solidFill>
+              <a:schemeClr val="tx1"/>
+            </a:solidFill>
+            <a:prstDash val="sysDash"/>
+          </a:ln>
         </p:spPr>
         <p:txBody>
           <a:bodyPr/>
           <a:lstStyle/>
           <a:p>
-            <a:endParaRPr lang="en-IN" sz="2400"/>
-          </a:p>
-        </p:txBody>
-      </p:sp>
-      <p:sp>
-        <p:nvSpPr>
-          <p:cNvPr id="17" name="Shape 15"/>
-          <p:cNvSpPr/>
-          <p:nvPr/>
-        </p:nvSpPr>
-        <p:spPr>
-          <a:xfrm>
-            <a:off x="6400800" y="1767840"/>
-            <a:ext cx="5364480" cy="609600"/>
-          </a:xfrm>
-          <a:prstGeom prst="rect">
-            <a:avLst/>
-          </a:prstGeom>
-          <a:solidFill>
-            <a:srgbClr val="E63946"/>
-          </a:solidFill>
-          <a:ln/>
-        </p:spPr>
-        <p:txBody>
-          <a:bodyPr/>
-          <a:lstStyle/>
-          <a:p>
-            <a:endParaRPr lang="en-IN" sz="2400"/>
-          </a:p>
-        </p:txBody>
-      </p:sp>
-      <p:sp>
-        <p:nvSpPr>
-          <p:cNvPr id="18" name="Text 16"/>
-          <p:cNvSpPr/>
-          <p:nvPr/>
-        </p:nvSpPr>
-        <p:spPr>
-          <a:xfrm>
-            <a:off x="6461760" y="1767840"/>
-            <a:ext cx="5242560" cy="609600"/>
-          </a:xfrm>
-          <a:prstGeom prst="rect">
-            <a:avLst/>
-          </a:prstGeom>
-          <a:noFill/>
-          <a:ln/>
-        </p:spPr>
-        <p:txBody>
-          <a:bodyPr wrap="square" rtlCol="0" anchor="ctr"/>
-          <a:lstStyle/>
-          <a:p>
-            <a:r>
-              <a:rPr lang="en-US" sz="1600" b="1" dirty="0">
-                <a:solidFill>
-                  <a:srgbClr val="FFFFFF"/>
-                </a:solidFill>
-              </a:rPr>
-              <a:t> EXAMPLE 2  (Emergency Case)</a:t>
-            </a:r>
-            <a:endParaRPr lang="en-US" sz="1600" dirty="0"/>
-          </a:p>
-        </p:txBody>
-      </p:sp>
-      <p:sp>
-        <p:nvSpPr>
-          <p:cNvPr id="19" name="Text 17"/>
-          <p:cNvSpPr/>
-          <p:nvPr/>
-        </p:nvSpPr>
-        <p:spPr>
-          <a:xfrm>
-            <a:off x="6644640" y="2523744"/>
-            <a:ext cx="4876800" cy="365760"/>
-          </a:xfrm>
-          <a:prstGeom prst="rect">
-            <a:avLst/>
-          </a:prstGeom>
-          <a:noFill/>
-          <a:ln/>
-        </p:spPr>
-        <p:txBody>
-          <a:bodyPr wrap="square" rtlCol="0" anchor="ctr"/>
-          <a:lstStyle/>
-          <a:p>
-            <a:r>
-              <a:rPr lang="en-US" sz="1467" b="1" dirty="0">
-                <a:solidFill>
-                  <a:srgbClr val="3A5A7A"/>
-                </a:solidFill>
-              </a:rPr>
-              <a:t>Patient says:</a:t>
-            </a:r>
-            <a:endParaRPr lang="en-US" sz="1467" dirty="0"/>
-          </a:p>
-        </p:txBody>
-      </p:sp>
-      <p:sp>
-        <p:nvSpPr>
-          <p:cNvPr id="21" name="Text 19"/>
-          <p:cNvSpPr/>
-          <p:nvPr/>
-        </p:nvSpPr>
-        <p:spPr>
-          <a:xfrm>
-            <a:off x="6729984" y="2926080"/>
-            <a:ext cx="4730496" cy="670560"/>
-          </a:xfrm>
-          <a:prstGeom prst="rect">
-            <a:avLst/>
-          </a:prstGeom>
-          <a:noFill/>
-          <a:ln/>
-        </p:spPr>
-        <p:txBody>
-          <a:bodyPr wrap="square" rtlCol="0" anchor="ctr"/>
-          <a:lstStyle/>
-          <a:p>
-            <a:endParaRPr lang="en-US" sz="1467" dirty="0"/>
-          </a:p>
-        </p:txBody>
-      </p:sp>
-      <p:sp>
-        <p:nvSpPr>
-          <p:cNvPr id="22" name="Text 20"/>
-          <p:cNvSpPr/>
-          <p:nvPr/>
-        </p:nvSpPr>
-        <p:spPr>
-          <a:xfrm>
-            <a:off x="6644640" y="3779520"/>
-            <a:ext cx="4876800" cy="365760"/>
-          </a:xfrm>
-          <a:prstGeom prst="rect">
-            <a:avLst/>
-          </a:prstGeom>
-          <a:noFill/>
-          <a:ln/>
-        </p:spPr>
-        <p:txBody>
-          <a:bodyPr wrap="square" rtlCol="0" anchor="ctr"/>
-          <a:lstStyle/>
-          <a:p>
-            <a:r>
-              <a:rPr lang="en-US" sz="1467" b="1" dirty="0">
-                <a:solidFill>
-                  <a:srgbClr val="3A5A7A"/>
-                </a:solidFill>
-              </a:rPr>
-              <a:t>Agent Reasoning:</a:t>
-            </a:r>
-            <a:endParaRPr lang="en-US" sz="1467" dirty="0"/>
-          </a:p>
-        </p:txBody>
-      </p:sp>
-      <p:sp>
-        <p:nvSpPr>
-          <p:cNvPr id="23" name="Text 21"/>
-          <p:cNvSpPr/>
-          <p:nvPr/>
-        </p:nvSpPr>
-        <p:spPr>
-          <a:xfrm>
-            <a:off x="6705600" y="4206240"/>
-            <a:ext cx="4754880" cy="414528"/>
-          </a:xfrm>
-          <a:prstGeom prst="rect">
-            <a:avLst/>
-          </a:prstGeom>
-          <a:noFill/>
-          <a:ln/>
-        </p:spPr>
-        <p:txBody>
-          <a:bodyPr wrap="square" rtlCol="0" anchor="ctr"/>
-          <a:lstStyle/>
-          <a:p>
-            <a:r>
-              <a:rPr lang="en-US" sz="1467" dirty="0">
-                <a:solidFill>
-                  <a:srgbClr val="0A1628"/>
-                </a:solidFill>
-              </a:rPr>
-              <a:t>Urgency level: CRITICAL</a:t>
-            </a:r>
-            <a:endParaRPr lang="en-US" sz="1467" dirty="0"/>
-          </a:p>
-        </p:txBody>
-      </p:sp>
-      <p:sp>
-        <p:nvSpPr>
-          <p:cNvPr id="24" name="Text 22"/>
-          <p:cNvSpPr/>
-          <p:nvPr/>
-        </p:nvSpPr>
-        <p:spPr>
-          <a:xfrm>
-            <a:off x="6705600" y="4669536"/>
-            <a:ext cx="4754880" cy="414528"/>
-          </a:xfrm>
-          <a:prstGeom prst="rect">
-            <a:avLst/>
-          </a:prstGeom>
-          <a:noFill/>
-          <a:ln/>
-        </p:spPr>
-        <p:txBody>
-          <a:bodyPr wrap="square" rtlCol="0" anchor="ctr"/>
-          <a:lstStyle/>
-          <a:p>
-            <a:r>
-              <a:rPr lang="en-US" sz="1467" dirty="0">
-                <a:solidFill>
-                  <a:srgbClr val="0A1628"/>
-                </a:solidFill>
-              </a:rPr>
-              <a:t>Possible cardiac emergency detected</a:t>
-            </a:r>
-            <a:endParaRPr lang="en-US" sz="1467" dirty="0"/>
-          </a:p>
-        </p:txBody>
-      </p:sp>
-      <p:sp>
-        <p:nvSpPr>
-          <p:cNvPr id="25" name="Text 23"/>
-          <p:cNvSpPr/>
-          <p:nvPr/>
-        </p:nvSpPr>
-        <p:spPr>
-          <a:xfrm>
-            <a:off x="6705600" y="5132832"/>
-            <a:ext cx="4754880" cy="414528"/>
-          </a:xfrm>
-          <a:prstGeom prst="rect">
-            <a:avLst/>
-          </a:prstGeom>
-          <a:noFill/>
-          <a:ln/>
-        </p:spPr>
-        <p:txBody>
-          <a:bodyPr wrap="square" rtlCol="0" anchor="ctr"/>
-          <a:lstStyle/>
-          <a:p>
-            <a:r>
-              <a:rPr lang="en-US" sz="1467" dirty="0">
-                <a:solidFill>
-                  <a:srgbClr val="0A1628"/>
-                </a:solidFill>
-              </a:rPr>
-              <a:t>Escalate to emergency department</a:t>
-            </a:r>
-            <a:endParaRPr lang="en-US" sz="1467" dirty="0"/>
-          </a:p>
-        </p:txBody>
-      </p:sp>
-      <p:sp>
-        <p:nvSpPr>
-          <p:cNvPr id="26" name="Text 24"/>
-          <p:cNvSpPr/>
-          <p:nvPr/>
-        </p:nvSpPr>
-        <p:spPr>
-          <a:xfrm>
-            <a:off x="6705600" y="5596128"/>
-            <a:ext cx="4754880" cy="414528"/>
-          </a:xfrm>
-          <a:prstGeom prst="rect">
-            <a:avLst/>
-          </a:prstGeom>
-          <a:noFill/>
-          <a:ln/>
-        </p:spPr>
-        <p:txBody>
-          <a:bodyPr wrap="square" rtlCol="0" anchor="ctr"/>
-          <a:lstStyle/>
-          <a:p>
-            <a:r>
-              <a:rPr lang="en-US" sz="1467" dirty="0">
-                <a:solidFill>
-                  <a:srgbClr val="0A1628"/>
-                </a:solidFill>
-              </a:rPr>
-              <a:t>Send urgent SMS alert immediately</a:t>
-            </a:r>
-            <a:endParaRPr lang="en-US" sz="1467" dirty="0"/>
-          </a:p>
-        </p:txBody>
-      </p:sp>
-      <p:sp>
-        <p:nvSpPr>
-          <p:cNvPr id="28" name="TextBox 27">
-            <a:extLst>
-              <a:ext uri="{FF2B5EF4-FFF2-40B4-BE49-F238E27FC236}">
-                <a16:creationId xmlns:a16="http://schemas.microsoft.com/office/drawing/2014/main" id="{4309F857-1889-9882-6813-5BF7AB5FFB31}"/>
-              </a:ext>
-            </a:extLst>
-          </p:cNvPr>
-          <p:cNvSpPr txBox="1"/>
-          <p:nvPr/>
-        </p:nvSpPr>
-        <p:spPr>
-          <a:xfrm>
-            <a:off x="731520" y="2926080"/>
-            <a:ext cx="4622995" cy="646331"/>
-          </a:xfrm>
-          <a:prstGeom prst="rect">
-            <a:avLst/>
-          </a:prstGeom>
-          <a:noFill/>
-        </p:spPr>
-        <p:txBody>
-          <a:bodyPr wrap="square" rtlCol="0">
-            <a:spAutoFit/>
-          </a:bodyPr>
-          <a:lstStyle/>
-          <a:p>
-            <a:r>
-              <a:rPr lang="en-US" dirty="0"/>
-              <a:t>l have mild fever and headache for two days.</a:t>
-            </a:r>
-            <a:endParaRPr lang="en-IN" dirty="0"/>
-          </a:p>
-        </p:txBody>
-      </p:sp>
-      <p:sp>
-        <p:nvSpPr>
-          <p:cNvPr id="29" name="TextBox 28">
-            <a:extLst>
-              <a:ext uri="{FF2B5EF4-FFF2-40B4-BE49-F238E27FC236}">
-                <a16:creationId xmlns:a16="http://schemas.microsoft.com/office/drawing/2014/main" id="{783F0519-6B2D-05A0-9DD8-ABF8CEDE01A7}"/>
-              </a:ext>
-            </a:extLst>
-          </p:cNvPr>
-          <p:cNvSpPr txBox="1"/>
-          <p:nvPr/>
-        </p:nvSpPr>
-        <p:spPr>
-          <a:xfrm>
-            <a:off x="6705600" y="2926080"/>
-            <a:ext cx="4730496" cy="646331"/>
-          </a:xfrm>
-          <a:prstGeom prst="rect">
-            <a:avLst/>
-          </a:prstGeom>
-          <a:noFill/>
-        </p:spPr>
-        <p:txBody>
-          <a:bodyPr wrap="square" rtlCol="0">
-            <a:spAutoFit/>
-          </a:bodyPr>
-          <a:lstStyle/>
-          <a:p>
-            <a:r>
-              <a:rPr lang="en-US" dirty="0"/>
-              <a:t>I have severe chest pain and difficulty breathing.</a:t>
-            </a:r>
-            <a:endParaRPr lang="en-IN" dirty="0"/>
+            <a:endParaRPr lang="en-IN"/>
           </a:p>
         </p:txBody>
       </p:sp>
@@ -11427,7 +13021,7 @@
             <a:avLst/>
           </a:prstGeom>
           <a:solidFill>
-            <a:srgbClr val="00B4D8"/>
+            <a:srgbClr val="0E5FA0"/>
           </a:solidFill>
           <a:ln/>
         </p:spPr>
@@ -11462,34 +13056,366 @@
           <a:p>
             <a:r>
               <a:rPr lang="en-US" sz="1733" b="1" kern="0" spc="267" dirty="0">
+                <a:solidFill>
+                  <a:srgbClr val="FFFFFF"/>
+                </a:solidFill>
+              </a:rPr>
+              <a:t>AGENT REASONING IN ACTION</a:t>
+            </a:r>
+            <a:endParaRPr lang="en-US" sz="1733" dirty="0"/>
+          </a:p>
+        </p:txBody>
+      </p:sp>
+      <p:sp>
+        <p:nvSpPr>
+          <p:cNvPr id="4" name="Text 2"/>
+          <p:cNvSpPr/>
+          <p:nvPr/>
+        </p:nvSpPr>
+        <p:spPr>
+          <a:xfrm>
+            <a:off x="487680" y="1060704"/>
+            <a:ext cx="10972800" cy="524256"/>
+          </a:xfrm>
+          <a:prstGeom prst="rect">
+            <a:avLst/>
+          </a:prstGeom>
+          <a:noFill/>
+          <a:ln/>
+        </p:spPr>
+        <p:txBody>
+          <a:bodyPr wrap="square" rtlCol="0" anchor="ctr"/>
+          <a:lstStyle/>
+          <a:p>
+            <a:r>
+              <a:rPr lang="en-US" sz="2400" b="1" dirty="0">
+                <a:solidFill>
+                  <a:srgbClr val="0E5FA0"/>
+                </a:solidFill>
+              </a:rPr>
+              <a:t>How the LLM Interprets Patient Input &amp; Makes Decisions</a:t>
+            </a:r>
+            <a:endParaRPr lang="en-US" sz="2400" dirty="0"/>
+          </a:p>
+        </p:txBody>
+      </p:sp>
+      <p:sp>
+        <p:nvSpPr>
+          <p:cNvPr id="5" name="Shape 3"/>
+          <p:cNvSpPr/>
+          <p:nvPr/>
+        </p:nvSpPr>
+        <p:spPr>
+          <a:xfrm>
+            <a:off x="426720" y="1767840"/>
+            <a:ext cx="5364480" cy="4632960"/>
+          </a:xfrm>
+          <a:prstGeom prst="rect">
+            <a:avLst/>
+          </a:prstGeom>
+          <a:solidFill>
+            <a:srgbClr val="FFFFFF"/>
+          </a:solidFill>
+          <a:ln/>
+          <a:effectLst>
+            <a:outerShdw blurRad="101600" dist="25400" dir="8100000" algn="bl" rotWithShape="0">
+              <a:srgbClr val="000000">
+                <a:alpha val="9000"/>
+              </a:srgbClr>
+            </a:outerShdw>
+          </a:effectLst>
+        </p:spPr>
+        <p:txBody>
+          <a:bodyPr/>
+          <a:lstStyle/>
+          <a:p>
+            <a:endParaRPr lang="en-IN" sz="2400"/>
+          </a:p>
+        </p:txBody>
+      </p:sp>
+      <p:sp>
+        <p:nvSpPr>
+          <p:cNvPr id="6" name="Shape 4"/>
+          <p:cNvSpPr/>
+          <p:nvPr/>
+        </p:nvSpPr>
+        <p:spPr>
+          <a:xfrm>
+            <a:off x="426720" y="1767840"/>
+            <a:ext cx="5364480" cy="609600"/>
+          </a:xfrm>
+          <a:prstGeom prst="rect">
+            <a:avLst/>
+          </a:prstGeom>
+          <a:solidFill>
+            <a:srgbClr val="06A77D"/>
+          </a:solidFill>
+          <a:ln/>
+        </p:spPr>
+        <p:txBody>
+          <a:bodyPr/>
+          <a:lstStyle/>
+          <a:p>
+            <a:endParaRPr lang="en-IN" sz="2400"/>
+          </a:p>
+        </p:txBody>
+      </p:sp>
+      <p:sp>
+        <p:nvSpPr>
+          <p:cNvPr id="7" name="Text 5"/>
+          <p:cNvSpPr/>
+          <p:nvPr/>
+        </p:nvSpPr>
+        <p:spPr>
+          <a:xfrm>
+            <a:off x="487680" y="1767840"/>
+            <a:ext cx="5242560" cy="609600"/>
+          </a:xfrm>
+          <a:prstGeom prst="rect">
+            <a:avLst/>
+          </a:prstGeom>
+          <a:noFill/>
+          <a:ln/>
+        </p:spPr>
+        <p:txBody>
+          <a:bodyPr wrap="square" rtlCol="0" anchor="ctr"/>
+          <a:lstStyle/>
+          <a:p>
+            <a:r>
+              <a:rPr lang="en-US" sz="1600" b="1" dirty="0">
+                <a:solidFill>
+                  <a:srgbClr val="FFFFFF"/>
+                </a:solidFill>
+              </a:rPr>
+              <a:t>EXAMPLE 1  (Normal Case)</a:t>
+            </a:r>
+            <a:endParaRPr lang="en-US" sz="1600" dirty="0"/>
+          </a:p>
+        </p:txBody>
+      </p:sp>
+      <p:sp>
+        <p:nvSpPr>
+          <p:cNvPr id="8" name="Text 6"/>
+          <p:cNvSpPr/>
+          <p:nvPr/>
+        </p:nvSpPr>
+        <p:spPr>
+          <a:xfrm>
+            <a:off x="670560" y="2523744"/>
+            <a:ext cx="4876800" cy="365760"/>
+          </a:xfrm>
+          <a:prstGeom prst="rect">
+            <a:avLst/>
+          </a:prstGeom>
+          <a:noFill/>
+          <a:ln/>
+        </p:spPr>
+        <p:txBody>
+          <a:bodyPr wrap="square" rtlCol="0" anchor="ctr"/>
+          <a:lstStyle/>
+          <a:p>
+            <a:r>
+              <a:rPr lang="en-US" sz="1467" b="1" dirty="0">
+                <a:solidFill>
+                  <a:srgbClr val="3A5A7A"/>
+                </a:solidFill>
+              </a:rPr>
+              <a:t>Patient says:</a:t>
+            </a:r>
+            <a:endParaRPr lang="en-US" sz="1467" dirty="0"/>
+          </a:p>
+        </p:txBody>
+      </p:sp>
+      <p:sp>
+        <p:nvSpPr>
+          <p:cNvPr id="11" name="Text 9"/>
+          <p:cNvSpPr/>
+          <p:nvPr/>
+        </p:nvSpPr>
+        <p:spPr>
+          <a:xfrm>
+            <a:off x="670560" y="3779520"/>
+            <a:ext cx="4876800" cy="365760"/>
+          </a:xfrm>
+          <a:prstGeom prst="rect">
+            <a:avLst/>
+          </a:prstGeom>
+          <a:noFill/>
+          <a:ln/>
+        </p:spPr>
+        <p:txBody>
+          <a:bodyPr wrap="square" rtlCol="0" anchor="ctr"/>
+          <a:lstStyle/>
+          <a:p>
+            <a:r>
+              <a:rPr lang="en-US" sz="1467" b="1" dirty="0">
+                <a:solidFill>
+                  <a:srgbClr val="3A5A7A"/>
+                </a:solidFill>
+              </a:rPr>
+              <a:t>Agent Reasoning:</a:t>
+            </a:r>
+            <a:endParaRPr lang="en-US" sz="1467" dirty="0"/>
+          </a:p>
+        </p:txBody>
+      </p:sp>
+      <p:sp>
+        <p:nvSpPr>
+          <p:cNvPr id="12" name="Text 10"/>
+          <p:cNvSpPr/>
+          <p:nvPr/>
+        </p:nvSpPr>
+        <p:spPr>
+          <a:xfrm>
+            <a:off x="731520" y="4206240"/>
+            <a:ext cx="4754880" cy="414528"/>
+          </a:xfrm>
+          <a:prstGeom prst="rect">
+            <a:avLst/>
+          </a:prstGeom>
+          <a:noFill/>
+          <a:ln/>
+        </p:spPr>
+        <p:txBody>
+          <a:bodyPr wrap="square" rtlCol="0" anchor="ctr"/>
+          <a:lstStyle/>
+          <a:p>
+            <a:r>
+              <a:rPr lang="en-US" sz="1467" dirty="0">
                 <a:solidFill>
                   <a:srgbClr val="0A1628"/>
                 </a:solidFill>
               </a:rPr>
-              <a:t>TOOL CALLING</a:t>
-            </a:r>
-            <a:endParaRPr lang="en-US" sz="1733" dirty="0"/>
-          </a:p>
-        </p:txBody>
-      </p:sp>
-      <p:sp>
-        <p:nvSpPr>
-          <p:cNvPr id="5" name="Shape 3"/>
-          <p:cNvSpPr/>
-          <p:nvPr/>
-        </p:nvSpPr>
-        <p:spPr>
-          <a:xfrm>
-            <a:off x="426720" y="1853184"/>
-            <a:ext cx="11338560" cy="548640"/>
+              <a:t>Urgency level: LOW</a:t>
+            </a:r>
+            <a:endParaRPr lang="en-US" sz="1467" dirty="0"/>
+          </a:p>
+        </p:txBody>
+      </p:sp>
+      <p:sp>
+        <p:nvSpPr>
+          <p:cNvPr id="13" name="Text 11"/>
+          <p:cNvSpPr/>
+          <p:nvPr/>
+        </p:nvSpPr>
+        <p:spPr>
+          <a:xfrm>
+            <a:off x="731520" y="4669536"/>
+            <a:ext cx="4754880" cy="414528"/>
+          </a:xfrm>
+          <a:prstGeom prst="rect">
+            <a:avLst/>
+          </a:prstGeom>
+          <a:noFill/>
+          <a:ln/>
+        </p:spPr>
+        <p:txBody>
+          <a:bodyPr wrap="square" rtlCol="0" anchor="ctr"/>
+          <a:lstStyle/>
+          <a:p>
+            <a:r>
+              <a:rPr lang="en-US" sz="1467" dirty="0">
+                <a:solidFill>
+                  <a:srgbClr val="0A1628"/>
+                </a:solidFill>
+              </a:rPr>
+              <a:t>General physician sufficient</a:t>
+            </a:r>
+            <a:endParaRPr lang="en-US" sz="1467" dirty="0"/>
+          </a:p>
+        </p:txBody>
+      </p:sp>
+      <p:sp>
+        <p:nvSpPr>
+          <p:cNvPr id="14" name="Text 12"/>
+          <p:cNvSpPr/>
+          <p:nvPr/>
+        </p:nvSpPr>
+        <p:spPr>
+          <a:xfrm>
+            <a:off x="731520" y="5132832"/>
+            <a:ext cx="4754880" cy="414528"/>
+          </a:xfrm>
+          <a:prstGeom prst="rect">
+            <a:avLst/>
+          </a:prstGeom>
+          <a:noFill/>
+          <a:ln/>
+        </p:spPr>
+        <p:txBody>
+          <a:bodyPr wrap="square" rtlCol="0" anchor="ctr"/>
+          <a:lstStyle/>
+          <a:p>
+            <a:r>
+              <a:rPr lang="en-US" sz="1467" dirty="0">
+                <a:solidFill>
+                  <a:srgbClr val="0A1628"/>
+                </a:solidFill>
+              </a:rPr>
+              <a:t>Schedule regular appointment</a:t>
+            </a:r>
+            <a:endParaRPr lang="en-US" sz="1467" dirty="0"/>
+          </a:p>
+        </p:txBody>
+      </p:sp>
+      <p:sp>
+        <p:nvSpPr>
+          <p:cNvPr id="15" name="Text 13"/>
+          <p:cNvSpPr/>
+          <p:nvPr/>
+        </p:nvSpPr>
+        <p:spPr>
+          <a:xfrm>
+            <a:off x="731520" y="5596128"/>
+            <a:ext cx="4754880" cy="414528"/>
+          </a:xfrm>
+          <a:prstGeom prst="rect">
+            <a:avLst/>
+          </a:prstGeom>
+          <a:noFill/>
+          <a:ln/>
+        </p:spPr>
+        <p:txBody>
+          <a:bodyPr wrap="square" rtlCol="0" anchor="ctr"/>
+          <a:lstStyle/>
+          <a:p>
+            <a:r>
+              <a:rPr lang="en-US" sz="1467" dirty="0">
+                <a:solidFill>
+                  <a:srgbClr val="0A1628"/>
+                </a:solidFill>
+              </a:rPr>
+              <a:t>Send reminder email</a:t>
+            </a:r>
+            <a:endParaRPr lang="en-US" sz="1467" dirty="0"/>
+          </a:p>
+        </p:txBody>
+      </p:sp>
+      <p:sp>
+        <p:nvSpPr>
+          <p:cNvPr id="16" name="Shape 14"/>
+          <p:cNvSpPr/>
+          <p:nvPr/>
+        </p:nvSpPr>
+        <p:spPr>
+          <a:xfrm>
+            <a:off x="6400800" y="1767840"/>
+            <a:ext cx="5364480" cy="4632960"/>
           </a:xfrm>
           <a:prstGeom prst="rect">
             <a:avLst/>
           </a:prstGeom>
           <a:solidFill>
-            <a:srgbClr val="0E5FA0"/>
+            <a:srgbClr val="FFFFFF"/>
           </a:solidFill>
           <a:ln/>
+          <a:effectLst>
+            <a:outerShdw blurRad="101600" dist="25400" dir="8100000" algn="bl" rotWithShape="0">
+              <a:srgbClr val="000000">
+                <a:alpha val="9000"/>
+              </a:srgbClr>
+            </a:outerShdw>
+          </a:effectLst>
         </p:spPr>
         <p:txBody>
           <a:bodyPr/>
@@ -11501,14 +13427,41 @@
       </p:sp>
       <p:sp>
         <p:nvSpPr>
-          <p:cNvPr id="6" name="Text 4"/>
-          <p:cNvSpPr/>
-          <p:nvPr/>
-        </p:nvSpPr>
-        <p:spPr>
-          <a:xfrm>
-            <a:off x="609600" y="1853184"/>
-            <a:ext cx="1828800" cy="548640"/>
+          <p:cNvPr id="17" name="Shape 15"/>
+          <p:cNvSpPr/>
+          <p:nvPr/>
+        </p:nvSpPr>
+        <p:spPr>
+          <a:xfrm>
+            <a:off x="6400800" y="1767840"/>
+            <a:ext cx="5364480" cy="609600"/>
+          </a:xfrm>
+          <a:prstGeom prst="rect">
+            <a:avLst/>
+          </a:prstGeom>
+          <a:solidFill>
+            <a:srgbClr val="E63946"/>
+          </a:solidFill>
+          <a:ln/>
+        </p:spPr>
+        <p:txBody>
+          <a:bodyPr/>
+          <a:lstStyle/>
+          <a:p>
+            <a:endParaRPr lang="en-IN" sz="2400"/>
+          </a:p>
+        </p:txBody>
+      </p:sp>
+      <p:sp>
+        <p:nvSpPr>
+          <p:cNvPr id="18" name="Text 16"/>
+          <p:cNvSpPr/>
+          <p:nvPr/>
+        </p:nvSpPr>
+        <p:spPr>
+          <a:xfrm>
+            <a:off x="6461760" y="1767840"/>
+            <a:ext cx="5242560" cy="609600"/>
           </a:xfrm>
           <a:prstGeom prst="rect">
             <a:avLst/>
@@ -11521,12 +13474,12 @@
           <a:lstStyle/>
           <a:p>
             <a:r>
-              <a:rPr lang="en-US" sz="1600" b="1" kern="0" spc="67" dirty="0">
+              <a:rPr lang="en-US" sz="1600" b="1" dirty="0">
                 <a:solidFill>
                   <a:srgbClr val="FFFFFF"/>
                 </a:solidFill>
               </a:rPr>
-              <a:t>Tool</a:t>
+              <a:t> EXAMPLE 2  (Emergency Case)</a:t>
             </a:r>
             <a:endParaRPr lang="en-US" sz="1600" dirty="0"/>
           </a:p>
@@ -11534,14 +13487,14 @@
       </p:sp>
       <p:sp>
         <p:nvSpPr>
-          <p:cNvPr id="7" name="Text 5"/>
-          <p:cNvSpPr/>
-          <p:nvPr/>
-        </p:nvSpPr>
-        <p:spPr>
-          <a:xfrm>
-            <a:off x="2682240" y="1853184"/>
-            <a:ext cx="5120640" cy="548640"/>
+          <p:cNvPr id="19" name="Text 17"/>
+          <p:cNvSpPr/>
+          <p:nvPr/>
+        </p:nvSpPr>
+        <p:spPr>
+          <a:xfrm>
+            <a:off x="6644640" y="2523744"/>
+            <a:ext cx="4876800" cy="365760"/>
           </a:xfrm>
           <a:prstGeom prst="rect">
             <a:avLst/>
@@ -11554,27 +13507,27 @@
           <a:lstStyle/>
           <a:p>
             <a:r>
-              <a:rPr lang="en-US" sz="1600" b="1" kern="0" spc="67" dirty="0">
+              <a:rPr lang="en-US" sz="1467" b="1" dirty="0">
                 <a:solidFill>
-                  <a:srgbClr val="FFFFFF"/>
+                  <a:srgbClr val="3A5A7A"/>
                 </a:solidFill>
               </a:rPr>
-              <a:t>Purpose</a:t>
-            </a:r>
-            <a:endParaRPr lang="en-US" sz="1600" dirty="0"/>
-          </a:p>
-        </p:txBody>
-      </p:sp>
-      <p:sp>
-        <p:nvSpPr>
-          <p:cNvPr id="8" name="Text 6"/>
-          <p:cNvSpPr/>
-          <p:nvPr/>
-        </p:nvSpPr>
-        <p:spPr>
-          <a:xfrm>
-            <a:off x="8046720" y="1853184"/>
-            <a:ext cx="3413760" cy="548640"/>
+              <a:t>Patient says:</a:t>
+            </a:r>
+            <a:endParaRPr lang="en-US" sz="1467" dirty="0"/>
+          </a:p>
+        </p:txBody>
+      </p:sp>
+      <p:sp>
+        <p:nvSpPr>
+          <p:cNvPr id="21" name="Text 19"/>
+          <p:cNvSpPr/>
+          <p:nvPr/>
+        </p:nvSpPr>
+        <p:spPr>
+          <a:xfrm>
+            <a:off x="6729984" y="2926080"/>
+            <a:ext cx="4730496" cy="670560"/>
           </a:xfrm>
           <a:prstGeom prst="rect">
             <a:avLst/>
@@ -11586,55 +13539,53 @@
           <a:bodyPr wrap="square" rtlCol="0" anchor="ctr"/>
           <a:lstStyle/>
           <a:p>
-            <a:r>
-              <a:rPr lang="en-US" sz="1600" b="1" kern="0" spc="67" dirty="0">
+            <a:endParaRPr lang="en-US" sz="1467" dirty="0"/>
+          </a:p>
+        </p:txBody>
+      </p:sp>
+      <p:sp>
+        <p:nvSpPr>
+          <p:cNvPr id="22" name="Text 20"/>
+          <p:cNvSpPr/>
+          <p:nvPr/>
+        </p:nvSpPr>
+        <p:spPr>
+          <a:xfrm>
+            <a:off x="6644640" y="3779520"/>
+            <a:ext cx="4876800" cy="365760"/>
+          </a:xfrm>
+          <a:prstGeom prst="rect">
+            <a:avLst/>
+          </a:prstGeom>
+          <a:noFill/>
+          <a:ln/>
+        </p:spPr>
+        <p:txBody>
+          <a:bodyPr wrap="square" rtlCol="0" anchor="ctr"/>
+          <a:lstStyle/>
+          <a:p>
+            <a:r>
+              <a:rPr lang="en-US" sz="1467" b="1" dirty="0">
                 <a:solidFill>
-                  <a:srgbClr val="FFFFFF"/>
+                  <a:srgbClr val="3A5A7A"/>
                 </a:solidFill>
               </a:rPr>
-              <a:t>When Invoked</a:t>
-            </a:r>
-            <a:endParaRPr lang="en-US" sz="1600" dirty="0"/>
-          </a:p>
-        </p:txBody>
-      </p:sp>
-      <p:sp>
-        <p:nvSpPr>
-          <p:cNvPr id="9" name="Shape 7"/>
-          <p:cNvSpPr/>
-          <p:nvPr/>
-        </p:nvSpPr>
-        <p:spPr>
-          <a:xfrm>
-            <a:off x="426720" y="2499360"/>
-            <a:ext cx="11338560" cy="755904"/>
-          </a:xfrm>
-          <a:prstGeom prst="rect">
-            <a:avLst/>
-          </a:prstGeom>
-          <a:solidFill>
-            <a:srgbClr val="12224A"/>
-          </a:solidFill>
-          <a:ln/>
-        </p:spPr>
-        <p:txBody>
-          <a:bodyPr/>
-          <a:lstStyle/>
-          <a:p>
-            <a:endParaRPr lang="en-IN" sz="2400"/>
-          </a:p>
-        </p:txBody>
-      </p:sp>
-      <p:sp>
-        <p:nvSpPr>
-          <p:cNvPr id="10" name="Text 8"/>
-          <p:cNvSpPr/>
-          <p:nvPr/>
-        </p:nvSpPr>
-        <p:spPr>
-          <a:xfrm>
-            <a:off x="585216" y="2499360"/>
-            <a:ext cx="2011680" cy="755904"/>
+              <a:t>Agent Reasoning:</a:t>
+            </a:r>
+            <a:endParaRPr lang="en-US" sz="1467" dirty="0"/>
+          </a:p>
+        </p:txBody>
+      </p:sp>
+      <p:sp>
+        <p:nvSpPr>
+          <p:cNvPr id="23" name="Text 21"/>
+          <p:cNvSpPr/>
+          <p:nvPr/>
+        </p:nvSpPr>
+        <p:spPr>
+          <a:xfrm>
+            <a:off x="6705600" y="4206240"/>
+            <a:ext cx="4754880" cy="414528"/>
           </a:xfrm>
           <a:prstGeom prst="rect">
             <a:avLst/>
@@ -11647,12 +13598,12 @@
           <a:lstStyle/>
           <a:p>
             <a:r>
-              <a:rPr lang="en-US" sz="1467" b="1" dirty="0">
+              <a:rPr lang="en-US" sz="1467" dirty="0">
                 <a:solidFill>
-                  <a:srgbClr val="00B4D8"/>
+                  <a:srgbClr val="0A1628"/>
                 </a:solidFill>
               </a:rPr>
-              <a:t> Calendar API</a:t>
+              <a:t>Urgency level: CRITICAL</a:t>
             </a:r>
             <a:endParaRPr lang="en-US" sz="1467" dirty="0"/>
           </a:p>
@@ -11660,14 +13611,14 @@
       </p:sp>
       <p:sp>
         <p:nvSpPr>
-          <p:cNvPr id="11" name="Text 9"/>
-          <p:cNvSpPr/>
-          <p:nvPr/>
-        </p:nvSpPr>
-        <p:spPr>
-          <a:xfrm>
-            <a:off x="2657856" y="2499360"/>
-            <a:ext cx="5242560" cy="755904"/>
+          <p:cNvPr id="24" name="Text 22"/>
+          <p:cNvSpPr/>
+          <p:nvPr/>
+        </p:nvSpPr>
+        <p:spPr>
+          <a:xfrm>
+            <a:off x="6705600" y="4669536"/>
+            <a:ext cx="4754880" cy="414528"/>
           </a:xfrm>
           <a:prstGeom prst="rect">
             <a:avLst/>
@@ -11680,27 +13631,27 @@
           <a:lstStyle/>
           <a:p>
             <a:r>
-              <a:rPr lang="en-US" sz="1400" dirty="0">
+              <a:rPr lang="en-US" sz="1467" dirty="0">
                 <a:solidFill>
-                  <a:srgbClr val="FFFFFF"/>
+                  <a:srgbClr val="0A1628"/>
                 </a:solidFill>
               </a:rPr>
-              <a:t>Check real-time doctor availability across departments</a:t>
-            </a:r>
-            <a:endParaRPr lang="en-US" sz="1400" dirty="0"/>
-          </a:p>
-        </p:txBody>
-      </p:sp>
-      <p:sp>
-        <p:nvSpPr>
-          <p:cNvPr id="12" name="Text 10"/>
-          <p:cNvSpPr/>
-          <p:nvPr/>
-        </p:nvSpPr>
-        <p:spPr>
-          <a:xfrm>
-            <a:off x="7985760" y="2499360"/>
-            <a:ext cx="3413760" cy="755904"/>
+              <a:t>Possible cardiac emergency detected</a:t>
+            </a:r>
+            <a:endParaRPr lang="en-US" sz="1467" dirty="0"/>
+          </a:p>
+        </p:txBody>
+      </p:sp>
+      <p:sp>
+        <p:nvSpPr>
+          <p:cNvPr id="25" name="Text 23"/>
+          <p:cNvSpPr/>
+          <p:nvPr/>
+        </p:nvSpPr>
+        <p:spPr>
+          <a:xfrm>
+            <a:off x="6705600" y="5132832"/>
+            <a:ext cx="4754880" cy="414528"/>
           </a:xfrm>
           <a:prstGeom prst="rect">
             <a:avLst/>
@@ -11713,54 +13664,27 @@
           <a:lstStyle/>
           <a:p>
             <a:r>
-              <a:rPr lang="en-US" sz="1333" i="1" dirty="0">
+              <a:rPr lang="en-US" sz="1467" dirty="0">
                 <a:solidFill>
-                  <a:srgbClr val="7BA4C8"/>
+                  <a:srgbClr val="0A1628"/>
                 </a:solidFill>
               </a:rPr>
-              <a:t>Invoked when selecting appointment slots</a:t>
-            </a:r>
-            <a:endParaRPr lang="en-US" sz="1333" dirty="0"/>
-          </a:p>
-        </p:txBody>
-      </p:sp>
-      <p:sp>
-        <p:nvSpPr>
-          <p:cNvPr id="13" name="Shape 11"/>
-          <p:cNvSpPr/>
-          <p:nvPr/>
-        </p:nvSpPr>
-        <p:spPr>
-          <a:xfrm>
-            <a:off x="426720" y="3316224"/>
-            <a:ext cx="11338560" cy="755904"/>
-          </a:xfrm>
-          <a:prstGeom prst="rect">
-            <a:avLst/>
-          </a:prstGeom>
-          <a:solidFill>
-            <a:srgbClr val="0D1A3A"/>
-          </a:solidFill>
-          <a:ln/>
-        </p:spPr>
-        <p:txBody>
-          <a:bodyPr/>
-          <a:lstStyle/>
-          <a:p>
-            <a:endParaRPr lang="en-IN" sz="2400"/>
-          </a:p>
-        </p:txBody>
-      </p:sp>
-      <p:sp>
-        <p:nvSpPr>
-          <p:cNvPr id="14" name="Text 12"/>
-          <p:cNvSpPr/>
-          <p:nvPr/>
-        </p:nvSpPr>
-        <p:spPr>
-          <a:xfrm>
-            <a:off x="585216" y="3316224"/>
-            <a:ext cx="2011680" cy="755904"/>
+              <a:t>Escalate to emergency department</a:t>
+            </a:r>
+            <a:endParaRPr lang="en-US" sz="1467" dirty="0"/>
+          </a:p>
+        </p:txBody>
+      </p:sp>
+      <p:sp>
+        <p:nvSpPr>
+          <p:cNvPr id="26" name="Text 24"/>
+          <p:cNvSpPr/>
+          <p:nvPr/>
+        </p:nvSpPr>
+        <p:spPr>
+          <a:xfrm>
+            <a:off x="6705600" y="5596128"/>
+            <a:ext cx="4754880" cy="414528"/>
           </a:xfrm>
           <a:prstGeom prst="rect">
             <a:avLst/>
@@ -11773,12 +13697,12 @@
           <a:lstStyle/>
           <a:p>
             <a:r>
-              <a:rPr lang="en-US" sz="1467" b="1" dirty="0">
+              <a:rPr lang="en-US" sz="1467" dirty="0">
                 <a:solidFill>
-                  <a:srgbClr val="00B4D8"/>
+                  <a:srgbClr val="0A1628"/>
                 </a:solidFill>
               </a:rPr>
-              <a:t>Patient Database</a:t>
+              <a:t>Send urgent SMS alert immediately</a:t>
             </a:r>
             <a:endParaRPr lang="en-US" sz="1467" dirty="0"/>
           </a:p>
@@ -11786,445 +13710,73 @@
       </p:sp>
       <p:sp>
         <p:nvSpPr>
-          <p:cNvPr id="15" name="Text 13"/>
-          <p:cNvSpPr/>
-          <p:nvPr/>
-        </p:nvSpPr>
-        <p:spPr>
-          <a:xfrm>
-            <a:off x="2657856" y="3316224"/>
-            <a:ext cx="5242560" cy="755904"/>
-          </a:xfrm>
-          <a:prstGeom prst="rect">
-            <a:avLst/>
-          </a:prstGeom>
-          <a:noFill/>
-          <a:ln/>
-        </p:spPr>
-        <p:txBody>
-          <a:bodyPr wrap="square" rtlCol="0" anchor="ctr"/>
-          <a:lstStyle/>
-          <a:p>
-            <a:r>
-              <a:rPr lang="en-US" sz="1400" dirty="0">
-                <a:solidFill>
-                  <a:srgbClr val="FFFFFF"/>
-                </a:solidFill>
-              </a:rPr>
-              <a:t>Retrieve patient history, allergies, and prior appointments</a:t>
-            </a:r>
-            <a:endParaRPr lang="en-US" sz="1400" dirty="0"/>
-          </a:p>
-        </p:txBody>
-      </p:sp>
-      <p:sp>
-        <p:nvSpPr>
-          <p:cNvPr id="16" name="Text 14"/>
-          <p:cNvSpPr/>
-          <p:nvPr/>
-        </p:nvSpPr>
-        <p:spPr>
-          <a:xfrm>
-            <a:off x="7985760" y="3316224"/>
-            <a:ext cx="3413760" cy="755904"/>
-          </a:xfrm>
-          <a:prstGeom prst="rect">
-            <a:avLst/>
-          </a:prstGeom>
-          <a:noFill/>
-          <a:ln/>
-        </p:spPr>
-        <p:txBody>
-          <a:bodyPr wrap="square" rtlCol="0" anchor="ctr"/>
-          <a:lstStyle/>
-          <a:p>
-            <a:r>
-              <a:rPr lang="en-US" sz="1333" i="1" dirty="0">
-                <a:solidFill>
-                  <a:srgbClr val="7BA4C8"/>
-                </a:solidFill>
-              </a:rPr>
-              <a:t>Used to personalize specialist selection</a:t>
-            </a:r>
-            <a:endParaRPr lang="en-US" sz="1333" dirty="0"/>
-          </a:p>
-        </p:txBody>
-      </p:sp>
-      <p:sp>
-        <p:nvSpPr>
-          <p:cNvPr id="17" name="Shape 15"/>
-          <p:cNvSpPr/>
-          <p:nvPr/>
-        </p:nvSpPr>
-        <p:spPr>
-          <a:xfrm>
-            <a:off x="426720" y="4133088"/>
-            <a:ext cx="11338560" cy="755904"/>
-          </a:xfrm>
-          <a:prstGeom prst="rect">
-            <a:avLst/>
-          </a:prstGeom>
-          <a:solidFill>
-            <a:srgbClr val="12224A"/>
-          </a:solidFill>
-          <a:ln/>
-        </p:spPr>
-        <p:txBody>
-          <a:bodyPr/>
-          <a:lstStyle/>
-          <a:p>
-            <a:endParaRPr lang="en-IN" sz="2400"/>
-          </a:p>
-        </p:txBody>
-      </p:sp>
-      <p:sp>
-        <p:nvSpPr>
-          <p:cNvPr id="18" name="Text 16"/>
-          <p:cNvSpPr/>
-          <p:nvPr/>
-        </p:nvSpPr>
-        <p:spPr>
-          <a:xfrm>
-            <a:off x="585216" y="4133088"/>
-            <a:ext cx="2011680" cy="755904"/>
-          </a:xfrm>
-          <a:prstGeom prst="rect">
-            <a:avLst/>
-          </a:prstGeom>
-          <a:noFill/>
-          <a:ln/>
-        </p:spPr>
-        <p:txBody>
-          <a:bodyPr wrap="square" rtlCol="0" anchor="ctr"/>
-          <a:lstStyle/>
-          <a:p>
-            <a:r>
-              <a:rPr lang="en-US" sz="1467" b="1" dirty="0">
-                <a:solidFill>
-                  <a:srgbClr val="00B4D8"/>
-                </a:solidFill>
-              </a:rPr>
-              <a:t>SMS Tool</a:t>
-            </a:r>
-            <a:endParaRPr lang="en-US" sz="1467" dirty="0"/>
-          </a:p>
-        </p:txBody>
-      </p:sp>
-      <p:sp>
-        <p:nvSpPr>
-          <p:cNvPr id="19" name="Text 17"/>
-          <p:cNvSpPr/>
-          <p:nvPr/>
-        </p:nvSpPr>
-        <p:spPr>
-          <a:xfrm>
-            <a:off x="2657856" y="4133088"/>
-            <a:ext cx="5242560" cy="755904"/>
-          </a:xfrm>
-          <a:prstGeom prst="rect">
-            <a:avLst/>
-          </a:prstGeom>
-          <a:noFill/>
-          <a:ln/>
-        </p:spPr>
-        <p:txBody>
-          <a:bodyPr wrap="square" rtlCol="0" anchor="ctr"/>
-          <a:lstStyle/>
-          <a:p>
-            <a:r>
-              <a:rPr lang="en-US" sz="1400" dirty="0">
-                <a:solidFill>
-                  <a:srgbClr val="FFFFFF"/>
-                </a:solidFill>
-              </a:rPr>
-              <a:t>Send immediate text alerts for urgent cases or reminders</a:t>
-            </a:r>
-            <a:endParaRPr lang="en-US" sz="1400" dirty="0"/>
-          </a:p>
-        </p:txBody>
-      </p:sp>
-      <p:sp>
-        <p:nvSpPr>
-          <p:cNvPr id="20" name="Text 18"/>
-          <p:cNvSpPr/>
-          <p:nvPr/>
-        </p:nvSpPr>
-        <p:spPr>
-          <a:xfrm>
-            <a:off x="7985760" y="4133088"/>
-            <a:ext cx="3413760" cy="755904"/>
-          </a:xfrm>
-          <a:prstGeom prst="rect">
-            <a:avLst/>
-          </a:prstGeom>
-          <a:noFill/>
-          <a:ln/>
-        </p:spPr>
-        <p:txBody>
-          <a:bodyPr wrap="square" rtlCol="0" anchor="ctr"/>
-          <a:lstStyle/>
-          <a:p>
-            <a:r>
-              <a:rPr lang="en-US" sz="1333" i="1" dirty="0">
-                <a:solidFill>
-                  <a:srgbClr val="7BA4C8"/>
-                </a:solidFill>
-              </a:rPr>
-              <a:t>Triggered on emergency or day before booking</a:t>
-            </a:r>
-            <a:endParaRPr lang="en-US" sz="1333" dirty="0"/>
-          </a:p>
-        </p:txBody>
-      </p:sp>
-      <p:sp>
-        <p:nvSpPr>
-          <p:cNvPr id="21" name="Shape 19"/>
-          <p:cNvSpPr/>
-          <p:nvPr/>
-        </p:nvSpPr>
-        <p:spPr>
-          <a:xfrm>
-            <a:off x="426720" y="4949952"/>
-            <a:ext cx="11338560" cy="755904"/>
-          </a:xfrm>
-          <a:prstGeom prst="rect">
-            <a:avLst/>
-          </a:prstGeom>
-          <a:solidFill>
-            <a:srgbClr val="0D1A3A"/>
-          </a:solidFill>
-          <a:ln/>
-        </p:spPr>
-        <p:txBody>
-          <a:bodyPr/>
-          <a:lstStyle/>
-          <a:p>
-            <a:endParaRPr lang="en-IN" sz="2400"/>
-          </a:p>
-        </p:txBody>
-      </p:sp>
-      <p:sp>
-        <p:nvSpPr>
-          <p:cNvPr id="22" name="Text 20"/>
-          <p:cNvSpPr/>
-          <p:nvPr/>
-        </p:nvSpPr>
-        <p:spPr>
-          <a:xfrm>
-            <a:off x="585216" y="4949952"/>
-            <a:ext cx="2011680" cy="755904"/>
-          </a:xfrm>
-          <a:prstGeom prst="rect">
-            <a:avLst/>
-          </a:prstGeom>
-          <a:noFill/>
-          <a:ln/>
-        </p:spPr>
-        <p:txBody>
-          <a:bodyPr wrap="square" rtlCol="0" anchor="ctr"/>
-          <a:lstStyle/>
-          <a:p>
-            <a:r>
-              <a:rPr lang="en-US" sz="1467" b="1" dirty="0">
-                <a:solidFill>
-                  <a:srgbClr val="00B4D8"/>
-                </a:solidFill>
-              </a:rPr>
-              <a:t>Email Tool</a:t>
-            </a:r>
-            <a:endParaRPr lang="en-US" sz="1467" dirty="0"/>
-          </a:p>
-        </p:txBody>
-      </p:sp>
-      <p:sp>
-        <p:nvSpPr>
-          <p:cNvPr id="23" name="Text 21"/>
-          <p:cNvSpPr/>
-          <p:nvPr/>
-        </p:nvSpPr>
-        <p:spPr>
-          <a:xfrm>
-            <a:off x="2657856" y="4949952"/>
-            <a:ext cx="5242560" cy="755904"/>
-          </a:xfrm>
-          <a:prstGeom prst="rect">
-            <a:avLst/>
-          </a:prstGeom>
-          <a:noFill/>
-          <a:ln/>
-        </p:spPr>
-        <p:txBody>
-          <a:bodyPr wrap="square" rtlCol="0" anchor="ctr"/>
-          <a:lstStyle/>
-          <a:p>
-            <a:r>
-              <a:rPr lang="en-US" sz="1400" dirty="0">
-                <a:solidFill>
-                  <a:srgbClr val="FFFFFF"/>
-                </a:solidFill>
-              </a:rPr>
-              <a:t>Dispatch formatted appointment confirmation emails</a:t>
-            </a:r>
-            <a:endParaRPr lang="en-US" sz="1400" dirty="0"/>
-          </a:p>
-        </p:txBody>
-      </p:sp>
-      <p:sp>
-        <p:nvSpPr>
-          <p:cNvPr id="24" name="Text 22"/>
-          <p:cNvSpPr/>
-          <p:nvPr/>
-        </p:nvSpPr>
-        <p:spPr>
-          <a:xfrm>
-            <a:off x="7985760" y="4949952"/>
-            <a:ext cx="3413760" cy="755904"/>
-          </a:xfrm>
-          <a:prstGeom prst="rect">
-            <a:avLst/>
-          </a:prstGeom>
-          <a:noFill/>
-          <a:ln/>
-        </p:spPr>
-        <p:txBody>
-          <a:bodyPr wrap="square" rtlCol="0" anchor="ctr"/>
-          <a:lstStyle/>
-          <a:p>
-            <a:r>
-              <a:rPr lang="en-US" sz="1333" i="1" dirty="0">
-                <a:solidFill>
-                  <a:srgbClr val="7BA4C8"/>
-                </a:solidFill>
-              </a:rPr>
-              <a:t>Standard confirmations for routine cases</a:t>
-            </a:r>
-            <a:endParaRPr lang="en-US" sz="1333" dirty="0"/>
-          </a:p>
-        </p:txBody>
-      </p:sp>
-      <p:sp>
-        <p:nvSpPr>
-          <p:cNvPr id="25" name="Shape 23"/>
-          <p:cNvSpPr/>
-          <p:nvPr/>
-        </p:nvSpPr>
-        <p:spPr>
-          <a:xfrm>
-            <a:off x="426720" y="5766816"/>
-            <a:ext cx="11338560" cy="755904"/>
-          </a:xfrm>
-          <a:prstGeom prst="rect">
-            <a:avLst/>
-          </a:prstGeom>
-          <a:solidFill>
-            <a:srgbClr val="12224A"/>
-          </a:solidFill>
-          <a:ln/>
-        </p:spPr>
-        <p:txBody>
-          <a:bodyPr/>
-          <a:lstStyle/>
-          <a:p>
-            <a:endParaRPr lang="en-IN" sz="2400"/>
-          </a:p>
-        </p:txBody>
-      </p:sp>
-      <p:sp>
-        <p:nvSpPr>
-          <p:cNvPr id="26" name="Text 24"/>
-          <p:cNvSpPr/>
-          <p:nvPr/>
-        </p:nvSpPr>
-        <p:spPr>
-          <a:xfrm>
-            <a:off x="585216" y="5766816"/>
-            <a:ext cx="2011680" cy="755904"/>
-          </a:xfrm>
-          <a:prstGeom prst="rect">
-            <a:avLst/>
-          </a:prstGeom>
-          <a:noFill/>
-          <a:ln/>
-        </p:spPr>
-        <p:txBody>
-          <a:bodyPr wrap="square" rtlCol="0" anchor="ctr"/>
-          <a:lstStyle/>
-          <a:p>
-            <a:r>
-              <a:rPr lang="en-US" sz="1467" b="1" dirty="0">
-                <a:solidFill>
-                  <a:srgbClr val="00B4D8"/>
-                </a:solidFill>
-              </a:rPr>
-              <a:t> Emergency Alert Tool</a:t>
-            </a:r>
-            <a:endParaRPr lang="en-US" sz="1467" dirty="0"/>
-          </a:p>
-        </p:txBody>
-      </p:sp>
-      <p:sp>
-        <p:nvSpPr>
-          <p:cNvPr id="27" name="Text 25"/>
-          <p:cNvSpPr/>
-          <p:nvPr/>
-        </p:nvSpPr>
-        <p:spPr>
-          <a:xfrm>
-            <a:off x="2657856" y="5766816"/>
-            <a:ext cx="5242560" cy="755904"/>
-          </a:xfrm>
-          <a:prstGeom prst="rect">
-            <a:avLst/>
-          </a:prstGeom>
-          <a:noFill/>
-          <a:ln/>
-        </p:spPr>
-        <p:txBody>
-          <a:bodyPr wrap="square" rtlCol="0" anchor="ctr"/>
-          <a:lstStyle/>
-          <a:p>
-            <a:r>
-              <a:rPr lang="en-US" sz="1400" dirty="0">
-                <a:solidFill>
-                  <a:srgbClr val="FFFFFF"/>
-                </a:solidFill>
-              </a:rPr>
-              <a:t>Notify ER staff and on-call teams instantly</a:t>
-            </a:r>
-            <a:endParaRPr lang="en-US" sz="1400" dirty="0"/>
-          </a:p>
-        </p:txBody>
-      </p:sp>
-      <p:sp>
-        <p:nvSpPr>
-          <p:cNvPr id="28" name="Text 26"/>
-          <p:cNvSpPr/>
-          <p:nvPr/>
-        </p:nvSpPr>
-        <p:spPr>
-          <a:xfrm>
-            <a:off x="7985760" y="5766816"/>
-            <a:ext cx="3413760" cy="755904"/>
-          </a:xfrm>
-          <a:prstGeom prst="rect">
-            <a:avLst/>
-          </a:prstGeom>
-          <a:noFill/>
-          <a:ln/>
-        </p:spPr>
-        <p:txBody>
-          <a:bodyPr wrap="square" rtlCol="0" anchor="ctr"/>
-          <a:lstStyle/>
-          <a:p>
-            <a:r>
-              <a:rPr lang="en-US" sz="1333" i="1" dirty="0">
-                <a:solidFill>
-                  <a:srgbClr val="7BA4C8"/>
-                </a:solidFill>
-              </a:rPr>
-              <a:t>Activated when critical symptoms are detected</a:t>
-            </a:r>
-            <a:endParaRPr lang="en-US" sz="1333" dirty="0"/>
+          <p:cNvPr id="28" name="TextBox 27">
+            <a:extLst>
+              <a:ext uri="{FF2B5EF4-FFF2-40B4-BE49-F238E27FC236}">
+                <a16:creationId xmlns:a16="http://schemas.microsoft.com/office/drawing/2014/main" id="{4309F857-1889-9882-6813-5BF7AB5FFB31}"/>
+              </a:ext>
+            </a:extLst>
+          </p:cNvPr>
+          <p:cNvSpPr txBox="1"/>
+          <p:nvPr/>
+        </p:nvSpPr>
+        <p:spPr>
+          <a:xfrm>
+            <a:off x="731520" y="2926080"/>
+            <a:ext cx="4622995" cy="646331"/>
+          </a:xfrm>
+          <a:prstGeom prst="rect">
+            <a:avLst/>
+          </a:prstGeom>
+          <a:noFill/>
+        </p:spPr>
+        <p:txBody>
+          <a:bodyPr wrap="square" rtlCol="0">
+            <a:spAutoFit/>
+          </a:bodyPr>
+          <a:lstStyle/>
+          <a:p>
+            <a:r>
+              <a:rPr lang="en-US" dirty="0"/>
+              <a:t>l have mild fever and headache for two days.</a:t>
+            </a:r>
+            <a:endParaRPr lang="en-IN" dirty="0"/>
+          </a:p>
+        </p:txBody>
+      </p:sp>
+      <p:sp>
+        <p:nvSpPr>
+          <p:cNvPr id="29" name="TextBox 28">
+            <a:extLst>
+              <a:ext uri="{FF2B5EF4-FFF2-40B4-BE49-F238E27FC236}">
+                <a16:creationId xmlns:a16="http://schemas.microsoft.com/office/drawing/2014/main" id="{783F0519-6B2D-05A0-9DD8-ABF8CEDE01A7}"/>
+              </a:ext>
+            </a:extLst>
+          </p:cNvPr>
+          <p:cNvSpPr txBox="1"/>
+          <p:nvPr/>
+        </p:nvSpPr>
+        <p:spPr>
+          <a:xfrm>
+            <a:off x="6705600" y="2926080"/>
+            <a:ext cx="4730496" cy="646331"/>
+          </a:xfrm>
+          <a:prstGeom prst="rect">
+            <a:avLst/>
+          </a:prstGeom>
+          <a:noFill/>
+        </p:spPr>
+        <p:txBody>
+          <a:bodyPr wrap="square" rtlCol="0">
+            <a:spAutoFit/>
+          </a:bodyPr>
+          <a:lstStyle/>
+          <a:p>
+            <a:r>
+              <a:rPr lang="en-US" dirty="0"/>
+              <a:t>I have severe chest pain and difficulty breathing.</a:t>
+            </a:r>
+            <a:endParaRPr lang="en-IN" dirty="0"/>
           </a:p>
         </p:txBody>
       </p:sp>
@@ -12268,6 +13820,66 @@
             <a:avLst/>
           </a:prstGeom>
           <a:solidFill>
+            <a:srgbClr val="00B4D8"/>
+          </a:solidFill>
+          <a:ln/>
+        </p:spPr>
+        <p:txBody>
+          <a:bodyPr/>
+          <a:lstStyle/>
+          <a:p>
+            <a:endParaRPr lang="en-IN" sz="2400"/>
+          </a:p>
+        </p:txBody>
+      </p:sp>
+      <p:sp>
+        <p:nvSpPr>
+          <p:cNvPr id="3" name="Text 1"/>
+          <p:cNvSpPr/>
+          <p:nvPr/>
+        </p:nvSpPr>
+        <p:spPr>
+          <a:xfrm>
+            <a:off x="487680" y="0"/>
+            <a:ext cx="10972800" cy="914400"/>
+          </a:xfrm>
+          <a:prstGeom prst="rect">
+            <a:avLst/>
+          </a:prstGeom>
+          <a:noFill/>
+          <a:ln/>
+        </p:spPr>
+        <p:txBody>
+          <a:bodyPr wrap="square" rtlCol="0" anchor="ctr"/>
+          <a:lstStyle/>
+          <a:p>
+            <a:r>
+              <a:rPr lang="en-US" sz="1733" b="1" kern="0" spc="267" dirty="0">
+                <a:solidFill>
+                  <a:srgbClr val="0A1628"/>
+                </a:solidFill>
+              </a:rPr>
+              <a:t>TOOL CALLING</a:t>
+            </a:r>
+            <a:endParaRPr lang="en-US" sz="1733" dirty="0"/>
+          </a:p>
+        </p:txBody>
+      </p:sp>
+      <p:sp>
+        <p:nvSpPr>
+          <p:cNvPr id="5" name="Shape 3"/>
+          <p:cNvSpPr/>
+          <p:nvPr/>
+        </p:nvSpPr>
+        <p:spPr>
+          <a:xfrm>
+            <a:off x="426720" y="1853184"/>
+            <a:ext cx="11338560" cy="548640"/>
+          </a:xfrm>
+          <a:prstGeom prst="rect">
+            <a:avLst/>
+          </a:prstGeom>
+          <a:solidFill>
             <a:srgbClr val="0E5FA0"/>
           </a:solidFill>
           <a:ln/>
@@ -12282,14 +13894,14 @@
       </p:sp>
       <p:sp>
         <p:nvSpPr>
-          <p:cNvPr id="3" name="Text 1"/>
-          <p:cNvSpPr/>
-          <p:nvPr/>
-        </p:nvSpPr>
-        <p:spPr>
-          <a:xfrm>
-            <a:off x="487680" y="0"/>
-            <a:ext cx="10972800" cy="914400"/>
+          <p:cNvPr id="6" name="Text 4"/>
+          <p:cNvSpPr/>
+          <p:nvPr/>
+        </p:nvSpPr>
+        <p:spPr>
+          <a:xfrm>
+            <a:off x="609600" y="1853184"/>
+            <a:ext cx="1828800" cy="548640"/>
           </a:xfrm>
           <a:prstGeom prst="rect">
             <a:avLst/>
@@ -12302,73 +13914,45 @@
           <a:lstStyle/>
           <a:p>
             <a:r>
-              <a:rPr lang="en-US" sz="1733" b="1" kern="0" spc="267" dirty="0">
+              <a:rPr lang="en-US" sz="1600" b="1" kern="0" spc="67" dirty="0">
                 <a:solidFill>
                   <a:srgbClr val="FFFFFF"/>
                 </a:solidFill>
               </a:rPr>
-              <a:t>WORKFLOW vs AI AGENT</a:t>
-            </a:r>
-            <a:endParaRPr lang="en-US" sz="1733" dirty="0"/>
-          </a:p>
-        </p:txBody>
-      </p:sp>
-      <p:sp>
-        <p:nvSpPr>
-          <p:cNvPr id="5" name="Shape 3"/>
-          <p:cNvSpPr/>
-          <p:nvPr/>
-        </p:nvSpPr>
-        <p:spPr>
-          <a:xfrm>
-            <a:off x="426720" y="1767840"/>
-            <a:ext cx="3352800" cy="548640"/>
-          </a:xfrm>
-          <a:prstGeom prst="rect">
-            <a:avLst/>
-          </a:prstGeom>
-          <a:solidFill>
-            <a:srgbClr val="0E5FA0"/>
-          </a:solidFill>
-          <a:ln/>
-        </p:spPr>
-        <p:txBody>
-          <a:bodyPr/>
-          <a:lstStyle/>
-          <a:p>
-            <a:endParaRPr lang="en-IN" sz="2400"/>
-          </a:p>
-        </p:txBody>
-      </p:sp>
-      <p:sp>
-        <p:nvSpPr>
-          <p:cNvPr id="6" name="Text 4"/>
-          <p:cNvSpPr/>
-          <p:nvPr/>
-        </p:nvSpPr>
-        <p:spPr>
-          <a:xfrm>
-            <a:off x="426720" y="1767840"/>
-            <a:ext cx="3352800" cy="548640"/>
-          </a:xfrm>
-          <a:prstGeom prst="rect">
-            <a:avLst/>
-          </a:prstGeom>
-          <a:noFill/>
-          <a:ln/>
-        </p:spPr>
-        <p:txBody>
-          <a:bodyPr wrap="square" lIns="0" tIns="0" rIns="0" bIns="0" rtlCol="0" anchor="ctr"/>
-          <a:lstStyle/>
-          <a:p>
-            <a:pPr algn="ctr"/>
-            <a:r>
-              <a:rPr lang="en-US" sz="1600" b="1" dirty="0">
+              <a:t>Tool</a:t>
+            </a:r>
+            <a:endParaRPr lang="en-US" sz="1600" dirty="0"/>
+          </a:p>
+        </p:txBody>
+      </p:sp>
+      <p:sp>
+        <p:nvSpPr>
+          <p:cNvPr id="7" name="Text 5"/>
+          <p:cNvSpPr/>
+          <p:nvPr/>
+        </p:nvSpPr>
+        <p:spPr>
+          <a:xfrm>
+            <a:off x="2682240" y="1853184"/>
+            <a:ext cx="5120640" cy="548640"/>
+          </a:xfrm>
+          <a:prstGeom prst="rect">
+            <a:avLst/>
+          </a:prstGeom>
+          <a:noFill/>
+          <a:ln/>
+        </p:spPr>
+        <p:txBody>
+          <a:bodyPr wrap="square" rtlCol="0" anchor="ctr"/>
+          <a:lstStyle/>
+          <a:p>
+            <a:r>
+              <a:rPr lang="en-US" sz="1600" b="1" kern="0" spc="67" dirty="0">
                 <a:solidFill>
                   <a:srgbClr val="FFFFFF"/>
                 </a:solidFill>
               </a:rPr>
-              <a:t>Criterion</a:t>
+              <a:t>Purpose</a:t>
             </a:r>
             <a:endParaRPr lang="en-US" sz="1600" dirty="0"/>
           </a:p>
@@ -12376,60 +13960,32 @@
       </p:sp>
       <p:sp>
         <p:nvSpPr>
-          <p:cNvPr id="7" name="Shape 5"/>
-          <p:cNvSpPr/>
-          <p:nvPr/>
-        </p:nvSpPr>
-        <p:spPr>
-          <a:xfrm>
-            <a:off x="3901440" y="1767840"/>
-            <a:ext cx="3840480" cy="548640"/>
-          </a:xfrm>
-          <a:prstGeom prst="rect">
-            <a:avLst/>
-          </a:prstGeom>
-          <a:solidFill>
-            <a:srgbClr val="5B6E8C"/>
-          </a:solidFill>
-          <a:ln/>
-        </p:spPr>
-        <p:txBody>
-          <a:bodyPr/>
-          <a:lstStyle/>
-          <a:p>
-            <a:endParaRPr lang="en-IN" sz="2400"/>
-          </a:p>
-        </p:txBody>
-      </p:sp>
-      <p:sp>
-        <p:nvSpPr>
           <p:cNvPr id="8" name="Text 6"/>
           <p:cNvSpPr/>
           <p:nvPr/>
         </p:nvSpPr>
         <p:spPr>
           <a:xfrm>
-            <a:off x="3901440" y="1767840"/>
-            <a:ext cx="3840480" cy="548640"/>
-          </a:xfrm>
-          <a:prstGeom prst="rect">
-            <a:avLst/>
-          </a:prstGeom>
-          <a:noFill/>
-          <a:ln/>
-        </p:spPr>
-        <p:txBody>
-          <a:bodyPr wrap="square" lIns="0" tIns="0" rIns="0" bIns="0" rtlCol="0" anchor="ctr"/>
-          <a:lstStyle/>
-          <a:p>
-            <a:pPr algn="ctr"/>
-            <a:r>
-              <a:rPr lang="en-US" sz="1600" b="1" dirty="0">
+            <a:off x="8046720" y="1853184"/>
+            <a:ext cx="3413760" cy="548640"/>
+          </a:xfrm>
+          <a:prstGeom prst="rect">
+            <a:avLst/>
+          </a:prstGeom>
+          <a:noFill/>
+          <a:ln/>
+        </p:spPr>
+        <p:txBody>
+          <a:bodyPr wrap="square" rtlCol="0" anchor="ctr"/>
+          <a:lstStyle/>
+          <a:p>
+            <a:r>
+              <a:rPr lang="en-US" sz="1600" b="1" kern="0" spc="67" dirty="0">
                 <a:solidFill>
                   <a:srgbClr val="FFFFFF"/>
                 </a:solidFill>
               </a:rPr>
-              <a:t>Traditional Workflow</a:t>
+              <a:t>When Invoked</a:t>
             </a:r>
             <a:endParaRPr lang="en-US" sz="1600" dirty="0"/>
           </a:p>
@@ -12443,14 +13999,14 @@
         </p:nvSpPr>
         <p:spPr>
           <a:xfrm>
-            <a:off x="7924800" y="1767840"/>
-            <a:ext cx="3840480" cy="548640"/>
+            <a:off x="426720" y="2499360"/>
+            <a:ext cx="11338560" cy="755904"/>
           </a:xfrm>
           <a:prstGeom prst="rect">
             <a:avLst/>
           </a:prstGeom>
           <a:solidFill>
-            <a:srgbClr val="06A77D"/>
+            <a:srgbClr val="12224A"/>
           </a:solidFill>
           <a:ln/>
         </p:spPr>
@@ -12470,48 +14026,113 @@
         </p:nvSpPr>
         <p:spPr>
           <a:xfrm>
-            <a:off x="7924800" y="1767840"/>
-            <a:ext cx="3840480" cy="548640"/>
-          </a:xfrm>
-          <a:prstGeom prst="rect">
-            <a:avLst/>
-          </a:prstGeom>
-          <a:noFill/>
-          <a:ln/>
-        </p:spPr>
-        <p:txBody>
-          <a:bodyPr wrap="square" lIns="0" tIns="0" rIns="0" bIns="0" rtlCol="0" anchor="ctr"/>
-          <a:lstStyle/>
-          <a:p>
-            <a:pPr algn="ctr"/>
-            <a:r>
-              <a:rPr lang="en-US" sz="1600" b="1" dirty="0">
+            <a:off x="585216" y="2499360"/>
+            <a:ext cx="2011680" cy="755904"/>
+          </a:xfrm>
+          <a:prstGeom prst="rect">
+            <a:avLst/>
+          </a:prstGeom>
+          <a:noFill/>
+          <a:ln/>
+        </p:spPr>
+        <p:txBody>
+          <a:bodyPr wrap="square" rtlCol="0" anchor="ctr"/>
+          <a:lstStyle/>
+          <a:p>
+            <a:r>
+              <a:rPr lang="en-US" sz="1467" b="1" dirty="0">
+                <a:solidFill>
+                  <a:srgbClr val="00B4D8"/>
+                </a:solidFill>
+              </a:rPr>
+              <a:t> Calendar API</a:t>
+            </a:r>
+            <a:endParaRPr lang="en-US" sz="1467" dirty="0"/>
+          </a:p>
+        </p:txBody>
+      </p:sp>
+      <p:sp>
+        <p:nvSpPr>
+          <p:cNvPr id="11" name="Text 9"/>
+          <p:cNvSpPr/>
+          <p:nvPr/>
+        </p:nvSpPr>
+        <p:spPr>
+          <a:xfrm>
+            <a:off x="2657856" y="2499360"/>
+            <a:ext cx="5242560" cy="755904"/>
+          </a:xfrm>
+          <a:prstGeom prst="rect">
+            <a:avLst/>
+          </a:prstGeom>
+          <a:noFill/>
+          <a:ln/>
+        </p:spPr>
+        <p:txBody>
+          <a:bodyPr wrap="square" rtlCol="0" anchor="ctr"/>
+          <a:lstStyle/>
+          <a:p>
+            <a:r>
+              <a:rPr lang="en-US" sz="1400" dirty="0">
                 <a:solidFill>
                   <a:srgbClr val="FFFFFF"/>
                 </a:solidFill>
               </a:rPr>
-              <a:t>AI Agent</a:t>
-            </a:r>
-            <a:endParaRPr lang="en-US" sz="1600" dirty="0"/>
-          </a:p>
-        </p:txBody>
-      </p:sp>
-      <p:sp>
-        <p:nvSpPr>
-          <p:cNvPr id="11" name="Shape 9"/>
-          <p:cNvSpPr/>
-          <p:nvPr/>
-        </p:nvSpPr>
-        <p:spPr>
-          <a:xfrm>
-            <a:off x="426720" y="2401824"/>
-            <a:ext cx="11338560" cy="487680"/>
+              <a:t>Check real-time doctor availability across departments</a:t>
+            </a:r>
+            <a:endParaRPr lang="en-US" sz="1400" dirty="0"/>
+          </a:p>
+        </p:txBody>
+      </p:sp>
+      <p:sp>
+        <p:nvSpPr>
+          <p:cNvPr id="12" name="Text 10"/>
+          <p:cNvSpPr/>
+          <p:nvPr/>
+        </p:nvSpPr>
+        <p:spPr>
+          <a:xfrm>
+            <a:off x="7985760" y="2499360"/>
+            <a:ext cx="3413760" cy="755904"/>
+          </a:xfrm>
+          <a:prstGeom prst="rect">
+            <a:avLst/>
+          </a:prstGeom>
+          <a:noFill/>
+          <a:ln/>
+        </p:spPr>
+        <p:txBody>
+          <a:bodyPr wrap="square" rtlCol="0" anchor="ctr"/>
+          <a:lstStyle/>
+          <a:p>
+            <a:r>
+              <a:rPr lang="en-US" sz="1333" i="1" dirty="0">
+                <a:solidFill>
+                  <a:srgbClr val="7BA4C8"/>
+                </a:solidFill>
+              </a:rPr>
+              <a:t>Invoked when selecting appointment slots</a:t>
+            </a:r>
+            <a:endParaRPr lang="en-US" sz="1333" dirty="0"/>
+          </a:p>
+        </p:txBody>
+      </p:sp>
+      <p:sp>
+        <p:nvSpPr>
+          <p:cNvPr id="13" name="Shape 11"/>
+          <p:cNvSpPr/>
+          <p:nvPr/>
+        </p:nvSpPr>
+        <p:spPr>
+          <a:xfrm>
+            <a:off x="426720" y="3316224"/>
+            <a:ext cx="11338560" cy="755904"/>
           </a:xfrm>
           <a:prstGeom prst="rect">
             <a:avLst/>
           </a:prstGeom>
           <a:solidFill>
-            <a:srgbClr val="FFFFFF"/>
+            <a:srgbClr val="0D1A3A"/>
           </a:solidFill>
           <a:ln/>
         </p:spPr>
@@ -12525,14 +14146,14 @@
       </p:sp>
       <p:sp>
         <p:nvSpPr>
-          <p:cNvPr id="12" name="Text 10"/>
-          <p:cNvSpPr/>
-          <p:nvPr/>
-        </p:nvSpPr>
-        <p:spPr>
-          <a:xfrm>
-            <a:off x="548640" y="2401824"/>
-            <a:ext cx="3230880" cy="487680"/>
+          <p:cNvPr id="14" name="Text 12"/>
+          <p:cNvSpPr/>
+          <p:nvPr/>
+        </p:nvSpPr>
+        <p:spPr>
+          <a:xfrm>
+            <a:off x="585216" y="3316224"/>
+            <a:ext cx="2011680" cy="755904"/>
           </a:xfrm>
           <a:prstGeom prst="rect">
             <a:avLst/>
@@ -12547,10 +14168,10 @@
             <a:r>
               <a:rPr lang="en-US" sz="1467" b="1" dirty="0">
                 <a:solidFill>
-                  <a:srgbClr val="0A1628"/>
+                  <a:srgbClr val="00B4D8"/>
                 </a:solidFill>
               </a:rPr>
-              <a:t>Decision Making</a:t>
+              <a:t>Patient Database</a:t>
             </a:r>
             <a:endParaRPr lang="en-US" sz="1467" dirty="0"/>
           </a:p>
@@ -12558,14 +14179,14 @@
       </p:sp>
       <p:sp>
         <p:nvSpPr>
-          <p:cNvPr id="13" name="Text 11"/>
-          <p:cNvSpPr/>
-          <p:nvPr/>
-        </p:nvSpPr>
-        <p:spPr>
-          <a:xfrm>
-            <a:off x="4023360" y="2401824"/>
-            <a:ext cx="3657600" cy="487680"/>
+          <p:cNvPr id="15" name="Text 13"/>
+          <p:cNvSpPr/>
+          <p:nvPr/>
+        </p:nvSpPr>
+        <p:spPr>
+          <a:xfrm>
+            <a:off x="2657856" y="3316224"/>
+            <a:ext cx="5242560" cy="755904"/>
           </a:xfrm>
           <a:prstGeom prst="rect">
             <a:avLst/>
@@ -12578,27 +14199,27 @@
           <a:lstStyle/>
           <a:p>
             <a:r>
-              <a:rPr lang="en-US" sz="1467" dirty="0">
+              <a:rPr lang="en-US" sz="1400" dirty="0">
                 <a:solidFill>
-                  <a:srgbClr val="5B6E8C"/>
+                  <a:srgbClr val="FFFFFF"/>
                 </a:solidFill>
               </a:rPr>
-              <a:t>Fixed, rule-based</a:t>
-            </a:r>
-            <a:endParaRPr lang="en-US" sz="1467" dirty="0"/>
-          </a:p>
-        </p:txBody>
-      </p:sp>
-      <p:sp>
-        <p:nvSpPr>
-          <p:cNvPr id="14" name="Text 12"/>
-          <p:cNvSpPr/>
-          <p:nvPr/>
-        </p:nvSpPr>
-        <p:spPr>
-          <a:xfrm>
-            <a:off x="8046720" y="2401824"/>
-            <a:ext cx="3657600" cy="487680"/>
+              <a:t>Retrieve patient history, allergies, and prior appointments</a:t>
+            </a:r>
+            <a:endParaRPr lang="en-US" sz="1400" dirty="0"/>
+          </a:p>
+        </p:txBody>
+      </p:sp>
+      <p:sp>
+        <p:nvSpPr>
+          <p:cNvPr id="16" name="Text 14"/>
+          <p:cNvSpPr/>
+          <p:nvPr/>
+        </p:nvSpPr>
+        <p:spPr>
+          <a:xfrm>
+            <a:off x="7985760" y="3316224"/>
+            <a:ext cx="3413760" cy="755904"/>
           </a:xfrm>
           <a:prstGeom prst="rect">
             <a:avLst/>
@@ -12611,33 +14232,33 @@
           <a:lstStyle/>
           <a:p>
             <a:r>
-              <a:rPr lang="en-US" sz="1467" dirty="0">
+              <a:rPr lang="en-US" sz="1333" i="1" dirty="0">
                 <a:solidFill>
-                  <a:srgbClr val="06A77D"/>
+                  <a:srgbClr val="7BA4C8"/>
                 </a:solidFill>
               </a:rPr>
-              <a:t>Context-aware reasoning</a:t>
-            </a:r>
-            <a:endParaRPr lang="en-US" sz="1467" dirty="0"/>
-          </a:p>
-        </p:txBody>
-      </p:sp>
-      <p:sp>
-        <p:nvSpPr>
-          <p:cNvPr id="15" name="Shape 13"/>
-          <p:cNvSpPr/>
-          <p:nvPr/>
-        </p:nvSpPr>
-        <p:spPr>
-          <a:xfrm>
-            <a:off x="426720" y="2926080"/>
-            <a:ext cx="11338560" cy="487680"/>
+              <a:t>Used to personalize specialist selection</a:t>
+            </a:r>
+            <a:endParaRPr lang="en-US" sz="1333" dirty="0"/>
+          </a:p>
+        </p:txBody>
+      </p:sp>
+      <p:sp>
+        <p:nvSpPr>
+          <p:cNvPr id="17" name="Shape 15"/>
+          <p:cNvSpPr/>
+          <p:nvPr/>
+        </p:nvSpPr>
+        <p:spPr>
+          <a:xfrm>
+            <a:off x="426720" y="4133088"/>
+            <a:ext cx="11338560" cy="755904"/>
           </a:xfrm>
           <a:prstGeom prst="rect">
             <a:avLst/>
           </a:prstGeom>
           <a:solidFill>
-            <a:srgbClr val="F0F6FF"/>
+            <a:srgbClr val="12224A"/>
           </a:solidFill>
           <a:ln/>
         </p:spPr>
@@ -12651,14 +14272,14 @@
       </p:sp>
       <p:sp>
         <p:nvSpPr>
-          <p:cNvPr id="16" name="Text 14"/>
-          <p:cNvSpPr/>
-          <p:nvPr/>
-        </p:nvSpPr>
-        <p:spPr>
-          <a:xfrm>
-            <a:off x="548640" y="2926080"/>
-            <a:ext cx="3230880" cy="487680"/>
+          <p:cNvPr id="18" name="Text 16"/>
+          <p:cNvSpPr/>
+          <p:nvPr/>
+        </p:nvSpPr>
+        <p:spPr>
+          <a:xfrm>
+            <a:off x="585216" y="4133088"/>
+            <a:ext cx="2011680" cy="755904"/>
           </a:xfrm>
           <a:prstGeom prst="rect">
             <a:avLst/>
@@ -12673,10 +14294,10 @@
             <a:r>
               <a:rPr lang="en-US" sz="1467" b="1" dirty="0">
                 <a:solidFill>
-                  <a:srgbClr val="0A1628"/>
+                  <a:srgbClr val="00B4D8"/>
                 </a:solidFill>
               </a:rPr>
-              <a:t>Input Handling</a:t>
+              <a:t>SMS Tool</a:t>
             </a:r>
             <a:endParaRPr lang="en-US" sz="1467" dirty="0"/>
           </a:p>
@@ -12684,14 +14305,14 @@
       </p:sp>
       <p:sp>
         <p:nvSpPr>
-          <p:cNvPr id="17" name="Text 15"/>
-          <p:cNvSpPr/>
-          <p:nvPr/>
-        </p:nvSpPr>
-        <p:spPr>
-          <a:xfrm>
-            <a:off x="4023360" y="2926080"/>
-            <a:ext cx="3657600" cy="487680"/>
+          <p:cNvPr id="19" name="Text 17"/>
+          <p:cNvSpPr/>
+          <p:nvPr/>
+        </p:nvSpPr>
+        <p:spPr>
+          <a:xfrm>
+            <a:off x="2657856" y="4133088"/>
+            <a:ext cx="5242560" cy="755904"/>
           </a:xfrm>
           <a:prstGeom prst="rect">
             <a:avLst/>
@@ -12704,27 +14325,27 @@
           <a:lstStyle/>
           <a:p>
             <a:r>
-              <a:rPr lang="en-US" sz="1467" dirty="0">
+              <a:rPr lang="en-US" sz="1400" dirty="0">
                 <a:solidFill>
-                  <a:srgbClr val="5B6E8C"/>
+                  <a:srgbClr val="FFFFFF"/>
                 </a:solidFill>
               </a:rPr>
-              <a:t>Structured form only</a:t>
-            </a:r>
-            <a:endParaRPr lang="en-US" sz="1467" dirty="0"/>
-          </a:p>
-        </p:txBody>
-      </p:sp>
-      <p:sp>
-        <p:nvSpPr>
-          <p:cNvPr id="18" name="Text 16"/>
-          <p:cNvSpPr/>
-          <p:nvPr/>
-        </p:nvSpPr>
-        <p:spPr>
-          <a:xfrm>
-            <a:off x="8046720" y="2926080"/>
-            <a:ext cx="3657600" cy="487680"/>
+              <a:t>Send immediate text alerts for urgent cases or reminders</a:t>
+            </a:r>
+            <a:endParaRPr lang="en-US" sz="1400" dirty="0"/>
+          </a:p>
+        </p:txBody>
+      </p:sp>
+      <p:sp>
+        <p:nvSpPr>
+          <p:cNvPr id="20" name="Text 18"/>
+          <p:cNvSpPr/>
+          <p:nvPr/>
+        </p:nvSpPr>
+        <p:spPr>
+          <a:xfrm>
+            <a:off x="7985760" y="4133088"/>
+            <a:ext cx="3413760" cy="755904"/>
           </a:xfrm>
           <a:prstGeom prst="rect">
             <a:avLst/>
@@ -12737,33 +14358,33 @@
           <a:lstStyle/>
           <a:p>
             <a:r>
-              <a:rPr lang="en-US" sz="1467" dirty="0">
+              <a:rPr lang="en-US" sz="1333" i="1" dirty="0">
                 <a:solidFill>
-                  <a:srgbClr val="06A77D"/>
+                  <a:srgbClr val="7BA4C8"/>
                 </a:solidFill>
               </a:rPr>
-              <a:t>Natural language + free text</a:t>
-            </a:r>
-            <a:endParaRPr lang="en-US" sz="1467" dirty="0"/>
-          </a:p>
-        </p:txBody>
-      </p:sp>
-      <p:sp>
-        <p:nvSpPr>
-          <p:cNvPr id="19" name="Shape 17"/>
-          <p:cNvSpPr/>
-          <p:nvPr/>
-        </p:nvSpPr>
-        <p:spPr>
-          <a:xfrm>
-            <a:off x="426720" y="3450336"/>
-            <a:ext cx="11338560" cy="487680"/>
+              <a:t>Triggered on emergency or day before booking</a:t>
+            </a:r>
+            <a:endParaRPr lang="en-US" sz="1333" dirty="0"/>
+          </a:p>
+        </p:txBody>
+      </p:sp>
+      <p:sp>
+        <p:nvSpPr>
+          <p:cNvPr id="21" name="Shape 19"/>
+          <p:cNvSpPr/>
+          <p:nvPr/>
+        </p:nvSpPr>
+        <p:spPr>
+          <a:xfrm>
+            <a:off x="426720" y="4949952"/>
+            <a:ext cx="11338560" cy="755904"/>
           </a:xfrm>
           <a:prstGeom prst="rect">
             <a:avLst/>
           </a:prstGeom>
           <a:solidFill>
-            <a:srgbClr val="FFFFFF"/>
+            <a:srgbClr val="0D1A3A"/>
           </a:solidFill>
           <a:ln/>
         </p:spPr>
@@ -12777,14 +14398,14 @@
       </p:sp>
       <p:sp>
         <p:nvSpPr>
-          <p:cNvPr id="20" name="Text 18"/>
-          <p:cNvSpPr/>
-          <p:nvPr/>
-        </p:nvSpPr>
-        <p:spPr>
-          <a:xfrm>
-            <a:off x="548640" y="3450336"/>
-            <a:ext cx="3230880" cy="487680"/>
+          <p:cNvPr id="22" name="Text 20"/>
+          <p:cNvSpPr/>
+          <p:nvPr/>
+        </p:nvSpPr>
+        <p:spPr>
+          <a:xfrm>
+            <a:off x="585216" y="4949952"/>
+            <a:ext cx="2011680" cy="755904"/>
           </a:xfrm>
           <a:prstGeom prst="rect">
             <a:avLst/>
@@ -12799,10 +14420,10 @@
             <a:r>
               <a:rPr lang="en-US" sz="1467" b="1" dirty="0">
                 <a:solidFill>
-                  <a:srgbClr val="0A1628"/>
+                  <a:srgbClr val="00B4D8"/>
                 </a:solidFill>
               </a:rPr>
-              <a:t>Exception Handling</a:t>
+              <a:t>Email Tool</a:t>
             </a:r>
             <a:endParaRPr lang="en-US" sz="1467" dirty="0"/>
           </a:p>
@@ -12810,14 +14431,14 @@
       </p:sp>
       <p:sp>
         <p:nvSpPr>
-          <p:cNvPr id="21" name="Text 19"/>
-          <p:cNvSpPr/>
-          <p:nvPr/>
-        </p:nvSpPr>
-        <p:spPr>
-          <a:xfrm>
-            <a:off x="4023360" y="3450336"/>
-            <a:ext cx="3657600" cy="487680"/>
+          <p:cNvPr id="23" name="Text 21"/>
+          <p:cNvSpPr/>
+          <p:nvPr/>
+        </p:nvSpPr>
+        <p:spPr>
+          <a:xfrm>
+            <a:off x="2657856" y="4949952"/>
+            <a:ext cx="5242560" cy="755904"/>
           </a:xfrm>
           <a:prstGeom prst="rect">
             <a:avLst/>
@@ -12830,27 +14451,27 @@
           <a:lstStyle/>
           <a:p>
             <a:r>
-              <a:rPr lang="en-US" sz="1467" dirty="0">
+              <a:rPr lang="en-US" sz="1400" dirty="0">
                 <a:solidFill>
-                  <a:srgbClr val="5B6E8C"/>
+                  <a:srgbClr val="FFFFFF"/>
                 </a:solidFill>
               </a:rPr>
-              <a:t>Manual intervention needed</a:t>
-            </a:r>
-            <a:endParaRPr lang="en-US" sz="1467" dirty="0"/>
-          </a:p>
-        </p:txBody>
-      </p:sp>
-      <p:sp>
-        <p:nvSpPr>
-          <p:cNvPr id="22" name="Text 20"/>
-          <p:cNvSpPr/>
-          <p:nvPr/>
-        </p:nvSpPr>
-        <p:spPr>
-          <a:xfrm>
-            <a:off x="8046720" y="3450336"/>
-            <a:ext cx="3657600" cy="487680"/>
+              <a:t>Dispatch formatted appointment confirmation emails</a:t>
+            </a:r>
+            <a:endParaRPr lang="en-US" sz="1400" dirty="0"/>
+          </a:p>
+        </p:txBody>
+      </p:sp>
+      <p:sp>
+        <p:nvSpPr>
+          <p:cNvPr id="24" name="Text 22"/>
+          <p:cNvSpPr/>
+          <p:nvPr/>
+        </p:nvSpPr>
+        <p:spPr>
+          <a:xfrm>
+            <a:off x="7985760" y="4949952"/>
+            <a:ext cx="3413760" cy="755904"/>
           </a:xfrm>
           <a:prstGeom prst="rect">
             <a:avLst/>
@@ -12863,33 +14484,33 @@
           <a:lstStyle/>
           <a:p>
             <a:r>
-              <a:rPr lang="en-US" sz="1467" dirty="0">
+              <a:rPr lang="en-US" sz="1333" i="1" dirty="0">
                 <a:solidFill>
-                  <a:srgbClr val="06A77D"/>
+                  <a:srgbClr val="7BA4C8"/>
                 </a:solidFill>
               </a:rPr>
-              <a:t>Autonomous adaptation</a:t>
-            </a:r>
-            <a:endParaRPr lang="en-US" sz="1467" dirty="0"/>
-          </a:p>
-        </p:txBody>
-      </p:sp>
-      <p:sp>
-        <p:nvSpPr>
-          <p:cNvPr id="23" name="Shape 21"/>
-          <p:cNvSpPr/>
-          <p:nvPr/>
-        </p:nvSpPr>
-        <p:spPr>
-          <a:xfrm>
-            <a:off x="426720" y="3974592"/>
-            <a:ext cx="11338560" cy="487680"/>
+              <a:t>Standard confirmations for routine cases</a:t>
+            </a:r>
+            <a:endParaRPr lang="en-US" sz="1333" dirty="0"/>
+          </a:p>
+        </p:txBody>
+      </p:sp>
+      <p:sp>
+        <p:nvSpPr>
+          <p:cNvPr id="25" name="Shape 23"/>
+          <p:cNvSpPr/>
+          <p:nvPr/>
+        </p:nvSpPr>
+        <p:spPr>
+          <a:xfrm>
+            <a:off x="426720" y="5766816"/>
+            <a:ext cx="11338560" cy="755904"/>
           </a:xfrm>
           <a:prstGeom prst="rect">
             <a:avLst/>
           </a:prstGeom>
           <a:solidFill>
-            <a:srgbClr val="F0F6FF"/>
+            <a:srgbClr val="12224A"/>
           </a:solidFill>
           <a:ln/>
         </p:spPr>
@@ -12903,14 +14524,14 @@
       </p:sp>
       <p:sp>
         <p:nvSpPr>
-          <p:cNvPr id="24" name="Text 22"/>
-          <p:cNvSpPr/>
-          <p:nvPr/>
-        </p:nvSpPr>
-        <p:spPr>
-          <a:xfrm>
-            <a:off x="548640" y="3974592"/>
-            <a:ext cx="3230880" cy="487680"/>
+          <p:cNvPr id="26" name="Text 24"/>
+          <p:cNvSpPr/>
+          <p:nvPr/>
+        </p:nvSpPr>
+        <p:spPr>
+          <a:xfrm>
+            <a:off x="585216" y="5766816"/>
+            <a:ext cx="2011680" cy="755904"/>
           </a:xfrm>
           <a:prstGeom prst="rect">
             <a:avLst/>
@@ -12925,10 +14546,10 @@
             <a:r>
               <a:rPr lang="en-US" sz="1467" b="1" dirty="0">
                 <a:solidFill>
-                  <a:srgbClr val="0A1628"/>
+                  <a:srgbClr val="00B4D8"/>
                 </a:solidFill>
               </a:rPr>
-              <a:t>Urgency Detection</a:t>
+              <a:t> Emergency Alert Tool</a:t>
             </a:r>
             <a:endParaRPr lang="en-US" sz="1467" dirty="0"/>
           </a:p>
@@ -12936,14 +14557,14 @@
       </p:sp>
       <p:sp>
         <p:nvSpPr>
-          <p:cNvPr id="25" name="Text 23"/>
-          <p:cNvSpPr/>
-          <p:nvPr/>
-        </p:nvSpPr>
-        <p:spPr>
-          <a:xfrm>
-            <a:off x="4023360" y="3974592"/>
-            <a:ext cx="3657600" cy="487680"/>
+          <p:cNvPr id="27" name="Text 25"/>
+          <p:cNvSpPr/>
+          <p:nvPr/>
+        </p:nvSpPr>
+        <p:spPr>
+          <a:xfrm>
+            <a:off x="2657856" y="5766816"/>
+            <a:ext cx="5242560" cy="755904"/>
           </a:xfrm>
           <a:prstGeom prst="rect">
             <a:avLst/>
@@ -12956,27 +14577,27 @@
           <a:lstStyle/>
           <a:p>
             <a:r>
-              <a:rPr lang="en-US" sz="1467" dirty="0">
+              <a:rPr lang="en-US" sz="1400" dirty="0">
                 <a:solidFill>
-                  <a:srgbClr val="5B6E8C"/>
+                  <a:srgbClr val="FFFFFF"/>
                 </a:solidFill>
               </a:rPr>
-              <a:t>None</a:t>
-            </a:r>
-            <a:endParaRPr lang="en-US" sz="1467" dirty="0"/>
-          </a:p>
-        </p:txBody>
-      </p:sp>
-      <p:sp>
-        <p:nvSpPr>
-          <p:cNvPr id="26" name="Text 24"/>
-          <p:cNvSpPr/>
-          <p:nvPr/>
-        </p:nvSpPr>
-        <p:spPr>
-          <a:xfrm>
-            <a:off x="8046720" y="3974592"/>
-            <a:ext cx="3657600" cy="487680"/>
+              <a:t>Notify ER staff and on-call teams instantly</a:t>
+            </a:r>
+            <a:endParaRPr lang="en-US" sz="1400" dirty="0"/>
+          </a:p>
+        </p:txBody>
+      </p:sp>
+      <p:sp>
+        <p:nvSpPr>
+          <p:cNvPr id="28" name="Text 26"/>
+          <p:cNvSpPr/>
+          <p:nvPr/>
+        </p:nvSpPr>
+        <p:spPr>
+          <a:xfrm>
+            <a:off x="7985760" y="5766816"/>
+            <a:ext cx="3413760" cy="755904"/>
           </a:xfrm>
           <a:prstGeom prst="rect">
             <a:avLst/>
@@ -12989,467 +14610,14 @@
           <a:lstStyle/>
           <a:p>
             <a:r>
-              <a:rPr lang="en-US" sz="1467" dirty="0">
+              <a:rPr lang="en-US" sz="1333" i="1" dirty="0">
                 <a:solidFill>
-                  <a:srgbClr val="06A77D"/>
+                  <a:srgbClr val="7BA4C8"/>
                 </a:solidFill>
               </a:rPr>
-              <a:t>Real time LLM analysis</a:t>
-            </a:r>
-            <a:endParaRPr lang="en-US" sz="1467" dirty="0"/>
-          </a:p>
-        </p:txBody>
-      </p:sp>
-      <p:sp>
-        <p:nvSpPr>
-          <p:cNvPr id="27" name="Shape 25"/>
-          <p:cNvSpPr/>
-          <p:nvPr/>
-        </p:nvSpPr>
-        <p:spPr>
-          <a:xfrm>
-            <a:off x="426720" y="4498848"/>
-            <a:ext cx="11338560" cy="487680"/>
-          </a:xfrm>
-          <a:prstGeom prst="rect">
-            <a:avLst/>
-          </a:prstGeom>
-          <a:solidFill>
-            <a:srgbClr val="FFFFFF"/>
-          </a:solidFill>
-          <a:ln/>
-        </p:spPr>
-        <p:txBody>
-          <a:bodyPr/>
-          <a:lstStyle/>
-          <a:p>
-            <a:endParaRPr lang="en-IN" sz="2400"/>
-          </a:p>
-        </p:txBody>
-      </p:sp>
-      <p:sp>
-        <p:nvSpPr>
-          <p:cNvPr id="28" name="Text 26"/>
-          <p:cNvSpPr/>
-          <p:nvPr/>
-        </p:nvSpPr>
-        <p:spPr>
-          <a:xfrm>
-            <a:off x="548640" y="4498848"/>
-            <a:ext cx="3230880" cy="487680"/>
-          </a:xfrm>
-          <a:prstGeom prst="rect">
-            <a:avLst/>
-          </a:prstGeom>
-          <a:noFill/>
-          <a:ln/>
-        </p:spPr>
-        <p:txBody>
-          <a:bodyPr wrap="square" rtlCol="0" anchor="ctr"/>
-          <a:lstStyle/>
-          <a:p>
-            <a:r>
-              <a:rPr lang="en-US" sz="1467" b="1" dirty="0">
-                <a:solidFill>
-                  <a:srgbClr val="0A1628"/>
-                </a:solidFill>
-              </a:rPr>
-              <a:t>Tool Usage</a:t>
-            </a:r>
-            <a:endParaRPr lang="en-US" sz="1467" dirty="0"/>
-          </a:p>
-        </p:txBody>
-      </p:sp>
-      <p:sp>
-        <p:nvSpPr>
-          <p:cNvPr id="29" name="Text 27"/>
-          <p:cNvSpPr/>
-          <p:nvPr/>
-        </p:nvSpPr>
-        <p:spPr>
-          <a:xfrm>
-            <a:off x="4023360" y="4498848"/>
-            <a:ext cx="3657600" cy="487680"/>
-          </a:xfrm>
-          <a:prstGeom prst="rect">
-            <a:avLst/>
-          </a:prstGeom>
-          <a:noFill/>
-          <a:ln/>
-        </p:spPr>
-        <p:txBody>
-          <a:bodyPr wrap="square" rtlCol="0" anchor="ctr"/>
-          <a:lstStyle/>
-          <a:p>
-            <a:r>
-              <a:rPr lang="en-US" sz="1467" dirty="0">
-                <a:solidFill>
-                  <a:srgbClr val="5B6E8C"/>
-                </a:solidFill>
-              </a:rPr>
-              <a:t>Pre-wired integrations</a:t>
-            </a:r>
-            <a:endParaRPr lang="en-US" sz="1467" dirty="0"/>
-          </a:p>
-        </p:txBody>
-      </p:sp>
-      <p:sp>
-        <p:nvSpPr>
-          <p:cNvPr id="30" name="Text 28"/>
-          <p:cNvSpPr/>
-          <p:nvPr/>
-        </p:nvSpPr>
-        <p:spPr>
-          <a:xfrm>
-            <a:off x="8046720" y="4498848"/>
-            <a:ext cx="3657600" cy="487680"/>
-          </a:xfrm>
-          <a:prstGeom prst="rect">
-            <a:avLst/>
-          </a:prstGeom>
-          <a:noFill/>
-          <a:ln/>
-        </p:spPr>
-        <p:txBody>
-          <a:bodyPr wrap="square" rtlCol="0" anchor="ctr"/>
-          <a:lstStyle/>
-          <a:p>
-            <a:r>
-              <a:rPr lang="en-US" sz="1467" dirty="0">
-                <a:solidFill>
-                  <a:srgbClr val="06A77D"/>
-                </a:solidFill>
-              </a:rPr>
-              <a:t>Dynamic tool selection</a:t>
-            </a:r>
-            <a:endParaRPr lang="en-US" sz="1467" dirty="0"/>
-          </a:p>
-        </p:txBody>
-      </p:sp>
-      <p:sp>
-        <p:nvSpPr>
-          <p:cNvPr id="31" name="Shape 29"/>
-          <p:cNvSpPr/>
-          <p:nvPr/>
-        </p:nvSpPr>
-        <p:spPr>
-          <a:xfrm>
-            <a:off x="426720" y="5023104"/>
-            <a:ext cx="11338560" cy="487680"/>
-          </a:xfrm>
-          <a:prstGeom prst="rect">
-            <a:avLst/>
-          </a:prstGeom>
-          <a:solidFill>
-            <a:srgbClr val="F0F6FF"/>
-          </a:solidFill>
-          <a:ln/>
-        </p:spPr>
-        <p:txBody>
-          <a:bodyPr/>
-          <a:lstStyle/>
-          <a:p>
-            <a:endParaRPr lang="en-IN" sz="2400"/>
-          </a:p>
-        </p:txBody>
-      </p:sp>
-      <p:sp>
-        <p:nvSpPr>
-          <p:cNvPr id="32" name="Text 30"/>
-          <p:cNvSpPr/>
-          <p:nvPr/>
-        </p:nvSpPr>
-        <p:spPr>
-          <a:xfrm>
-            <a:off x="548640" y="5023104"/>
-            <a:ext cx="3230880" cy="487680"/>
-          </a:xfrm>
-          <a:prstGeom prst="rect">
-            <a:avLst/>
-          </a:prstGeom>
-          <a:noFill/>
-          <a:ln/>
-        </p:spPr>
-        <p:txBody>
-          <a:bodyPr wrap="square" rtlCol="0" anchor="ctr"/>
-          <a:lstStyle/>
-          <a:p>
-            <a:r>
-              <a:rPr lang="en-US" sz="1467" b="1" dirty="0">
-                <a:solidFill>
-                  <a:srgbClr val="0A1628"/>
-                </a:solidFill>
-              </a:rPr>
-              <a:t>Specialist Routing</a:t>
-            </a:r>
-            <a:endParaRPr lang="en-US" sz="1467" dirty="0"/>
-          </a:p>
-        </p:txBody>
-      </p:sp>
-      <p:sp>
-        <p:nvSpPr>
-          <p:cNvPr id="33" name="Text 31"/>
-          <p:cNvSpPr/>
-          <p:nvPr/>
-        </p:nvSpPr>
-        <p:spPr>
-          <a:xfrm>
-            <a:off x="4023360" y="5023104"/>
-            <a:ext cx="3657600" cy="487680"/>
-          </a:xfrm>
-          <a:prstGeom prst="rect">
-            <a:avLst/>
-          </a:prstGeom>
-          <a:noFill/>
-          <a:ln/>
-        </p:spPr>
-        <p:txBody>
-          <a:bodyPr wrap="square" rtlCol="0" anchor="ctr"/>
-          <a:lstStyle/>
-          <a:p>
-            <a:r>
-              <a:rPr lang="en-US" sz="1467" dirty="0">
-                <a:solidFill>
-                  <a:srgbClr val="5B6E8C"/>
-                </a:solidFill>
-              </a:rPr>
-              <a:t>Department dropdown</a:t>
-            </a:r>
-            <a:endParaRPr lang="en-US" sz="1467" dirty="0"/>
-          </a:p>
-        </p:txBody>
-      </p:sp>
-      <p:sp>
-        <p:nvSpPr>
-          <p:cNvPr id="34" name="Text 32"/>
-          <p:cNvSpPr/>
-          <p:nvPr/>
-        </p:nvSpPr>
-        <p:spPr>
-          <a:xfrm>
-            <a:off x="8046720" y="5023104"/>
-            <a:ext cx="3657600" cy="487680"/>
-          </a:xfrm>
-          <a:prstGeom prst="rect">
-            <a:avLst/>
-          </a:prstGeom>
-          <a:noFill/>
-          <a:ln/>
-        </p:spPr>
-        <p:txBody>
-          <a:bodyPr wrap="square" rtlCol="0" anchor="ctr"/>
-          <a:lstStyle/>
-          <a:p>
-            <a:r>
-              <a:rPr lang="en-US" sz="1467" dirty="0">
-                <a:solidFill>
-                  <a:srgbClr val="06A77D"/>
-                </a:solidFill>
-              </a:rPr>
-              <a:t>Symptom driven matching</a:t>
-            </a:r>
-            <a:endParaRPr lang="en-US" sz="1467" dirty="0"/>
-          </a:p>
-        </p:txBody>
-      </p:sp>
-      <p:sp>
-        <p:nvSpPr>
-          <p:cNvPr id="35" name="Shape 33"/>
-          <p:cNvSpPr/>
-          <p:nvPr/>
-        </p:nvSpPr>
-        <p:spPr>
-          <a:xfrm>
-            <a:off x="426720" y="5547360"/>
-            <a:ext cx="11338560" cy="487680"/>
-          </a:xfrm>
-          <a:prstGeom prst="rect">
-            <a:avLst/>
-          </a:prstGeom>
-          <a:solidFill>
-            <a:srgbClr val="FFFFFF"/>
-          </a:solidFill>
-          <a:ln/>
-        </p:spPr>
-        <p:txBody>
-          <a:bodyPr/>
-          <a:lstStyle/>
-          <a:p>
-            <a:endParaRPr lang="en-IN" sz="2400"/>
-          </a:p>
-        </p:txBody>
-      </p:sp>
-      <p:sp>
-        <p:nvSpPr>
-          <p:cNvPr id="36" name="Text 34"/>
-          <p:cNvSpPr/>
-          <p:nvPr/>
-        </p:nvSpPr>
-        <p:spPr>
-          <a:xfrm>
-            <a:off x="548640" y="5547360"/>
-            <a:ext cx="3230880" cy="487680"/>
-          </a:xfrm>
-          <a:prstGeom prst="rect">
-            <a:avLst/>
-          </a:prstGeom>
-          <a:noFill/>
-          <a:ln/>
-        </p:spPr>
-        <p:txBody>
-          <a:bodyPr wrap="square" rtlCol="0" anchor="ctr"/>
-          <a:lstStyle/>
-          <a:p>
-            <a:r>
-              <a:rPr lang="en-US" sz="1467" b="1" dirty="0">
-                <a:solidFill>
-                  <a:srgbClr val="0A1628"/>
-                </a:solidFill>
-              </a:rPr>
-              <a:t>Personalization</a:t>
-            </a:r>
-            <a:endParaRPr lang="en-US" sz="1467" dirty="0"/>
-          </a:p>
-        </p:txBody>
-      </p:sp>
-      <p:sp>
-        <p:nvSpPr>
-          <p:cNvPr id="37" name="Text 35"/>
-          <p:cNvSpPr/>
-          <p:nvPr/>
-        </p:nvSpPr>
-        <p:spPr>
-          <a:xfrm>
-            <a:off x="4023360" y="5547360"/>
-            <a:ext cx="3657600" cy="487680"/>
-          </a:xfrm>
-          <a:prstGeom prst="rect">
-            <a:avLst/>
-          </a:prstGeom>
-          <a:noFill/>
-          <a:ln/>
-        </p:spPr>
-        <p:txBody>
-          <a:bodyPr wrap="square" rtlCol="0" anchor="ctr"/>
-          <a:lstStyle/>
-          <a:p>
-            <a:r>
-              <a:rPr lang="en-US" sz="1467" dirty="0">
-                <a:solidFill>
-                  <a:srgbClr val="5B6E8C"/>
-                </a:solidFill>
-              </a:rPr>
-              <a:t>None</a:t>
-            </a:r>
-            <a:endParaRPr lang="en-US" sz="1467" dirty="0"/>
-          </a:p>
-        </p:txBody>
-      </p:sp>
-      <p:sp>
-        <p:nvSpPr>
-          <p:cNvPr id="38" name="Text 36"/>
-          <p:cNvSpPr/>
-          <p:nvPr/>
-        </p:nvSpPr>
-        <p:spPr>
-          <a:xfrm>
-            <a:off x="8046720" y="5547360"/>
-            <a:ext cx="3657600" cy="487680"/>
-          </a:xfrm>
-          <a:prstGeom prst="rect">
-            <a:avLst/>
-          </a:prstGeom>
-          <a:noFill/>
-          <a:ln/>
-        </p:spPr>
-        <p:txBody>
-          <a:bodyPr wrap="square" rtlCol="0" anchor="ctr"/>
-          <a:lstStyle/>
-          <a:p>
-            <a:r>
-              <a:rPr lang="en-US" sz="1467" dirty="0">
-                <a:solidFill>
-                  <a:srgbClr val="06A77D"/>
-                </a:solidFill>
-              </a:rPr>
-              <a:t>Memory of patient history</a:t>
-            </a:r>
-            <a:endParaRPr lang="en-US" sz="1467" dirty="0"/>
-          </a:p>
-        </p:txBody>
-      </p:sp>
-      <p:sp>
-        <p:nvSpPr>
-          <p:cNvPr id="40" name="Text 38"/>
-          <p:cNvSpPr/>
-          <p:nvPr/>
-        </p:nvSpPr>
-        <p:spPr>
-          <a:xfrm>
-            <a:off x="548640" y="6071616"/>
-            <a:ext cx="3230880" cy="487680"/>
-          </a:xfrm>
-          <a:prstGeom prst="rect">
-            <a:avLst/>
-          </a:prstGeom>
-          <a:noFill/>
-          <a:ln/>
-        </p:spPr>
-        <p:txBody>
-          <a:bodyPr wrap="square" rtlCol="0" anchor="ctr"/>
-          <a:lstStyle/>
-          <a:p>
-            <a:endParaRPr lang="en-US" sz="1467" dirty="0"/>
-          </a:p>
-        </p:txBody>
-      </p:sp>
-      <p:sp>
-        <p:nvSpPr>
-          <p:cNvPr id="41" name="Text 39"/>
-          <p:cNvSpPr/>
-          <p:nvPr/>
-        </p:nvSpPr>
-        <p:spPr>
-          <a:xfrm>
-            <a:off x="4023360" y="6071616"/>
-            <a:ext cx="3657600" cy="487680"/>
-          </a:xfrm>
-          <a:prstGeom prst="rect">
-            <a:avLst/>
-          </a:prstGeom>
-          <a:noFill/>
-          <a:ln/>
-        </p:spPr>
-        <p:txBody>
-          <a:bodyPr wrap="square" rtlCol="0" anchor="ctr"/>
-          <a:lstStyle/>
-          <a:p>
-            <a:endParaRPr lang="en-US" sz="1467" dirty="0"/>
-          </a:p>
-        </p:txBody>
-      </p:sp>
-      <p:sp>
-        <p:nvSpPr>
-          <p:cNvPr id="42" name="Text 40"/>
-          <p:cNvSpPr/>
-          <p:nvPr/>
-        </p:nvSpPr>
-        <p:spPr>
-          <a:xfrm>
-            <a:off x="8046720" y="6071616"/>
-            <a:ext cx="3657600" cy="487680"/>
-          </a:xfrm>
-          <a:prstGeom prst="rect">
-            <a:avLst/>
-          </a:prstGeom>
-          <a:noFill/>
-          <a:ln/>
-        </p:spPr>
-        <p:txBody>
-          <a:bodyPr wrap="square" rtlCol="0" anchor="ctr"/>
-          <a:lstStyle/>
-          <a:p>
-            <a:endParaRPr lang="en-US" sz="1467" dirty="0"/>
+              <a:t>Activated when critical symptoms are detected</a:t>
+            </a:r>
+            <a:endParaRPr lang="en-US" sz="1333" dirty="0"/>
           </a:p>
         </p:txBody>
       </p:sp>
@@ -13532,7 +14700,7 @@
                   <a:srgbClr val="FFFFFF"/>
                 </a:solidFill>
               </a:rPr>
-              <a:t>WHEN TO USE WHICH APPROACH</a:t>
+              <a:t>WORKFLOW vs AI AGENT</a:t>
             </a:r>
             <a:endParaRPr lang="en-US" sz="1733" dirty="0"/>
           </a:p>
@@ -13540,55 +14708,20 @@
       </p:sp>
       <p:sp>
         <p:nvSpPr>
-          <p:cNvPr id="4" name="Text 2"/>
-          <p:cNvSpPr/>
-          <p:nvPr/>
-        </p:nvSpPr>
-        <p:spPr>
-          <a:xfrm>
-            <a:off x="487680" y="1072896"/>
-            <a:ext cx="10972800" cy="524256"/>
-          </a:xfrm>
-          <a:prstGeom prst="rect">
-            <a:avLst/>
-          </a:prstGeom>
-          <a:noFill/>
-          <a:ln/>
-        </p:spPr>
-        <p:txBody>
-          <a:bodyPr wrap="square" rtlCol="0" anchor="ctr"/>
-          <a:lstStyle/>
-          <a:p>
-            <a:r>
-              <a:rPr lang="en-US" sz="2533" b="1" dirty="0">
-                <a:solidFill>
-                  <a:srgbClr val="00B4D8"/>
-                </a:solidFill>
-              </a:rPr>
-              <a:t>Choosing the Right Tool for the Right Job</a:t>
-            </a:r>
-            <a:endParaRPr lang="en-US" sz="2533" dirty="0"/>
-          </a:p>
-        </p:txBody>
-      </p:sp>
-      <p:sp>
-        <p:nvSpPr>
           <p:cNvPr id="5" name="Shape 3"/>
           <p:cNvSpPr/>
           <p:nvPr/>
         </p:nvSpPr>
         <p:spPr>
           <a:xfrm>
-            <a:off x="426720" y="1804416"/>
-            <a:ext cx="5364480" cy="4693920"/>
+            <a:off x="426720" y="1767840"/>
+            <a:ext cx="3352800" cy="548640"/>
           </a:xfrm>
           <a:prstGeom prst="rect">
             <a:avLst/>
           </a:prstGeom>
           <a:solidFill>
-            <a:schemeClr val="accent2">
-              <a:lumMod val="75000"/>
-            </a:schemeClr>
+            <a:srgbClr val="0E5FA0"/>
           </a:solidFill>
           <a:ln/>
         </p:spPr>
@@ -13602,61 +14735,62 @@
       </p:sp>
       <p:sp>
         <p:nvSpPr>
-          <p:cNvPr id="6" name="Shape 4"/>
-          <p:cNvSpPr/>
-          <p:nvPr/>
-        </p:nvSpPr>
-        <p:spPr>
-          <a:xfrm>
-            <a:off x="426720" y="1804416"/>
-            <a:ext cx="5364480" cy="633984"/>
-          </a:xfrm>
-          <a:prstGeom prst="rect">
-            <a:avLst/>
-          </a:prstGeom>
-          <a:solidFill>
-            <a:schemeClr val="tx1"/>
-          </a:solidFill>
-          <a:ln/>
-        </p:spPr>
-        <p:txBody>
-          <a:bodyPr/>
-          <a:lstStyle/>
-          <a:p>
-            <a:endParaRPr lang="en-IN" sz="2400"/>
-          </a:p>
-        </p:txBody>
-      </p:sp>
-      <p:sp>
-        <p:nvSpPr>
-          <p:cNvPr id="7" name="Text 5"/>
-          <p:cNvSpPr/>
-          <p:nvPr/>
-        </p:nvSpPr>
-        <p:spPr>
-          <a:xfrm>
-            <a:off x="609600" y="1804416"/>
-            <a:ext cx="5059680" cy="633984"/>
-          </a:xfrm>
-          <a:prstGeom prst="rect">
-            <a:avLst/>
-          </a:prstGeom>
-          <a:noFill/>
-          <a:ln/>
-        </p:spPr>
-        <p:txBody>
-          <a:bodyPr wrap="square" rtlCol="0" anchor="ctr"/>
-          <a:lstStyle/>
-          <a:p>
-            <a:r>
-              <a:rPr lang="en-US" sz="1733" b="1" dirty="0">
+          <p:cNvPr id="6" name="Text 4"/>
+          <p:cNvSpPr/>
+          <p:nvPr/>
+        </p:nvSpPr>
+        <p:spPr>
+          <a:xfrm>
+            <a:off x="426720" y="1767840"/>
+            <a:ext cx="3352800" cy="548640"/>
+          </a:xfrm>
+          <a:prstGeom prst="rect">
+            <a:avLst/>
+          </a:prstGeom>
+          <a:noFill/>
+          <a:ln/>
+        </p:spPr>
+        <p:txBody>
+          <a:bodyPr wrap="square" lIns="0" tIns="0" rIns="0" bIns="0" rtlCol="0" anchor="ctr"/>
+          <a:lstStyle/>
+          <a:p>
+            <a:pPr algn="ctr"/>
+            <a:r>
+              <a:rPr lang="en-US" sz="1600" b="1" dirty="0">
                 <a:solidFill>
                   <a:srgbClr val="FFFFFF"/>
                 </a:solidFill>
               </a:rPr>
-              <a:t>Use WORKFLOW When:</a:t>
-            </a:r>
-            <a:endParaRPr lang="en-US" sz="1733" dirty="0"/>
+              <a:t>Criterion</a:t>
+            </a:r>
+            <a:endParaRPr lang="en-US" sz="1600" dirty="0"/>
+          </a:p>
+        </p:txBody>
+      </p:sp>
+      <p:sp>
+        <p:nvSpPr>
+          <p:cNvPr id="7" name="Shape 5"/>
+          <p:cNvSpPr/>
+          <p:nvPr/>
+        </p:nvSpPr>
+        <p:spPr>
+          <a:xfrm>
+            <a:off x="3901440" y="1767840"/>
+            <a:ext cx="3840480" cy="548640"/>
+          </a:xfrm>
+          <a:prstGeom prst="rect">
+            <a:avLst/>
+          </a:prstGeom>
+          <a:solidFill>
+            <a:srgbClr val="5B6E8C"/>
+          </a:solidFill>
+          <a:ln/>
+        </p:spPr>
+        <p:txBody>
+          <a:bodyPr/>
+          <a:lstStyle/>
+          <a:p>
+            <a:endParaRPr lang="en-IN" sz="2400"/>
           </a:p>
         </p:txBody>
       </p:sp>
@@ -13668,59 +14802,148 @@
         </p:nvSpPr>
         <p:spPr>
           <a:xfrm>
-            <a:off x="670560" y="2596896"/>
-            <a:ext cx="4937760" cy="548640"/>
-          </a:xfrm>
-          <a:prstGeom prst="rect">
-            <a:avLst/>
-          </a:prstGeom>
-          <a:noFill/>
-          <a:ln/>
-        </p:spPr>
-        <p:txBody>
-          <a:bodyPr wrap="square" rtlCol="0" anchor="ctr"/>
-          <a:lstStyle/>
-          <a:p>
-            <a:r>
-              <a:rPr lang="en-US" sz="1467" dirty="0">
+            <a:off x="3901440" y="1767840"/>
+            <a:ext cx="3840480" cy="548640"/>
+          </a:xfrm>
+          <a:prstGeom prst="rect">
+            <a:avLst/>
+          </a:prstGeom>
+          <a:noFill/>
+          <a:ln/>
+        </p:spPr>
+        <p:txBody>
+          <a:bodyPr wrap="square" lIns="0" tIns="0" rIns="0" bIns="0" rtlCol="0" anchor="ctr"/>
+          <a:lstStyle/>
+          <a:p>
+            <a:pPr algn="ctr"/>
+            <a:r>
+              <a:rPr lang="en-US" sz="1600" b="1" dirty="0">
                 <a:solidFill>
                   <a:srgbClr val="FFFFFF"/>
                 </a:solidFill>
               </a:rPr>
-              <a:t>✓  Process steps are always the same</a:t>
-            </a:r>
-            <a:endParaRPr lang="en-US" sz="1467" dirty="0"/>
-          </a:p>
-        </p:txBody>
-      </p:sp>
-      <p:sp>
-        <p:nvSpPr>
-          <p:cNvPr id="9" name="Text 7"/>
-          <p:cNvSpPr/>
-          <p:nvPr/>
-        </p:nvSpPr>
-        <p:spPr>
-          <a:xfrm>
-            <a:off x="670560" y="3230880"/>
-            <a:ext cx="4937760" cy="548640"/>
-          </a:xfrm>
-          <a:prstGeom prst="rect">
-            <a:avLst/>
-          </a:prstGeom>
-          <a:noFill/>
-          <a:ln/>
-        </p:spPr>
-        <p:txBody>
-          <a:bodyPr wrap="square" rtlCol="0" anchor="ctr"/>
-          <a:lstStyle/>
-          <a:p>
-            <a:r>
-              <a:rPr lang="en-US" sz="1467" dirty="0">
+              <a:t>Traditional Workflow</a:t>
+            </a:r>
+            <a:endParaRPr lang="en-US" sz="1600" dirty="0"/>
+          </a:p>
+        </p:txBody>
+      </p:sp>
+      <p:sp>
+        <p:nvSpPr>
+          <p:cNvPr id="9" name="Shape 7"/>
+          <p:cNvSpPr/>
+          <p:nvPr/>
+        </p:nvSpPr>
+        <p:spPr>
+          <a:xfrm>
+            <a:off x="7924800" y="1767840"/>
+            <a:ext cx="3840480" cy="548640"/>
+          </a:xfrm>
+          <a:prstGeom prst="rect">
+            <a:avLst/>
+          </a:prstGeom>
+          <a:solidFill>
+            <a:srgbClr val="06A77D"/>
+          </a:solidFill>
+          <a:ln/>
+        </p:spPr>
+        <p:txBody>
+          <a:bodyPr/>
+          <a:lstStyle/>
+          <a:p>
+            <a:endParaRPr lang="en-IN" sz="2400"/>
+          </a:p>
+        </p:txBody>
+      </p:sp>
+      <p:sp>
+        <p:nvSpPr>
+          <p:cNvPr id="10" name="Text 8"/>
+          <p:cNvSpPr/>
+          <p:nvPr/>
+        </p:nvSpPr>
+        <p:spPr>
+          <a:xfrm>
+            <a:off x="7924800" y="1767840"/>
+            <a:ext cx="3840480" cy="548640"/>
+          </a:xfrm>
+          <a:prstGeom prst="rect">
+            <a:avLst/>
+          </a:prstGeom>
+          <a:noFill/>
+          <a:ln/>
+        </p:spPr>
+        <p:txBody>
+          <a:bodyPr wrap="square" lIns="0" tIns="0" rIns="0" bIns="0" rtlCol="0" anchor="ctr"/>
+          <a:lstStyle/>
+          <a:p>
+            <a:pPr algn="ctr"/>
+            <a:r>
+              <a:rPr lang="en-US" sz="1600" b="1" dirty="0">
                 <a:solidFill>
                   <a:srgbClr val="FFFFFF"/>
                 </a:solidFill>
               </a:rPr>
-              <a:t>✓  Compliance &amp; audit trail required</a:t>
+              <a:t>AI Agent</a:t>
+            </a:r>
+            <a:endParaRPr lang="en-US" sz="1600" dirty="0"/>
+          </a:p>
+        </p:txBody>
+      </p:sp>
+      <p:sp>
+        <p:nvSpPr>
+          <p:cNvPr id="11" name="Shape 9"/>
+          <p:cNvSpPr/>
+          <p:nvPr/>
+        </p:nvSpPr>
+        <p:spPr>
+          <a:xfrm>
+            <a:off x="426720" y="2401824"/>
+            <a:ext cx="11338560" cy="487680"/>
+          </a:xfrm>
+          <a:prstGeom prst="rect">
+            <a:avLst/>
+          </a:prstGeom>
+          <a:solidFill>
+            <a:srgbClr val="FFFFFF"/>
+          </a:solidFill>
+          <a:ln/>
+        </p:spPr>
+        <p:txBody>
+          <a:bodyPr/>
+          <a:lstStyle/>
+          <a:p>
+            <a:endParaRPr lang="en-IN" sz="2400"/>
+          </a:p>
+        </p:txBody>
+      </p:sp>
+      <p:sp>
+        <p:nvSpPr>
+          <p:cNvPr id="12" name="Text 10"/>
+          <p:cNvSpPr/>
+          <p:nvPr/>
+        </p:nvSpPr>
+        <p:spPr>
+          <a:xfrm>
+            <a:off x="548640" y="2401824"/>
+            <a:ext cx="3230880" cy="487680"/>
+          </a:xfrm>
+          <a:prstGeom prst="rect">
+            <a:avLst/>
+          </a:prstGeom>
+          <a:noFill/>
+          <a:ln/>
+        </p:spPr>
+        <p:txBody>
+          <a:bodyPr wrap="square" rtlCol="0" anchor="ctr"/>
+          <a:lstStyle/>
+          <a:p>
+            <a:r>
+              <a:rPr lang="en-US" sz="1467" b="1" dirty="0">
+                <a:solidFill>
+                  <a:srgbClr val="0A1628"/>
+                </a:solidFill>
+              </a:rPr>
+              <a:t>Decision Making</a:t>
             </a:r>
             <a:endParaRPr lang="en-US" sz="1467" dirty="0"/>
           </a:p>
@@ -13728,14 +14951,14 @@
       </p:sp>
       <p:sp>
         <p:nvSpPr>
-          <p:cNvPr id="10" name="Text 8"/>
-          <p:cNvSpPr/>
-          <p:nvPr/>
-        </p:nvSpPr>
-        <p:spPr>
-          <a:xfrm>
-            <a:off x="670560" y="3864864"/>
-            <a:ext cx="4937760" cy="548640"/>
+          <p:cNvPr id="13" name="Text 11"/>
+          <p:cNvSpPr/>
+          <p:nvPr/>
+        </p:nvSpPr>
+        <p:spPr>
+          <a:xfrm>
+            <a:off x="4023360" y="2401824"/>
+            <a:ext cx="3657600" cy="487680"/>
           </a:xfrm>
           <a:prstGeom prst="rect">
             <a:avLst/>
@@ -13750,10 +14973,10 @@
             <a:r>
               <a:rPr lang="en-US" sz="1467" dirty="0">
                 <a:solidFill>
-                  <a:srgbClr val="FFFFFF"/>
+                  <a:srgbClr val="5B6E8C"/>
                 </a:solidFill>
               </a:rPr>
-              <a:t>✓  Team is non-technical; needs predictability</a:t>
+              <a:t>Fixed, rule-based</a:t>
             </a:r>
             <a:endParaRPr lang="en-US" sz="1467" dirty="0"/>
           </a:p>
@@ -13761,14 +14984,14 @@
       </p:sp>
       <p:sp>
         <p:nvSpPr>
-          <p:cNvPr id="11" name="Text 9"/>
-          <p:cNvSpPr/>
-          <p:nvPr/>
-        </p:nvSpPr>
-        <p:spPr>
-          <a:xfrm>
-            <a:off x="670560" y="4498848"/>
-            <a:ext cx="4937760" cy="548640"/>
+          <p:cNvPr id="14" name="Text 12"/>
+          <p:cNvSpPr/>
+          <p:nvPr/>
+        </p:nvSpPr>
+        <p:spPr>
+          <a:xfrm>
+            <a:off x="8046720" y="2401824"/>
+            <a:ext cx="3657600" cy="487680"/>
           </a:xfrm>
           <a:prstGeom prst="rect">
             <a:avLst/>
@@ -13783,10 +15006,10 @@
             <a:r>
               <a:rPr lang="en-US" sz="1467" dirty="0">
                 <a:solidFill>
-                  <a:srgbClr val="FFFFFF"/>
+                  <a:srgbClr val="06A77D"/>
                 </a:solidFill>
               </a:rPr>
-              <a:t>✓  Actions are well-defined and low-risk</a:t>
+              <a:t>Context-aware reasoning</a:t>
             </a:r>
             <a:endParaRPr lang="en-US" sz="1467" dirty="0"/>
           </a:p>
@@ -13794,14 +15017,74 @@
       </p:sp>
       <p:sp>
         <p:nvSpPr>
-          <p:cNvPr id="12" name="Text 10"/>
-          <p:cNvSpPr/>
-          <p:nvPr/>
-        </p:nvSpPr>
-        <p:spPr>
-          <a:xfrm>
-            <a:off x="670560" y="5132832"/>
-            <a:ext cx="4937760" cy="548640"/>
+          <p:cNvPr id="15" name="Shape 13"/>
+          <p:cNvSpPr/>
+          <p:nvPr/>
+        </p:nvSpPr>
+        <p:spPr>
+          <a:xfrm>
+            <a:off x="426720" y="2926080"/>
+            <a:ext cx="11338560" cy="487680"/>
+          </a:xfrm>
+          <a:prstGeom prst="rect">
+            <a:avLst/>
+          </a:prstGeom>
+          <a:solidFill>
+            <a:srgbClr val="F0F6FF"/>
+          </a:solidFill>
+          <a:ln/>
+        </p:spPr>
+        <p:txBody>
+          <a:bodyPr/>
+          <a:lstStyle/>
+          <a:p>
+            <a:endParaRPr lang="en-IN" sz="2400"/>
+          </a:p>
+        </p:txBody>
+      </p:sp>
+      <p:sp>
+        <p:nvSpPr>
+          <p:cNvPr id="16" name="Text 14"/>
+          <p:cNvSpPr/>
+          <p:nvPr/>
+        </p:nvSpPr>
+        <p:spPr>
+          <a:xfrm>
+            <a:off x="548640" y="2926080"/>
+            <a:ext cx="3230880" cy="487680"/>
+          </a:xfrm>
+          <a:prstGeom prst="rect">
+            <a:avLst/>
+          </a:prstGeom>
+          <a:noFill/>
+          <a:ln/>
+        </p:spPr>
+        <p:txBody>
+          <a:bodyPr wrap="square" rtlCol="0" anchor="ctr"/>
+          <a:lstStyle/>
+          <a:p>
+            <a:r>
+              <a:rPr lang="en-US" sz="1467" b="1" dirty="0">
+                <a:solidFill>
+                  <a:srgbClr val="0A1628"/>
+                </a:solidFill>
+              </a:rPr>
+              <a:t>Input Handling</a:t>
+            </a:r>
+            <a:endParaRPr lang="en-US" sz="1467" dirty="0"/>
+          </a:p>
+        </p:txBody>
+      </p:sp>
+      <p:sp>
+        <p:nvSpPr>
+          <p:cNvPr id="17" name="Text 15"/>
+          <p:cNvSpPr/>
+          <p:nvPr/>
+        </p:nvSpPr>
+        <p:spPr>
+          <a:xfrm>
+            <a:off x="4023360" y="2926080"/>
+            <a:ext cx="3657600" cy="487680"/>
           </a:xfrm>
           <a:prstGeom prst="rect">
             <a:avLst/>
@@ -13816,10 +15099,10 @@
             <a:r>
               <a:rPr lang="en-US" sz="1467" dirty="0">
                 <a:solidFill>
-                  <a:srgbClr val="FFFFFF"/>
+                  <a:srgbClr val="5B6E8C"/>
                 </a:solidFill>
               </a:rPr>
-              <a:t>✓  Cost and latency are critical constraints</a:t>
+              <a:t>Structured form only</a:t>
             </a:r>
             <a:endParaRPr lang="en-US" sz="1467" dirty="0"/>
           </a:p>
@@ -13827,70 +15110,14 @@
       </p:sp>
       <p:sp>
         <p:nvSpPr>
-          <p:cNvPr id="14" name="Shape 12"/>
-          <p:cNvSpPr/>
-          <p:nvPr/>
-        </p:nvSpPr>
-        <p:spPr>
-          <a:xfrm>
-            <a:off x="6400800" y="1804416"/>
-            <a:ext cx="5364480" cy="4693920"/>
-          </a:xfrm>
-          <a:prstGeom prst="rect">
-            <a:avLst/>
-          </a:prstGeom>
-          <a:solidFill>
-            <a:schemeClr val="accent2">
-              <a:lumMod val="75000"/>
-            </a:schemeClr>
-          </a:solidFill>
-          <a:ln/>
-        </p:spPr>
-        <p:txBody>
-          <a:bodyPr/>
-          <a:lstStyle/>
-          <a:p>
-            <a:endParaRPr lang="en-IN" sz="2400"/>
-          </a:p>
-        </p:txBody>
-      </p:sp>
-      <p:sp>
-        <p:nvSpPr>
-          <p:cNvPr id="15" name="Shape 13"/>
-          <p:cNvSpPr/>
-          <p:nvPr/>
-        </p:nvSpPr>
-        <p:spPr>
-          <a:xfrm>
-            <a:off x="6400800" y="1804416"/>
-            <a:ext cx="5364480" cy="633984"/>
-          </a:xfrm>
-          <a:prstGeom prst="rect">
-            <a:avLst/>
-          </a:prstGeom>
-          <a:solidFill>
-            <a:schemeClr val="tx1"/>
-          </a:solidFill>
-          <a:ln/>
-        </p:spPr>
-        <p:txBody>
-          <a:bodyPr/>
-          <a:lstStyle/>
-          <a:p>
-            <a:endParaRPr lang="en-IN" sz="2400"/>
-          </a:p>
-        </p:txBody>
-      </p:sp>
-      <p:sp>
-        <p:nvSpPr>
-          <p:cNvPr id="16" name="Text 14"/>
-          <p:cNvSpPr/>
-          <p:nvPr/>
-        </p:nvSpPr>
-        <p:spPr>
-          <a:xfrm>
-            <a:off x="6583680" y="1804416"/>
-            <a:ext cx="5059680" cy="633984"/>
+          <p:cNvPr id="18" name="Text 16"/>
+          <p:cNvSpPr/>
+          <p:nvPr/>
+        </p:nvSpPr>
+        <p:spPr>
+          <a:xfrm>
+            <a:off x="8046720" y="2926080"/>
+            <a:ext cx="3657600" cy="487680"/>
           </a:xfrm>
           <a:prstGeom prst="rect">
             <a:avLst/>
@@ -13903,27 +15130,87 @@
           <a:lstStyle/>
           <a:p>
             <a:r>
-              <a:rPr lang="en-US" sz="1733" b="1" dirty="0">
+              <a:rPr lang="en-US" sz="1467" dirty="0">
                 <a:solidFill>
-                  <a:srgbClr val="FFFFFF"/>
+                  <a:srgbClr val="06A77D"/>
                 </a:solidFill>
               </a:rPr>
-              <a:t>Use AI AGENT When:</a:t>
-            </a:r>
-            <a:endParaRPr lang="en-US" sz="1733" dirty="0"/>
-          </a:p>
-        </p:txBody>
-      </p:sp>
-      <p:sp>
-        <p:nvSpPr>
-          <p:cNvPr id="17" name="Text 15"/>
-          <p:cNvSpPr/>
-          <p:nvPr/>
-        </p:nvSpPr>
-        <p:spPr>
-          <a:xfrm>
-            <a:off x="6583680" y="2596896"/>
-            <a:ext cx="4937760" cy="548640"/>
+              <a:t>Natural language + free text</a:t>
+            </a:r>
+            <a:endParaRPr lang="en-US" sz="1467" dirty="0"/>
+          </a:p>
+        </p:txBody>
+      </p:sp>
+      <p:sp>
+        <p:nvSpPr>
+          <p:cNvPr id="19" name="Shape 17"/>
+          <p:cNvSpPr/>
+          <p:nvPr/>
+        </p:nvSpPr>
+        <p:spPr>
+          <a:xfrm>
+            <a:off x="426720" y="3450336"/>
+            <a:ext cx="11338560" cy="487680"/>
+          </a:xfrm>
+          <a:prstGeom prst="rect">
+            <a:avLst/>
+          </a:prstGeom>
+          <a:solidFill>
+            <a:srgbClr val="FFFFFF"/>
+          </a:solidFill>
+          <a:ln/>
+        </p:spPr>
+        <p:txBody>
+          <a:bodyPr/>
+          <a:lstStyle/>
+          <a:p>
+            <a:endParaRPr lang="en-IN" sz="2400"/>
+          </a:p>
+        </p:txBody>
+      </p:sp>
+      <p:sp>
+        <p:nvSpPr>
+          <p:cNvPr id="20" name="Text 18"/>
+          <p:cNvSpPr/>
+          <p:nvPr/>
+        </p:nvSpPr>
+        <p:spPr>
+          <a:xfrm>
+            <a:off x="548640" y="3450336"/>
+            <a:ext cx="3230880" cy="487680"/>
+          </a:xfrm>
+          <a:prstGeom prst="rect">
+            <a:avLst/>
+          </a:prstGeom>
+          <a:noFill/>
+          <a:ln/>
+        </p:spPr>
+        <p:txBody>
+          <a:bodyPr wrap="square" rtlCol="0" anchor="ctr"/>
+          <a:lstStyle/>
+          <a:p>
+            <a:r>
+              <a:rPr lang="en-US" sz="1467" b="1" dirty="0">
+                <a:solidFill>
+                  <a:srgbClr val="0A1628"/>
+                </a:solidFill>
+              </a:rPr>
+              <a:t>Exception Handling</a:t>
+            </a:r>
+            <a:endParaRPr lang="en-US" sz="1467" dirty="0"/>
+          </a:p>
+        </p:txBody>
+      </p:sp>
+      <p:sp>
+        <p:nvSpPr>
+          <p:cNvPr id="21" name="Text 19"/>
+          <p:cNvSpPr/>
+          <p:nvPr/>
+        </p:nvSpPr>
+        <p:spPr>
+          <a:xfrm>
+            <a:off x="4023360" y="3450336"/>
+            <a:ext cx="3657600" cy="487680"/>
           </a:xfrm>
           <a:prstGeom prst="rect">
             <a:avLst/>
@@ -13938,10 +15225,10 @@
             <a:r>
               <a:rPr lang="en-US" sz="1467" dirty="0">
                 <a:solidFill>
-                  <a:srgbClr val="FFFFFF"/>
+                  <a:srgbClr val="5B6E8C"/>
                 </a:solidFill>
               </a:rPr>
-              <a:t>✓  Inputs are variable or unstructured</a:t>
+              <a:t>Manual intervention needed</a:t>
             </a:r>
             <a:endParaRPr lang="en-US" sz="1467" dirty="0"/>
           </a:p>
@@ -13949,14 +15236,14 @@
       </p:sp>
       <p:sp>
         <p:nvSpPr>
-          <p:cNvPr id="18" name="Text 16"/>
-          <p:cNvSpPr/>
-          <p:nvPr/>
-        </p:nvSpPr>
-        <p:spPr>
-          <a:xfrm>
-            <a:off x="6583680" y="3230880"/>
-            <a:ext cx="4937760" cy="548640"/>
+          <p:cNvPr id="22" name="Text 20"/>
+          <p:cNvSpPr/>
+          <p:nvPr/>
+        </p:nvSpPr>
+        <p:spPr>
+          <a:xfrm>
+            <a:off x="8046720" y="3450336"/>
+            <a:ext cx="3657600" cy="487680"/>
           </a:xfrm>
           <a:prstGeom prst="rect">
             <a:avLst/>
@@ -13971,10 +15258,10 @@
             <a:r>
               <a:rPr lang="en-US" sz="1467" dirty="0">
                 <a:solidFill>
-                  <a:srgbClr val="FFFFFF"/>
+                  <a:srgbClr val="06A77D"/>
                 </a:solidFill>
               </a:rPr>
-              <a:t>✓  Urgency or context changes dynamically</a:t>
+              <a:t>Autonomous adaptation</a:t>
             </a:r>
             <a:endParaRPr lang="en-US" sz="1467" dirty="0"/>
           </a:p>
@@ -13982,14 +15269,74 @@
       </p:sp>
       <p:sp>
         <p:nvSpPr>
-          <p:cNvPr id="19" name="Text 17"/>
-          <p:cNvSpPr/>
-          <p:nvPr/>
-        </p:nvSpPr>
-        <p:spPr>
-          <a:xfrm>
-            <a:off x="6583680" y="3864864"/>
-            <a:ext cx="4937760" cy="548640"/>
+          <p:cNvPr id="23" name="Shape 21"/>
+          <p:cNvSpPr/>
+          <p:nvPr/>
+        </p:nvSpPr>
+        <p:spPr>
+          <a:xfrm>
+            <a:off x="426720" y="3974592"/>
+            <a:ext cx="11338560" cy="487680"/>
+          </a:xfrm>
+          <a:prstGeom prst="rect">
+            <a:avLst/>
+          </a:prstGeom>
+          <a:solidFill>
+            <a:srgbClr val="F0F6FF"/>
+          </a:solidFill>
+          <a:ln/>
+        </p:spPr>
+        <p:txBody>
+          <a:bodyPr/>
+          <a:lstStyle/>
+          <a:p>
+            <a:endParaRPr lang="en-IN" sz="2400"/>
+          </a:p>
+        </p:txBody>
+      </p:sp>
+      <p:sp>
+        <p:nvSpPr>
+          <p:cNvPr id="24" name="Text 22"/>
+          <p:cNvSpPr/>
+          <p:nvPr/>
+        </p:nvSpPr>
+        <p:spPr>
+          <a:xfrm>
+            <a:off x="548640" y="3974592"/>
+            <a:ext cx="3230880" cy="487680"/>
+          </a:xfrm>
+          <a:prstGeom prst="rect">
+            <a:avLst/>
+          </a:prstGeom>
+          <a:noFill/>
+          <a:ln/>
+        </p:spPr>
+        <p:txBody>
+          <a:bodyPr wrap="square" rtlCol="0" anchor="ctr"/>
+          <a:lstStyle/>
+          <a:p>
+            <a:r>
+              <a:rPr lang="en-US" sz="1467" b="1" dirty="0">
+                <a:solidFill>
+                  <a:srgbClr val="0A1628"/>
+                </a:solidFill>
+              </a:rPr>
+              <a:t>Urgency Detection</a:t>
+            </a:r>
+            <a:endParaRPr lang="en-US" sz="1467" dirty="0"/>
+          </a:p>
+        </p:txBody>
+      </p:sp>
+      <p:sp>
+        <p:nvSpPr>
+          <p:cNvPr id="25" name="Text 23"/>
+          <p:cNvSpPr/>
+          <p:nvPr/>
+        </p:nvSpPr>
+        <p:spPr>
+          <a:xfrm>
+            <a:off x="4023360" y="3974592"/>
+            <a:ext cx="3657600" cy="487680"/>
           </a:xfrm>
           <a:prstGeom prst="rect">
             <a:avLst/>
@@ -14004,10 +15351,10 @@
             <a:r>
               <a:rPr lang="en-US" sz="1467" dirty="0">
                 <a:solidFill>
-                  <a:srgbClr val="FFFFFF"/>
+                  <a:srgbClr val="5B6E8C"/>
                 </a:solidFill>
               </a:rPr>
-              <a:t>✓  Specialist selection requires reasoning</a:t>
+              <a:t>None</a:t>
             </a:r>
             <a:endParaRPr lang="en-US" sz="1467" dirty="0"/>
           </a:p>
@@ -14015,14 +15362,14 @@
       </p:sp>
       <p:sp>
         <p:nvSpPr>
-          <p:cNvPr id="20" name="Text 18"/>
-          <p:cNvSpPr/>
-          <p:nvPr/>
-        </p:nvSpPr>
-        <p:spPr>
-          <a:xfrm>
-            <a:off x="6583680" y="4498848"/>
-            <a:ext cx="4937760" cy="548640"/>
+          <p:cNvPr id="26" name="Text 24"/>
+          <p:cNvSpPr/>
+          <p:nvPr/>
+        </p:nvSpPr>
+        <p:spPr>
+          <a:xfrm>
+            <a:off x="8046720" y="3974592"/>
+            <a:ext cx="3657600" cy="487680"/>
           </a:xfrm>
           <a:prstGeom prst="rect">
             <a:avLst/>
@@ -14037,10 +15384,10 @@
             <a:r>
               <a:rPr lang="en-US" sz="1467" dirty="0">
                 <a:solidFill>
-                  <a:srgbClr val="FFFFFF"/>
+                  <a:srgbClr val="06A77D"/>
                 </a:solidFill>
               </a:rPr>
-              <a:t>✓  Exceptions are frequent and complex</a:t>
+              <a:t>Real time LLM analysis</a:t>
             </a:r>
             <a:endParaRPr lang="en-US" sz="1467" dirty="0"/>
           </a:p>
@@ -14048,14 +15395,74 @@
       </p:sp>
       <p:sp>
         <p:nvSpPr>
-          <p:cNvPr id="21" name="Text 19"/>
-          <p:cNvSpPr/>
-          <p:nvPr/>
-        </p:nvSpPr>
-        <p:spPr>
-          <a:xfrm>
-            <a:off x="6583680" y="5132832"/>
-            <a:ext cx="4937760" cy="548640"/>
+          <p:cNvPr id="27" name="Shape 25"/>
+          <p:cNvSpPr/>
+          <p:nvPr/>
+        </p:nvSpPr>
+        <p:spPr>
+          <a:xfrm>
+            <a:off x="426720" y="4498848"/>
+            <a:ext cx="11338560" cy="487680"/>
+          </a:xfrm>
+          <a:prstGeom prst="rect">
+            <a:avLst/>
+          </a:prstGeom>
+          <a:solidFill>
+            <a:srgbClr val="FFFFFF"/>
+          </a:solidFill>
+          <a:ln/>
+        </p:spPr>
+        <p:txBody>
+          <a:bodyPr/>
+          <a:lstStyle/>
+          <a:p>
+            <a:endParaRPr lang="en-IN" sz="2400"/>
+          </a:p>
+        </p:txBody>
+      </p:sp>
+      <p:sp>
+        <p:nvSpPr>
+          <p:cNvPr id="28" name="Text 26"/>
+          <p:cNvSpPr/>
+          <p:nvPr/>
+        </p:nvSpPr>
+        <p:spPr>
+          <a:xfrm>
+            <a:off x="548640" y="4498848"/>
+            <a:ext cx="3230880" cy="487680"/>
+          </a:xfrm>
+          <a:prstGeom prst="rect">
+            <a:avLst/>
+          </a:prstGeom>
+          <a:noFill/>
+          <a:ln/>
+        </p:spPr>
+        <p:txBody>
+          <a:bodyPr wrap="square" rtlCol="0" anchor="ctr"/>
+          <a:lstStyle/>
+          <a:p>
+            <a:r>
+              <a:rPr lang="en-US" sz="1467" b="1" dirty="0">
+                <a:solidFill>
+                  <a:srgbClr val="0A1628"/>
+                </a:solidFill>
+              </a:rPr>
+              <a:t>Tool Usage</a:t>
+            </a:r>
+            <a:endParaRPr lang="en-US" sz="1467" dirty="0"/>
+          </a:p>
+        </p:txBody>
+      </p:sp>
+      <p:sp>
+        <p:nvSpPr>
+          <p:cNvPr id="29" name="Text 27"/>
+          <p:cNvSpPr/>
+          <p:nvPr/>
+        </p:nvSpPr>
+        <p:spPr>
+          <a:xfrm>
+            <a:off x="4023360" y="4498848"/>
+            <a:ext cx="3657600" cy="487680"/>
           </a:xfrm>
           <a:prstGeom prst="rect">
             <a:avLst/>
@@ -14070,11 +15477,371 @@
             <a:r>
               <a:rPr lang="en-US" sz="1467" dirty="0">
                 <a:solidFill>
-                  <a:srgbClr val="FFFFFF"/>
+                  <a:srgbClr val="5B6E8C"/>
                 </a:solidFill>
               </a:rPr>
-              <a:t>✓  Personalization improves outcomes</a:t>
-            </a:r>
+              <a:t>Pre-wired integrations</a:t>
+            </a:r>
+            <a:endParaRPr lang="en-US" sz="1467" dirty="0"/>
+          </a:p>
+        </p:txBody>
+      </p:sp>
+      <p:sp>
+        <p:nvSpPr>
+          <p:cNvPr id="30" name="Text 28"/>
+          <p:cNvSpPr/>
+          <p:nvPr/>
+        </p:nvSpPr>
+        <p:spPr>
+          <a:xfrm>
+            <a:off x="8046720" y="4498848"/>
+            <a:ext cx="3657600" cy="487680"/>
+          </a:xfrm>
+          <a:prstGeom prst="rect">
+            <a:avLst/>
+          </a:prstGeom>
+          <a:noFill/>
+          <a:ln/>
+        </p:spPr>
+        <p:txBody>
+          <a:bodyPr wrap="square" rtlCol="0" anchor="ctr"/>
+          <a:lstStyle/>
+          <a:p>
+            <a:r>
+              <a:rPr lang="en-US" sz="1467" dirty="0">
+                <a:solidFill>
+                  <a:srgbClr val="06A77D"/>
+                </a:solidFill>
+              </a:rPr>
+              <a:t>Dynamic tool selection</a:t>
+            </a:r>
+            <a:endParaRPr lang="en-US" sz="1467" dirty="0"/>
+          </a:p>
+        </p:txBody>
+      </p:sp>
+      <p:sp>
+        <p:nvSpPr>
+          <p:cNvPr id="31" name="Shape 29"/>
+          <p:cNvSpPr/>
+          <p:nvPr/>
+        </p:nvSpPr>
+        <p:spPr>
+          <a:xfrm>
+            <a:off x="426720" y="5023104"/>
+            <a:ext cx="11338560" cy="487680"/>
+          </a:xfrm>
+          <a:prstGeom prst="rect">
+            <a:avLst/>
+          </a:prstGeom>
+          <a:solidFill>
+            <a:srgbClr val="F0F6FF"/>
+          </a:solidFill>
+          <a:ln/>
+        </p:spPr>
+        <p:txBody>
+          <a:bodyPr/>
+          <a:lstStyle/>
+          <a:p>
+            <a:endParaRPr lang="en-IN" sz="2400"/>
+          </a:p>
+        </p:txBody>
+      </p:sp>
+      <p:sp>
+        <p:nvSpPr>
+          <p:cNvPr id="32" name="Text 30"/>
+          <p:cNvSpPr/>
+          <p:nvPr/>
+        </p:nvSpPr>
+        <p:spPr>
+          <a:xfrm>
+            <a:off x="548640" y="5023104"/>
+            <a:ext cx="3230880" cy="487680"/>
+          </a:xfrm>
+          <a:prstGeom prst="rect">
+            <a:avLst/>
+          </a:prstGeom>
+          <a:noFill/>
+          <a:ln/>
+        </p:spPr>
+        <p:txBody>
+          <a:bodyPr wrap="square" rtlCol="0" anchor="ctr"/>
+          <a:lstStyle/>
+          <a:p>
+            <a:r>
+              <a:rPr lang="en-US" sz="1467" b="1" dirty="0">
+                <a:solidFill>
+                  <a:srgbClr val="0A1628"/>
+                </a:solidFill>
+              </a:rPr>
+              <a:t>Specialist Routing</a:t>
+            </a:r>
+            <a:endParaRPr lang="en-US" sz="1467" dirty="0"/>
+          </a:p>
+        </p:txBody>
+      </p:sp>
+      <p:sp>
+        <p:nvSpPr>
+          <p:cNvPr id="33" name="Text 31"/>
+          <p:cNvSpPr/>
+          <p:nvPr/>
+        </p:nvSpPr>
+        <p:spPr>
+          <a:xfrm>
+            <a:off x="4023360" y="5023104"/>
+            <a:ext cx="3657600" cy="487680"/>
+          </a:xfrm>
+          <a:prstGeom prst="rect">
+            <a:avLst/>
+          </a:prstGeom>
+          <a:noFill/>
+          <a:ln/>
+        </p:spPr>
+        <p:txBody>
+          <a:bodyPr wrap="square" rtlCol="0" anchor="ctr"/>
+          <a:lstStyle/>
+          <a:p>
+            <a:r>
+              <a:rPr lang="en-US" sz="1467" dirty="0">
+                <a:solidFill>
+                  <a:srgbClr val="5B6E8C"/>
+                </a:solidFill>
+              </a:rPr>
+              <a:t>Department dropdown</a:t>
+            </a:r>
+            <a:endParaRPr lang="en-US" sz="1467" dirty="0"/>
+          </a:p>
+        </p:txBody>
+      </p:sp>
+      <p:sp>
+        <p:nvSpPr>
+          <p:cNvPr id="34" name="Text 32"/>
+          <p:cNvSpPr/>
+          <p:nvPr/>
+        </p:nvSpPr>
+        <p:spPr>
+          <a:xfrm>
+            <a:off x="8046720" y="5023104"/>
+            <a:ext cx="3657600" cy="487680"/>
+          </a:xfrm>
+          <a:prstGeom prst="rect">
+            <a:avLst/>
+          </a:prstGeom>
+          <a:noFill/>
+          <a:ln/>
+        </p:spPr>
+        <p:txBody>
+          <a:bodyPr wrap="square" rtlCol="0" anchor="ctr"/>
+          <a:lstStyle/>
+          <a:p>
+            <a:r>
+              <a:rPr lang="en-US" sz="1467" dirty="0">
+                <a:solidFill>
+                  <a:srgbClr val="06A77D"/>
+                </a:solidFill>
+              </a:rPr>
+              <a:t>Symptom driven matching</a:t>
+            </a:r>
+            <a:endParaRPr lang="en-US" sz="1467" dirty="0"/>
+          </a:p>
+        </p:txBody>
+      </p:sp>
+      <p:sp>
+        <p:nvSpPr>
+          <p:cNvPr id="35" name="Shape 33"/>
+          <p:cNvSpPr/>
+          <p:nvPr/>
+        </p:nvSpPr>
+        <p:spPr>
+          <a:xfrm>
+            <a:off x="426720" y="5547360"/>
+            <a:ext cx="11338560" cy="487680"/>
+          </a:xfrm>
+          <a:prstGeom prst="rect">
+            <a:avLst/>
+          </a:prstGeom>
+          <a:solidFill>
+            <a:srgbClr val="FFFFFF"/>
+          </a:solidFill>
+          <a:ln/>
+        </p:spPr>
+        <p:txBody>
+          <a:bodyPr/>
+          <a:lstStyle/>
+          <a:p>
+            <a:endParaRPr lang="en-IN" sz="2400"/>
+          </a:p>
+        </p:txBody>
+      </p:sp>
+      <p:sp>
+        <p:nvSpPr>
+          <p:cNvPr id="36" name="Text 34"/>
+          <p:cNvSpPr/>
+          <p:nvPr/>
+        </p:nvSpPr>
+        <p:spPr>
+          <a:xfrm>
+            <a:off x="548640" y="5547360"/>
+            <a:ext cx="3230880" cy="487680"/>
+          </a:xfrm>
+          <a:prstGeom prst="rect">
+            <a:avLst/>
+          </a:prstGeom>
+          <a:noFill/>
+          <a:ln/>
+        </p:spPr>
+        <p:txBody>
+          <a:bodyPr wrap="square" rtlCol="0" anchor="ctr"/>
+          <a:lstStyle/>
+          <a:p>
+            <a:r>
+              <a:rPr lang="en-US" sz="1467" b="1" dirty="0">
+                <a:solidFill>
+                  <a:srgbClr val="0A1628"/>
+                </a:solidFill>
+              </a:rPr>
+              <a:t>Personalization</a:t>
+            </a:r>
+            <a:endParaRPr lang="en-US" sz="1467" dirty="0"/>
+          </a:p>
+        </p:txBody>
+      </p:sp>
+      <p:sp>
+        <p:nvSpPr>
+          <p:cNvPr id="37" name="Text 35"/>
+          <p:cNvSpPr/>
+          <p:nvPr/>
+        </p:nvSpPr>
+        <p:spPr>
+          <a:xfrm>
+            <a:off x="4023360" y="5547360"/>
+            <a:ext cx="3657600" cy="487680"/>
+          </a:xfrm>
+          <a:prstGeom prst="rect">
+            <a:avLst/>
+          </a:prstGeom>
+          <a:noFill/>
+          <a:ln/>
+        </p:spPr>
+        <p:txBody>
+          <a:bodyPr wrap="square" rtlCol="0" anchor="ctr"/>
+          <a:lstStyle/>
+          <a:p>
+            <a:r>
+              <a:rPr lang="en-US" sz="1467" dirty="0">
+                <a:solidFill>
+                  <a:srgbClr val="5B6E8C"/>
+                </a:solidFill>
+              </a:rPr>
+              <a:t>None</a:t>
+            </a:r>
+            <a:endParaRPr lang="en-US" sz="1467" dirty="0"/>
+          </a:p>
+        </p:txBody>
+      </p:sp>
+      <p:sp>
+        <p:nvSpPr>
+          <p:cNvPr id="38" name="Text 36"/>
+          <p:cNvSpPr/>
+          <p:nvPr/>
+        </p:nvSpPr>
+        <p:spPr>
+          <a:xfrm>
+            <a:off x="8046720" y="5547360"/>
+            <a:ext cx="3657600" cy="487680"/>
+          </a:xfrm>
+          <a:prstGeom prst="rect">
+            <a:avLst/>
+          </a:prstGeom>
+          <a:noFill/>
+          <a:ln/>
+        </p:spPr>
+        <p:txBody>
+          <a:bodyPr wrap="square" rtlCol="0" anchor="ctr"/>
+          <a:lstStyle/>
+          <a:p>
+            <a:r>
+              <a:rPr lang="en-US" sz="1467" dirty="0">
+                <a:solidFill>
+                  <a:srgbClr val="06A77D"/>
+                </a:solidFill>
+              </a:rPr>
+              <a:t>Memory of patient history</a:t>
+            </a:r>
+            <a:endParaRPr lang="en-US" sz="1467" dirty="0"/>
+          </a:p>
+        </p:txBody>
+      </p:sp>
+      <p:sp>
+        <p:nvSpPr>
+          <p:cNvPr id="40" name="Text 38"/>
+          <p:cNvSpPr/>
+          <p:nvPr/>
+        </p:nvSpPr>
+        <p:spPr>
+          <a:xfrm>
+            <a:off x="548640" y="6071616"/>
+            <a:ext cx="3230880" cy="487680"/>
+          </a:xfrm>
+          <a:prstGeom prst="rect">
+            <a:avLst/>
+          </a:prstGeom>
+          <a:noFill/>
+          <a:ln/>
+        </p:spPr>
+        <p:txBody>
+          <a:bodyPr wrap="square" rtlCol="0" anchor="ctr"/>
+          <a:lstStyle/>
+          <a:p>
+            <a:endParaRPr lang="en-US" sz="1467" dirty="0"/>
+          </a:p>
+        </p:txBody>
+      </p:sp>
+      <p:sp>
+        <p:nvSpPr>
+          <p:cNvPr id="41" name="Text 39"/>
+          <p:cNvSpPr/>
+          <p:nvPr/>
+        </p:nvSpPr>
+        <p:spPr>
+          <a:xfrm>
+            <a:off x="4023360" y="6071616"/>
+            <a:ext cx="3657600" cy="487680"/>
+          </a:xfrm>
+          <a:prstGeom prst="rect">
+            <a:avLst/>
+          </a:prstGeom>
+          <a:noFill/>
+          <a:ln/>
+        </p:spPr>
+        <p:txBody>
+          <a:bodyPr wrap="square" rtlCol="0" anchor="ctr"/>
+          <a:lstStyle/>
+          <a:p>
+            <a:endParaRPr lang="en-US" sz="1467" dirty="0"/>
+          </a:p>
+        </p:txBody>
+      </p:sp>
+      <p:sp>
+        <p:nvSpPr>
+          <p:cNvPr id="42" name="Text 40"/>
+          <p:cNvSpPr/>
+          <p:nvPr/>
+        </p:nvSpPr>
+        <p:spPr>
+          <a:xfrm>
+            <a:off x="8046720" y="6071616"/>
+            <a:ext cx="3657600" cy="487680"/>
+          </a:xfrm>
+          <a:prstGeom prst="rect">
+            <a:avLst/>
+          </a:prstGeom>
+          <a:noFill/>
+          <a:ln/>
+        </p:spPr>
+        <p:txBody>
+          <a:bodyPr wrap="square" rtlCol="0" anchor="ctr"/>
+          <a:lstStyle/>
+          <a:p>
             <a:endParaRPr lang="en-US" sz="1467" dirty="0"/>
           </a:p>
         </p:txBody>
